--- a/content/05-teaching-resources/slides/core/05-project-management-and-risk-assessment.pptx
+++ b/content/05-teaching-resources/slides/core/05-project-management-and-risk-assessment.pptx
@@ -8,7 +8,7 @@
     <p:sldId id="256" r:id="rId7"/>
     <p:sldId id="257" r:id="rId8"/>
     <p:sldId id="258" r:id="rId9"/>
-    <p:sldId id="259" r:id="rId11"/>
+    <p:sldId id="259" r:id="rId10"/>
     <p:sldId id="260" r:id="rId12"/>
     <p:sldId id="261" r:id="rId13"/>
     <p:sldId id="262" r:id="rId14"/>
@@ -16,6 +16,14 @@
     <p:sldId id="264" r:id="rId16"/>
     <p:sldId id="265" r:id="rId17"/>
     <p:sldId id="266" r:id="rId18"/>
+    <p:sldId id="267" r:id="rId19"/>
+    <p:sldId id="268" r:id="rId20"/>
+    <p:sldId id="269" r:id="rId21"/>
+    <p:sldId id="270" r:id="rId22"/>
+    <p:sldId id="271" r:id="rId23"/>
+    <p:sldId id="272" r:id="rId24"/>
+    <p:sldId id="273" r:id="rId25"/>
+    <p:sldId id="274" r:id="rId26"/>
   </p:sldIdLst>
   <p:sldSz cx="12191695" cy="6858000" type="screen4x3"/>
   <p:notesSz cx="6858000" cy="9144000"/>
@@ -582,7 +590,22 @@
           <a:lstStyle/>
           <a:p>
             <a:r>
-              <a:t>Task 1 of the Employer Set Project asks students to produce a Gantt chart, so give this plenty of practice.</a:t>
+              <a:t>Answers:</a:t>
+            </a:r>
+          </a:p>
+          <a:p>
+            <a:r>
+              <a:t>1. Likelihood x severity.</a:t>
+            </a:r>
+          </a:p>
+          <a:p>
+            <a:r>
+              <a:t>2. 25.</a:t>
+            </a:r>
+          </a:p>
+          <a:p>
+            <a:r>
+              <a:t>3. Any three: the risk, who/what is harmed and how, mitigations, owner, due date.</a:t>
             </a:r>
           </a:p>
         </p:txBody>
@@ -652,7 +675,22 @@
           <a:lstStyle/>
           <a:p>
             <a:r>
-              <a:t>Give students a few minutes to answer on mini whiteboards or paper, then reveal the answers on the next slide.</a:t>
+              <a:t>Answers:</a:t>
+            </a:r>
+          </a:p>
+          <a:p>
+            <a:r>
+              <a:t>1. Agile.</a:t>
+            </a:r>
+          </a:p>
+          <a:p>
+            <a:r>
+              <a:t>2. Changes late in the project are costly.</a:t>
+            </a:r>
+          </a:p>
+          <a:p>
+            <a:r>
+              <a:t>3. When requirements are clear and unlikely to change.</a:t>
             </a:r>
           </a:p>
         </p:txBody>
@@ -722,7 +760,7 @@
           <a:lstStyle/>
           <a:p>
             <a:r>
-              <a:t>Talk through any answers the class found difficult.</a:t>
+              <a:t>Task 1 of the Employer Set Project asks students to produce a Gantt chart, so give this plenty of practice.</a:t>
             </a:r>
           </a:p>
         </p:txBody>
@@ -748,6 +786,316 @@
 </file>
 
 <file path=ppt/notesSlides/notesSlide5.xml><?xml version="1.0" encoding="utf-8"?>
+<p:notes xmlns:a="http://schemas.openxmlformats.org/drawingml/2006/main" xmlns:p="http://schemas.openxmlformats.org/presentationml/2006/main" xmlns:r="http://schemas.openxmlformats.org/officeDocument/2006/relationships">
+  <p:cSld>
+    <p:spTree>
+      <p:nvGrpSpPr>
+        <p:cNvPr id="1" name=""/>
+        <p:cNvGrpSpPr/>
+        <p:nvPr/>
+      </p:nvGrpSpPr>
+      <p:grpSpPr>
+        <a:xfrm>
+          <a:off x="0" y="0"/>
+          <a:ext cx="0" cy="0"/>
+          <a:chOff x="0" y="0"/>
+          <a:chExt cx="0" cy="0"/>
+        </a:xfrm>
+      </p:grpSpPr>
+      <p:sp>
+        <p:nvSpPr>
+          <p:cNvPr id="2" name="Slide Image Placeholder 1"/>
+          <p:cNvSpPr>
+            <a:spLocks noGrp="1"/>
+          </p:cNvSpPr>
+          <p:nvPr>
+            <p:ph type="sldImg" idx="2"/>
+          </p:nvPr>
+        </p:nvSpPr>
+        <p:spPr/>
+      </p:sp>
+      <p:sp>
+        <p:nvSpPr>
+          <p:cNvPr id="3" name="Notes Placeholder 2"/>
+          <p:cNvSpPr>
+            <a:spLocks noGrp="1"/>
+          </p:cNvSpPr>
+          <p:nvPr>
+            <p:ph type="body" idx="3" sz="quarter"/>
+          </p:nvPr>
+        </p:nvSpPr>
+        <p:spPr/>
+        <p:txBody>
+          <a:bodyPr/>
+          <a:lstStyle/>
+          <a:p>
+            <a:r>
+              <a:t>Answers:</a:t>
+            </a:r>
+          </a:p>
+          <a:p>
+            <a:r>
+              <a:t>1. Tasks as bars on a timeline.</a:t>
+            </a:r>
+          </a:p>
+          <a:p>
+            <a:r>
+              <a:t>2. The shortest possible length of the project.</a:t>
+            </a:r>
+          </a:p>
+          <a:p>
+            <a:r>
+              <a:t>3. E.g. To do, Doing, Done.</a:t>
+            </a:r>
+          </a:p>
+        </p:txBody>
+      </p:sp>
+      <p:sp>
+        <p:nvSpPr>
+          <p:cNvPr id="4" name="Slide Number Placeholder 3"/>
+          <p:cNvSpPr>
+            <a:spLocks noGrp="1"/>
+          </p:cNvSpPr>
+          <p:nvPr>
+            <p:ph type="sldNum" idx="5" sz="quarter"/>
+          </p:nvPr>
+        </p:nvSpPr>
+        <p:spPr/>
+      </p:sp>
+    </p:spTree>
+  </p:cSld>
+  <p:clrMapOvr>
+    <a:masterClrMapping/>
+  </p:clrMapOvr>
+</p:notes>
+</file>
+
+<file path=ppt/notesSlides/notesSlide6.xml><?xml version="1.0" encoding="utf-8"?>
+<p:notes xmlns:a="http://schemas.openxmlformats.org/drawingml/2006/main" xmlns:p="http://schemas.openxmlformats.org/presentationml/2006/main" xmlns:r="http://schemas.openxmlformats.org/officeDocument/2006/relationships">
+  <p:cSld>
+    <p:spTree>
+      <p:nvGrpSpPr>
+        <p:cNvPr id="1" name=""/>
+        <p:cNvGrpSpPr/>
+        <p:nvPr/>
+      </p:nvGrpSpPr>
+      <p:grpSpPr>
+        <a:xfrm>
+          <a:off x="0" y="0"/>
+          <a:ext cx="0" cy="0"/>
+          <a:chOff x="0" y="0"/>
+          <a:chExt cx="0" cy="0"/>
+        </a:xfrm>
+      </p:grpSpPr>
+      <p:sp>
+        <p:nvSpPr>
+          <p:cNvPr id="2" name="Slide Image Placeholder 1"/>
+          <p:cNvSpPr>
+            <a:spLocks noGrp="1"/>
+          </p:cNvSpPr>
+          <p:nvPr>
+            <p:ph type="sldImg" idx="2"/>
+          </p:nvPr>
+        </p:nvSpPr>
+        <p:spPr/>
+      </p:sp>
+      <p:sp>
+        <p:nvSpPr>
+          <p:cNvPr id="3" name="Notes Placeholder 2"/>
+          <p:cNvSpPr>
+            <a:spLocks noGrp="1"/>
+          </p:cNvSpPr>
+          <p:nvPr>
+            <p:ph type="body" idx="3" sz="quarter"/>
+          </p:nvPr>
+        </p:nvSpPr>
+        <p:spPr/>
+        <p:txBody>
+          <a:bodyPr/>
+          <a:lstStyle/>
+          <a:p>
+            <a:r>
+              <a:t>Answers:</a:t>
+            </a:r>
+          </a:p>
+          <a:p>
+            <a:r>
+              <a:t>1. Time a task can slip without delaying the project.</a:t>
+            </a:r>
+          </a:p>
+          <a:p>
+            <a:r>
+              <a:t>2. The whole project is delayed.</a:t>
+            </a:r>
+          </a:p>
+          <a:p>
+            <a:r>
+              <a:t>3. Each task's duration and dependencies.</a:t>
+            </a:r>
+          </a:p>
+        </p:txBody>
+      </p:sp>
+      <p:sp>
+        <p:nvSpPr>
+          <p:cNvPr id="4" name="Slide Number Placeholder 3"/>
+          <p:cNvSpPr>
+            <a:spLocks noGrp="1"/>
+          </p:cNvSpPr>
+          <p:nvPr>
+            <p:ph type="sldNum" idx="5" sz="quarter"/>
+          </p:nvPr>
+        </p:nvSpPr>
+        <p:spPr/>
+      </p:sp>
+    </p:spTree>
+  </p:cSld>
+  <p:clrMapOvr>
+    <a:masterClrMapping/>
+  </p:clrMapOvr>
+</p:notes>
+</file>
+
+<file path=ppt/notesSlides/notesSlide7.xml><?xml version="1.0" encoding="utf-8"?>
+<p:notes xmlns:a="http://schemas.openxmlformats.org/drawingml/2006/main" xmlns:p="http://schemas.openxmlformats.org/presentationml/2006/main" xmlns:r="http://schemas.openxmlformats.org/officeDocument/2006/relationships">
+  <p:cSld>
+    <p:spTree>
+      <p:nvGrpSpPr>
+        <p:cNvPr id="1" name=""/>
+        <p:cNvGrpSpPr/>
+        <p:nvPr/>
+      </p:nvGrpSpPr>
+      <p:grpSpPr>
+        <a:xfrm>
+          <a:off x="0" y="0"/>
+          <a:ext cx="0" cy="0"/>
+          <a:chOff x="0" y="0"/>
+          <a:chExt cx="0" cy="0"/>
+        </a:xfrm>
+      </p:grpSpPr>
+      <p:sp>
+        <p:nvSpPr>
+          <p:cNvPr id="2" name="Slide Image Placeholder 1"/>
+          <p:cNvSpPr>
+            <a:spLocks noGrp="1"/>
+          </p:cNvSpPr>
+          <p:nvPr>
+            <p:ph type="sldImg" idx="2"/>
+          </p:nvPr>
+        </p:nvSpPr>
+        <p:spPr/>
+      </p:sp>
+      <p:sp>
+        <p:nvSpPr>
+          <p:cNvPr id="3" name="Notes Placeholder 2"/>
+          <p:cNvSpPr>
+            <a:spLocks noGrp="1"/>
+          </p:cNvSpPr>
+          <p:nvPr>
+            <p:ph type="body" idx="3" sz="quarter"/>
+          </p:nvPr>
+        </p:nvSpPr>
+        <p:spPr/>
+        <p:txBody>
+          <a:bodyPr/>
+          <a:lstStyle/>
+          <a:p>
+            <a:r>
+              <a:t>Give students a few minutes to answer on mini whiteboards or paper, then reveal the answers on the next slide.</a:t>
+            </a:r>
+          </a:p>
+        </p:txBody>
+      </p:sp>
+      <p:sp>
+        <p:nvSpPr>
+          <p:cNvPr id="4" name="Slide Number Placeholder 3"/>
+          <p:cNvSpPr>
+            <a:spLocks noGrp="1"/>
+          </p:cNvSpPr>
+          <p:nvPr>
+            <p:ph type="sldNum" idx="5" sz="quarter"/>
+          </p:nvPr>
+        </p:nvSpPr>
+        <p:spPr/>
+      </p:sp>
+    </p:spTree>
+  </p:cSld>
+  <p:clrMapOvr>
+    <a:masterClrMapping/>
+  </p:clrMapOvr>
+</p:notes>
+</file>
+
+<file path=ppt/notesSlides/notesSlide8.xml><?xml version="1.0" encoding="utf-8"?>
+<p:notes xmlns:a="http://schemas.openxmlformats.org/drawingml/2006/main" xmlns:p="http://schemas.openxmlformats.org/presentationml/2006/main" xmlns:r="http://schemas.openxmlformats.org/officeDocument/2006/relationships">
+  <p:cSld>
+    <p:spTree>
+      <p:nvGrpSpPr>
+        <p:cNvPr id="1" name=""/>
+        <p:cNvGrpSpPr/>
+        <p:nvPr/>
+      </p:nvGrpSpPr>
+      <p:grpSpPr>
+        <a:xfrm>
+          <a:off x="0" y="0"/>
+          <a:ext cx="0" cy="0"/>
+          <a:chOff x="0" y="0"/>
+          <a:chExt cx="0" cy="0"/>
+        </a:xfrm>
+      </p:grpSpPr>
+      <p:sp>
+        <p:nvSpPr>
+          <p:cNvPr id="2" name="Slide Image Placeholder 1"/>
+          <p:cNvSpPr>
+            <a:spLocks noGrp="1"/>
+          </p:cNvSpPr>
+          <p:nvPr>
+            <p:ph type="sldImg" idx="2"/>
+          </p:nvPr>
+        </p:nvSpPr>
+        <p:spPr/>
+      </p:sp>
+      <p:sp>
+        <p:nvSpPr>
+          <p:cNvPr id="3" name="Notes Placeholder 2"/>
+          <p:cNvSpPr>
+            <a:spLocks noGrp="1"/>
+          </p:cNvSpPr>
+          <p:nvPr>
+            <p:ph type="body" idx="3" sz="quarter"/>
+          </p:nvPr>
+        </p:nvSpPr>
+        <p:spPr/>
+        <p:txBody>
+          <a:bodyPr/>
+          <a:lstStyle/>
+          <a:p>
+            <a:r>
+              <a:t>Talk through any answers the class found difficult.</a:t>
+            </a:r>
+          </a:p>
+        </p:txBody>
+      </p:sp>
+      <p:sp>
+        <p:nvSpPr>
+          <p:cNvPr id="4" name="Slide Number Placeholder 3"/>
+          <p:cNvSpPr>
+            <a:spLocks noGrp="1"/>
+          </p:cNvSpPr>
+          <p:nvPr>
+            <p:ph type="sldNum" idx="5" sz="quarter"/>
+          </p:nvPr>
+        </p:nvSpPr>
+        <p:spPr/>
+      </p:sp>
+    </p:spTree>
+  </p:cSld>
+  <p:clrMapOvr>
+    <a:masterClrMapping/>
+  </p:clrMapOvr>
+</p:notes>
+</file>
+
+<file path=ppt/notesSlides/notesSlide9.xml><?xml version="1.0" encoding="utf-8"?>
 <p:notes xmlns:a="http://schemas.openxmlformats.org/drawingml/2006/main" xmlns:p="http://schemas.openxmlformats.org/presentationml/2006/main" xmlns:r="http://schemas.openxmlformats.org/officeDocument/2006/relationships">
   <p:cSld>
     <p:spTree>
@@ -4196,7 +4544,7 @@
                 </a:solidFill>
                 <a:latin typeface="Cambria"/>
               </a:rPr>
-              <a:t>Activity: Plan the PC rollout</a:t>
+              <a:t>Project management techniques</a:t>
             </a:r>
           </a:p>
         </p:txBody>
@@ -4263,6 +4611,4389 @@
                 <a:latin typeface="Calibri"/>
               </a:rPr>
               <a:t>10</a:t>
+            </a:r>
+          </a:p>
+        </p:txBody>
+      </p:sp>
+      <p:sp>
+        <p:nvSpPr>
+          <p:cNvPr id="6" name="TextBox 5"/>
+          <p:cNvSpPr txBox="1"/>
+          <p:nvPr/>
+        </p:nvSpPr>
+        <p:spPr>
+          <a:xfrm>
+            <a:off x="548640" y="1554480"/>
+            <a:ext cx="6720840" cy="4617720"/>
+          </a:xfrm>
+          <a:prstGeom prst="rect">
+            <a:avLst/>
+          </a:prstGeom>
+          <a:noFill/>
+        </p:spPr>
+        <p:txBody>
+          <a:bodyPr wrap="square" lIns="0" rIns="0" tIns="0" bIns="0">
+            <a:spAutoFit/>
+          </a:bodyPr>
+          <a:lstStyle/>
+          <a:p>
+            <a:pPr>
+              <a:spcAft>
+                <a:spcPts val="1200"/>
+              </a:spcAft>
+            </a:pPr>
+            <a:r>
+              <a:rPr sz="2000" b="0">
+                <a:solidFill>
+                  <a:srgbClr val="202122"/>
+                </a:solidFill>
+                <a:latin typeface="Calibri"/>
+              </a:rPr>
+              <a:t>Gantt charts show each task as a bar on a timeline, so you can see what happens when and what overlaps. They're easy to read and great for progress meetings.</a:t>
+            </a:r>
+          </a:p>
+          <a:p>
+            <a:pPr>
+              <a:spcAft>
+                <a:spcPts val="1200"/>
+              </a:spcAft>
+            </a:pPr>
+            <a:r>
+              <a:rPr sz="2000" b="0">
+                <a:solidFill>
+                  <a:srgbClr val="202122"/>
+                </a:solidFill>
+                <a:latin typeface="Calibri"/>
+              </a:rPr>
+              <a:t>A precedence table lists each task, its duration and which tasks must finish before it can start.</a:t>
+            </a:r>
+          </a:p>
+          <a:p>
+            <a:pPr>
+              <a:spcAft>
+                <a:spcPts val="1200"/>
+              </a:spcAft>
+            </a:pPr>
+            <a:r>
+              <a:rPr sz="2000" b="0">
+                <a:solidFill>
+                  <a:srgbClr val="202122"/>
+                </a:solidFill>
+                <a:latin typeface="Calibri"/>
+              </a:rPr>
+              <a:t>Critical Path Analysis (CPA) uses those dependencies to find the longest chain of tasks. That chain sets the shortest possible project length.</a:t>
+            </a:r>
+          </a:p>
+          <a:p>
+            <a:pPr>
+              <a:spcAft>
+                <a:spcPts val="1200"/>
+              </a:spcAft>
+            </a:pPr>
+            <a:r>
+              <a:rPr sz="2000" b="0">
+                <a:solidFill>
+                  <a:srgbClr val="202122"/>
+                </a:solidFill>
+                <a:latin typeface="Calibri"/>
+              </a:rPr>
+              <a:t>PERT charts show tasks as a network and use optimistic, likely and pessimistic time estimates.</a:t>
+            </a:r>
+          </a:p>
+          <a:p>
+            <a:pPr>
+              <a:spcAft>
+                <a:spcPts val="1200"/>
+              </a:spcAft>
+            </a:pPr>
+            <a:r>
+              <a:rPr sz="2000" b="0">
+                <a:solidFill>
+                  <a:srgbClr val="202122"/>
+                </a:solidFill>
+                <a:latin typeface="Calibri"/>
+              </a:rPr>
+              <a:t>Kanban boards move task cards through columns such as To do, Doing and Done.</a:t>
+            </a:r>
+          </a:p>
+        </p:txBody>
+      </p:sp>
+      <p:sp>
+        <p:nvSpPr>
+          <p:cNvPr id="7" name="Rounded Rectangle 6"/>
+          <p:cNvSpPr/>
+          <p:nvPr/>
+        </p:nvSpPr>
+        <p:spPr>
+          <a:xfrm>
+            <a:off x="7772400" y="1554480"/>
+            <a:ext cx="3867912" cy="4526280"/>
+          </a:xfrm>
+          <a:prstGeom prst="roundRect">
+            <a:avLst>
+              <a:gd name="adj" fmla="val 8000"/>
+            </a:avLst>
+          </a:prstGeom>
+          <a:solidFill>
+            <a:srgbClr val="03306E"/>
+          </a:solidFill>
+          <a:ln>
+            <a:noFill/>
+          </a:ln>
+          <a:effectLst/>
+        </p:spPr>
+        <p:style>
+          <a:lnRef idx="1">
+            <a:schemeClr val="accent1"/>
+          </a:lnRef>
+          <a:fillRef idx="3">
+            <a:schemeClr val="accent1"/>
+          </a:fillRef>
+          <a:effectRef idx="2">
+            <a:schemeClr val="accent1"/>
+          </a:effectRef>
+          <a:fontRef idx="minor">
+            <a:schemeClr val="lt1"/>
+          </a:fontRef>
+        </p:style>
+        <p:txBody>
+          <a:bodyPr rtlCol="0" anchor="ctr"/>
+          <a:lstStyle/>
+          <a:p/>
+        </p:txBody>
+      </p:sp>
+      <p:sp>
+        <p:nvSpPr>
+          <p:cNvPr id="8" name="Oval 7"/>
+          <p:cNvSpPr/>
+          <p:nvPr/>
+        </p:nvSpPr>
+        <p:spPr>
+          <a:xfrm>
+            <a:off x="8046720" y="1828800"/>
+            <a:ext cx="548640" cy="548640"/>
+          </a:xfrm>
+          <a:prstGeom prst="ellipse">
+            <a:avLst/>
+          </a:prstGeom>
+          <a:solidFill>
+            <a:srgbClr val="F2B705"/>
+          </a:solidFill>
+          <a:ln>
+            <a:noFill/>
+          </a:ln>
+          <a:effectLst/>
+        </p:spPr>
+        <p:style>
+          <a:lnRef idx="1">
+            <a:schemeClr val="accent1"/>
+          </a:lnRef>
+          <a:fillRef idx="3">
+            <a:schemeClr val="accent1"/>
+          </a:fillRef>
+          <a:effectRef idx="2">
+            <a:schemeClr val="accent1"/>
+          </a:effectRef>
+          <a:fontRef idx="minor">
+            <a:schemeClr val="lt1"/>
+          </a:fontRef>
+        </p:style>
+        <p:txBody>
+          <a:bodyPr rtlCol="0" anchor="ctr" lIns="0" rIns="0" tIns="0" bIns="0"/>
+          <a:lstStyle/>
+          <a:p>
+            <a:pPr algn="ctr"/>
+            <a:r>
+              <a:rPr sz="1300" b="1">
+                <a:solidFill>
+                  <a:srgbClr val="202122"/>
+                </a:solidFill>
+                <a:latin typeface="Calibri"/>
+              </a:rPr>
+              <a:t>e.g.</a:t>
+            </a:r>
+          </a:p>
+        </p:txBody>
+      </p:sp>
+      <p:sp>
+        <p:nvSpPr>
+          <p:cNvPr id="9" name="TextBox 8"/>
+          <p:cNvSpPr txBox="1"/>
+          <p:nvPr/>
+        </p:nvSpPr>
+        <p:spPr>
+          <a:xfrm>
+            <a:off x="8046720" y="2560320"/>
+            <a:ext cx="3291840" cy="365760"/>
+          </a:xfrm>
+          <a:prstGeom prst="rect">
+            <a:avLst/>
+          </a:prstGeom>
+          <a:noFill/>
+        </p:spPr>
+        <p:txBody>
+          <a:bodyPr wrap="square" anchor="t" lIns="0" rIns="0" tIns="0" bIns="0"/>
+          <a:lstStyle/>
+          <a:p>
+            <a:pPr algn="l"/>
+            <a:r>
+              <a:rPr sz="1300" b="1" i="0">
+                <a:solidFill>
+                  <a:srgbClr val="A9C8F0"/>
+                </a:solidFill>
+                <a:latin typeface="Calibri"/>
+              </a:rPr>
+              <a:t>EXAMPLE</a:t>
+            </a:r>
+          </a:p>
+        </p:txBody>
+      </p:sp>
+      <p:sp>
+        <p:nvSpPr>
+          <p:cNvPr id="10" name="TextBox 9"/>
+          <p:cNvSpPr txBox="1"/>
+          <p:nvPr/>
+        </p:nvSpPr>
+        <p:spPr>
+          <a:xfrm>
+            <a:off x="8046720" y="2971800"/>
+            <a:ext cx="3291840" cy="2971800"/>
+          </a:xfrm>
+          <a:prstGeom prst="rect">
+            <a:avLst/>
+          </a:prstGeom>
+          <a:noFill/>
+        </p:spPr>
+        <p:txBody>
+          <a:bodyPr wrap="square" anchor="t" lIns="0" rIns="0" tIns="0" bIns="0"/>
+          <a:lstStyle/>
+          <a:p>
+            <a:pPr algn="l"/>
+            <a:r>
+              <a:rPr sz="1900" b="0" i="0">
+                <a:solidFill>
+                  <a:srgbClr val="FFFFFF"/>
+                </a:solidFill>
+                <a:latin typeface="Cambria"/>
+              </a:rPr>
+              <a:t>Rolling out 30 PCs: the Gantt chart shows imaging runs alongside desk installation, while the critical path runs through ordering, imaging, installing and testing.</a:t>
+            </a:r>
+          </a:p>
+        </p:txBody>
+      </p:sp>
+    </p:spTree>
+  </p:cSld>
+  <p:clrMapOvr>
+    <a:masterClrMapping/>
+  </p:clrMapOvr>
+</p:sld>
+</file>
+
+<file path=ppt/slides/slide11.xml><?xml version="1.0" encoding="utf-8"?>
+<p:sld xmlns:a="http://schemas.openxmlformats.org/drawingml/2006/main" xmlns:p="http://schemas.openxmlformats.org/presentationml/2006/main" xmlns:r="http://schemas.openxmlformats.org/officeDocument/2006/relationships">
+  <p:cSld>
+    <p:bg>
+      <p:bgPr>
+        <a:solidFill>
+          <a:srgbClr val="FFFFFF"/>
+        </a:solidFill>
+        <a:effectLst/>
+      </p:bgPr>
+    </p:bg>
+    <p:spTree>
+      <p:nvGrpSpPr>
+        <p:cNvPr id="1" name=""/>
+        <p:cNvGrpSpPr/>
+        <p:nvPr/>
+      </p:nvGrpSpPr>
+      <p:grpSpPr/>
+      <p:sp>
+        <p:nvSpPr>
+          <p:cNvPr id="2" name="TextBox 1"/>
+          <p:cNvSpPr txBox="1"/>
+          <p:nvPr/>
+        </p:nvSpPr>
+        <p:spPr>
+          <a:xfrm>
+            <a:off x="548640" y="320040"/>
+            <a:ext cx="11094415" cy="274320"/>
+          </a:xfrm>
+          <a:prstGeom prst="rect">
+            <a:avLst/>
+          </a:prstGeom>
+          <a:noFill/>
+        </p:spPr>
+        <p:txBody>
+          <a:bodyPr wrap="square" anchor="t" lIns="0" rIns="0" tIns="0" bIns="0"/>
+          <a:lstStyle/>
+          <a:p>
+            <a:pPr algn="l"/>
+            <a:r>
+              <a:rPr sz="1100" b="1" i="0">
+                <a:solidFill>
+                  <a:srgbClr val="54595D"/>
+                </a:solidFill>
+                <a:latin typeface="Calibri"/>
+              </a:rPr>
+              <a:t>CORE COMPONENT  ·  Core Paper 1</a:t>
+            </a:r>
+          </a:p>
+        </p:txBody>
+      </p:sp>
+      <p:sp>
+        <p:nvSpPr>
+          <p:cNvPr id="3" name="TextBox 2"/>
+          <p:cNvSpPr txBox="1"/>
+          <p:nvPr/>
+        </p:nvSpPr>
+        <p:spPr>
+          <a:xfrm>
+            <a:off x="548640" y="566928"/>
+            <a:ext cx="11094415" cy="822960"/>
+          </a:xfrm>
+          <a:prstGeom prst="rect">
+            <a:avLst/>
+          </a:prstGeom>
+          <a:noFill/>
+        </p:spPr>
+        <p:txBody>
+          <a:bodyPr wrap="square" anchor="ctr" lIns="0" rIns="0" tIns="0" bIns="0"/>
+          <a:lstStyle/>
+          <a:p>
+            <a:pPr algn="l"/>
+            <a:r>
+              <a:rPr sz="3200" b="1" i="0">
+                <a:solidFill>
+                  <a:srgbClr val="03306E"/>
+                </a:solidFill>
+                <a:latin typeface="Cambria"/>
+              </a:rPr>
+              <a:t>Project management techniques</a:t>
+            </a:r>
+          </a:p>
+        </p:txBody>
+      </p:sp>
+      <p:sp>
+        <p:nvSpPr>
+          <p:cNvPr id="4" name="TextBox 3"/>
+          <p:cNvSpPr txBox="1"/>
+          <p:nvPr/>
+        </p:nvSpPr>
+        <p:spPr>
+          <a:xfrm>
+            <a:off x="548640" y="6446520"/>
+            <a:ext cx="8229600" cy="274320"/>
+          </a:xfrm>
+          <a:prstGeom prst="rect">
+            <a:avLst/>
+          </a:prstGeom>
+          <a:noFill/>
+        </p:spPr>
+        <p:txBody>
+          <a:bodyPr wrap="square" anchor="t" lIns="0" rIns="0" tIns="0" bIns="0"/>
+          <a:lstStyle/>
+          <a:p>
+            <a:pPr algn="l"/>
+            <a:r>
+              <a:rPr sz="1000" b="0" i="0">
+                <a:solidFill>
+                  <a:srgbClr val="54595D"/>
+                </a:solidFill>
+                <a:latin typeface="Calibri"/>
+              </a:rPr>
+              <a:t>Digital Support and Security T Level  ·  Project Management and Risk Assessment</a:t>
+            </a:r>
+          </a:p>
+        </p:txBody>
+      </p:sp>
+      <p:sp>
+        <p:nvSpPr>
+          <p:cNvPr id="5" name="TextBox 4"/>
+          <p:cNvSpPr txBox="1"/>
+          <p:nvPr/>
+        </p:nvSpPr>
+        <p:spPr>
+          <a:xfrm>
+            <a:off x="10728655" y="6446520"/>
+            <a:ext cx="914400" cy="274320"/>
+          </a:xfrm>
+          <a:prstGeom prst="rect">
+            <a:avLst/>
+          </a:prstGeom>
+          <a:noFill/>
+        </p:spPr>
+        <p:txBody>
+          <a:bodyPr wrap="square" anchor="t" lIns="0" rIns="0" tIns="0" bIns="0"/>
+          <a:lstStyle/>
+          <a:p>
+            <a:pPr algn="r"/>
+            <a:r>
+              <a:rPr sz="1000" b="0" i="0">
+                <a:solidFill>
+                  <a:srgbClr val="54595D"/>
+                </a:solidFill>
+                <a:latin typeface="Calibri"/>
+              </a:rPr>
+              <a:t>11</a:t>
+            </a:r>
+          </a:p>
+        </p:txBody>
+      </p:sp>
+      <p:sp>
+        <p:nvSpPr>
+          <p:cNvPr id="6" name="Rounded Rectangle 5"/>
+          <p:cNvSpPr/>
+          <p:nvPr/>
+        </p:nvSpPr>
+        <p:spPr>
+          <a:xfrm>
+            <a:off x="548640" y="1600200"/>
+            <a:ext cx="3515258" cy="2148840"/>
+          </a:xfrm>
+          <a:prstGeom prst="roundRect">
+            <a:avLst>
+              <a:gd name="adj" fmla="val 6000"/>
+            </a:avLst>
+          </a:prstGeom>
+          <a:solidFill>
+            <a:srgbClr val="EAF3FF"/>
+          </a:solidFill>
+          <a:ln>
+            <a:noFill/>
+          </a:ln>
+          <a:effectLst/>
+        </p:spPr>
+        <p:style>
+          <a:lnRef idx="1">
+            <a:schemeClr val="accent1"/>
+          </a:lnRef>
+          <a:fillRef idx="3">
+            <a:schemeClr val="accent1"/>
+          </a:fillRef>
+          <a:effectRef idx="2">
+            <a:schemeClr val="accent1"/>
+          </a:effectRef>
+          <a:fontRef idx="minor">
+            <a:schemeClr val="lt1"/>
+          </a:fontRef>
+        </p:style>
+        <p:txBody>
+          <a:bodyPr rtlCol="0" anchor="ctr"/>
+          <a:lstStyle/>
+          <a:p/>
+        </p:txBody>
+      </p:sp>
+      <p:sp>
+        <p:nvSpPr>
+          <p:cNvPr id="7" name="Oval 6"/>
+          <p:cNvSpPr/>
+          <p:nvPr/>
+        </p:nvSpPr>
+        <p:spPr>
+          <a:xfrm>
+            <a:off x="777240" y="1828800"/>
+            <a:ext cx="457200" cy="457200"/>
+          </a:xfrm>
+          <a:prstGeom prst="ellipse">
+            <a:avLst/>
+          </a:prstGeom>
+          <a:solidFill>
+            <a:srgbClr val="F2B705"/>
+          </a:solidFill>
+          <a:ln>
+            <a:noFill/>
+          </a:ln>
+          <a:effectLst/>
+        </p:spPr>
+        <p:style>
+          <a:lnRef idx="1">
+            <a:schemeClr val="accent1"/>
+          </a:lnRef>
+          <a:fillRef idx="3">
+            <a:schemeClr val="accent1"/>
+          </a:fillRef>
+          <a:effectRef idx="2">
+            <a:schemeClr val="accent1"/>
+          </a:effectRef>
+          <a:fontRef idx="minor">
+            <a:schemeClr val="lt1"/>
+          </a:fontRef>
+        </p:style>
+        <p:txBody>
+          <a:bodyPr rtlCol="0" anchor="ctr" lIns="0" rIns="0" tIns="0" bIns="0"/>
+          <a:lstStyle/>
+          <a:p>
+            <a:pPr algn="ctr"/>
+            <a:r>
+              <a:rPr sz="1500" b="1">
+                <a:solidFill>
+                  <a:srgbClr val="202122"/>
+                </a:solidFill>
+                <a:latin typeface="Calibri"/>
+              </a:rPr>
+              <a:t>1</a:t>
+            </a:r>
+          </a:p>
+        </p:txBody>
+      </p:sp>
+      <p:sp>
+        <p:nvSpPr>
+          <p:cNvPr id="8" name="TextBox 7"/>
+          <p:cNvSpPr txBox="1"/>
+          <p:nvPr/>
+        </p:nvSpPr>
+        <p:spPr>
+          <a:xfrm>
+            <a:off x="1371600" y="1801368"/>
+            <a:ext cx="2509418" cy="512064"/>
+          </a:xfrm>
+          <a:prstGeom prst="rect">
+            <a:avLst/>
+          </a:prstGeom>
+          <a:noFill/>
+        </p:spPr>
+        <p:txBody>
+          <a:bodyPr wrap="square" anchor="ctr" lIns="0" rIns="0" tIns="0" bIns="0"/>
+          <a:lstStyle/>
+          <a:p>
+            <a:pPr algn="l"/>
+            <a:r>
+              <a:rPr sz="1900" b="1" i="0">
+                <a:solidFill>
+                  <a:srgbClr val="03306E"/>
+                </a:solidFill>
+                <a:latin typeface="Calibri"/>
+              </a:rPr>
+              <a:t>Gantt chart</a:t>
+            </a:r>
+          </a:p>
+        </p:txBody>
+      </p:sp>
+      <p:sp>
+        <p:nvSpPr>
+          <p:cNvPr id="9" name="TextBox 8"/>
+          <p:cNvSpPr txBox="1"/>
+          <p:nvPr/>
+        </p:nvSpPr>
+        <p:spPr>
+          <a:xfrm>
+            <a:off x="777240" y="2468880"/>
+            <a:ext cx="3058058" cy="1143000"/>
+          </a:xfrm>
+          <a:prstGeom prst="rect">
+            <a:avLst/>
+          </a:prstGeom>
+          <a:noFill/>
+        </p:spPr>
+        <p:txBody>
+          <a:bodyPr wrap="square" anchor="t" lIns="0" rIns="0" tIns="0" bIns="0"/>
+          <a:lstStyle/>
+          <a:p>
+            <a:pPr algn="l"/>
+            <a:r>
+              <a:rPr sz="2000" b="0" i="0">
+                <a:solidFill>
+                  <a:srgbClr val="202122"/>
+                </a:solidFill>
+                <a:latin typeface="Calibri"/>
+              </a:rPr>
+              <a:t>Bars on a timeline showing when each task starts and ends.</a:t>
+            </a:r>
+          </a:p>
+        </p:txBody>
+      </p:sp>
+      <p:sp>
+        <p:nvSpPr>
+          <p:cNvPr id="10" name="Rounded Rectangle 9"/>
+          <p:cNvSpPr/>
+          <p:nvPr/>
+        </p:nvSpPr>
+        <p:spPr>
+          <a:xfrm>
+            <a:off x="4338218" y="1600200"/>
+            <a:ext cx="3515258" cy="2148840"/>
+          </a:xfrm>
+          <a:prstGeom prst="roundRect">
+            <a:avLst>
+              <a:gd name="adj" fmla="val 6000"/>
+            </a:avLst>
+          </a:prstGeom>
+          <a:solidFill>
+            <a:srgbClr val="EAF3FF"/>
+          </a:solidFill>
+          <a:ln>
+            <a:noFill/>
+          </a:ln>
+          <a:effectLst/>
+        </p:spPr>
+        <p:style>
+          <a:lnRef idx="1">
+            <a:schemeClr val="accent1"/>
+          </a:lnRef>
+          <a:fillRef idx="3">
+            <a:schemeClr val="accent1"/>
+          </a:fillRef>
+          <a:effectRef idx="2">
+            <a:schemeClr val="accent1"/>
+          </a:effectRef>
+          <a:fontRef idx="minor">
+            <a:schemeClr val="lt1"/>
+          </a:fontRef>
+        </p:style>
+        <p:txBody>
+          <a:bodyPr rtlCol="0" anchor="ctr"/>
+          <a:lstStyle/>
+          <a:p/>
+        </p:txBody>
+      </p:sp>
+      <p:sp>
+        <p:nvSpPr>
+          <p:cNvPr id="11" name="Oval 10"/>
+          <p:cNvSpPr/>
+          <p:nvPr/>
+        </p:nvSpPr>
+        <p:spPr>
+          <a:xfrm>
+            <a:off x="4566818" y="1828800"/>
+            <a:ext cx="457200" cy="457200"/>
+          </a:xfrm>
+          <a:prstGeom prst="ellipse">
+            <a:avLst/>
+          </a:prstGeom>
+          <a:solidFill>
+            <a:srgbClr val="F2B705"/>
+          </a:solidFill>
+          <a:ln>
+            <a:noFill/>
+          </a:ln>
+          <a:effectLst/>
+        </p:spPr>
+        <p:style>
+          <a:lnRef idx="1">
+            <a:schemeClr val="accent1"/>
+          </a:lnRef>
+          <a:fillRef idx="3">
+            <a:schemeClr val="accent1"/>
+          </a:fillRef>
+          <a:effectRef idx="2">
+            <a:schemeClr val="accent1"/>
+          </a:effectRef>
+          <a:fontRef idx="minor">
+            <a:schemeClr val="lt1"/>
+          </a:fontRef>
+        </p:style>
+        <p:txBody>
+          <a:bodyPr rtlCol="0" anchor="ctr" lIns="0" rIns="0" tIns="0" bIns="0"/>
+          <a:lstStyle/>
+          <a:p>
+            <a:pPr algn="ctr"/>
+            <a:r>
+              <a:rPr sz="1500" b="1">
+                <a:solidFill>
+                  <a:srgbClr val="202122"/>
+                </a:solidFill>
+                <a:latin typeface="Calibri"/>
+              </a:rPr>
+              <a:t>2</a:t>
+            </a:r>
+          </a:p>
+        </p:txBody>
+      </p:sp>
+      <p:sp>
+        <p:nvSpPr>
+          <p:cNvPr id="12" name="TextBox 11"/>
+          <p:cNvSpPr txBox="1"/>
+          <p:nvPr/>
+        </p:nvSpPr>
+        <p:spPr>
+          <a:xfrm>
+            <a:off x="5161178" y="1801368"/>
+            <a:ext cx="2509418" cy="512064"/>
+          </a:xfrm>
+          <a:prstGeom prst="rect">
+            <a:avLst/>
+          </a:prstGeom>
+          <a:noFill/>
+        </p:spPr>
+        <p:txBody>
+          <a:bodyPr wrap="square" anchor="ctr" lIns="0" rIns="0" tIns="0" bIns="0"/>
+          <a:lstStyle/>
+          <a:p>
+            <a:pPr algn="l"/>
+            <a:r>
+              <a:rPr sz="1900" b="1" i="0">
+                <a:solidFill>
+                  <a:srgbClr val="03306E"/>
+                </a:solidFill>
+                <a:latin typeface="Calibri"/>
+              </a:rPr>
+              <a:t>PERT chart</a:t>
+            </a:r>
+          </a:p>
+        </p:txBody>
+      </p:sp>
+      <p:sp>
+        <p:nvSpPr>
+          <p:cNvPr id="13" name="TextBox 12"/>
+          <p:cNvSpPr txBox="1"/>
+          <p:nvPr/>
+        </p:nvSpPr>
+        <p:spPr>
+          <a:xfrm>
+            <a:off x="4566818" y="2468880"/>
+            <a:ext cx="3058058" cy="1143000"/>
+          </a:xfrm>
+          <a:prstGeom prst="rect">
+            <a:avLst/>
+          </a:prstGeom>
+          <a:noFill/>
+        </p:spPr>
+        <p:txBody>
+          <a:bodyPr wrap="square" anchor="t" lIns="0" rIns="0" tIns="0" bIns="0"/>
+          <a:lstStyle/>
+          <a:p>
+            <a:pPr algn="l"/>
+            <a:r>
+              <a:rPr sz="2000" b="0" i="0">
+                <a:solidFill>
+                  <a:srgbClr val="202122"/>
+                </a:solidFill>
+                <a:latin typeface="Calibri"/>
+              </a:rPr>
+              <a:t>Network of tasks with optimistic, likely and pessimistic time estimates.</a:t>
+            </a:r>
+          </a:p>
+        </p:txBody>
+      </p:sp>
+      <p:sp>
+        <p:nvSpPr>
+          <p:cNvPr id="14" name="Rounded Rectangle 13"/>
+          <p:cNvSpPr/>
+          <p:nvPr/>
+        </p:nvSpPr>
+        <p:spPr>
+          <a:xfrm>
+            <a:off x="8127796" y="1600200"/>
+            <a:ext cx="3515258" cy="2148840"/>
+          </a:xfrm>
+          <a:prstGeom prst="roundRect">
+            <a:avLst>
+              <a:gd name="adj" fmla="val 6000"/>
+            </a:avLst>
+          </a:prstGeom>
+          <a:solidFill>
+            <a:srgbClr val="EAF3FF"/>
+          </a:solidFill>
+          <a:ln>
+            <a:noFill/>
+          </a:ln>
+          <a:effectLst/>
+        </p:spPr>
+        <p:style>
+          <a:lnRef idx="1">
+            <a:schemeClr val="accent1"/>
+          </a:lnRef>
+          <a:fillRef idx="3">
+            <a:schemeClr val="accent1"/>
+          </a:fillRef>
+          <a:effectRef idx="2">
+            <a:schemeClr val="accent1"/>
+          </a:effectRef>
+          <a:fontRef idx="minor">
+            <a:schemeClr val="lt1"/>
+          </a:fontRef>
+        </p:style>
+        <p:txBody>
+          <a:bodyPr rtlCol="0" anchor="ctr"/>
+          <a:lstStyle/>
+          <a:p/>
+        </p:txBody>
+      </p:sp>
+      <p:sp>
+        <p:nvSpPr>
+          <p:cNvPr id="15" name="Oval 14"/>
+          <p:cNvSpPr/>
+          <p:nvPr/>
+        </p:nvSpPr>
+        <p:spPr>
+          <a:xfrm>
+            <a:off x="8356396" y="1828800"/>
+            <a:ext cx="457200" cy="457200"/>
+          </a:xfrm>
+          <a:prstGeom prst="ellipse">
+            <a:avLst/>
+          </a:prstGeom>
+          <a:solidFill>
+            <a:srgbClr val="F2B705"/>
+          </a:solidFill>
+          <a:ln>
+            <a:noFill/>
+          </a:ln>
+          <a:effectLst/>
+        </p:spPr>
+        <p:style>
+          <a:lnRef idx="1">
+            <a:schemeClr val="accent1"/>
+          </a:lnRef>
+          <a:fillRef idx="3">
+            <a:schemeClr val="accent1"/>
+          </a:fillRef>
+          <a:effectRef idx="2">
+            <a:schemeClr val="accent1"/>
+          </a:effectRef>
+          <a:fontRef idx="minor">
+            <a:schemeClr val="lt1"/>
+          </a:fontRef>
+        </p:style>
+        <p:txBody>
+          <a:bodyPr rtlCol="0" anchor="ctr" lIns="0" rIns="0" tIns="0" bIns="0"/>
+          <a:lstStyle/>
+          <a:p>
+            <a:pPr algn="ctr"/>
+            <a:r>
+              <a:rPr sz="1500" b="1">
+                <a:solidFill>
+                  <a:srgbClr val="202122"/>
+                </a:solidFill>
+                <a:latin typeface="Calibri"/>
+              </a:rPr>
+              <a:t>3</a:t>
+            </a:r>
+          </a:p>
+        </p:txBody>
+      </p:sp>
+      <p:sp>
+        <p:nvSpPr>
+          <p:cNvPr id="16" name="TextBox 15"/>
+          <p:cNvSpPr txBox="1"/>
+          <p:nvPr/>
+        </p:nvSpPr>
+        <p:spPr>
+          <a:xfrm>
+            <a:off x="8950756" y="1801368"/>
+            <a:ext cx="2509418" cy="512064"/>
+          </a:xfrm>
+          <a:prstGeom prst="rect">
+            <a:avLst/>
+          </a:prstGeom>
+          <a:noFill/>
+        </p:spPr>
+        <p:txBody>
+          <a:bodyPr wrap="square" anchor="ctr" lIns="0" rIns="0" tIns="0" bIns="0"/>
+          <a:lstStyle/>
+          <a:p>
+            <a:pPr algn="l"/>
+            <a:r>
+              <a:rPr sz="1900" b="1" i="0">
+                <a:solidFill>
+                  <a:srgbClr val="03306E"/>
+                </a:solidFill>
+                <a:latin typeface="Calibri"/>
+              </a:rPr>
+              <a:t>Precedence table</a:t>
+            </a:r>
+          </a:p>
+        </p:txBody>
+      </p:sp>
+      <p:sp>
+        <p:nvSpPr>
+          <p:cNvPr id="17" name="TextBox 16"/>
+          <p:cNvSpPr txBox="1"/>
+          <p:nvPr/>
+        </p:nvSpPr>
+        <p:spPr>
+          <a:xfrm>
+            <a:off x="8356396" y="2468880"/>
+            <a:ext cx="3058058" cy="1143000"/>
+          </a:xfrm>
+          <a:prstGeom prst="rect">
+            <a:avLst/>
+          </a:prstGeom>
+          <a:noFill/>
+        </p:spPr>
+        <p:txBody>
+          <a:bodyPr wrap="square" anchor="t" lIns="0" rIns="0" tIns="0" bIns="0"/>
+          <a:lstStyle/>
+          <a:p>
+            <a:pPr algn="l"/>
+            <a:r>
+              <a:rPr sz="2000" b="0" i="0">
+                <a:solidFill>
+                  <a:srgbClr val="202122"/>
+                </a:solidFill>
+                <a:latin typeface="Calibri"/>
+              </a:rPr>
+              <a:t>Lists each task and the tasks that must finish before it.</a:t>
+            </a:r>
+          </a:p>
+        </p:txBody>
+      </p:sp>
+      <p:sp>
+        <p:nvSpPr>
+          <p:cNvPr id="18" name="Rounded Rectangle 17"/>
+          <p:cNvSpPr/>
+          <p:nvPr/>
+        </p:nvSpPr>
+        <p:spPr>
+          <a:xfrm>
+            <a:off x="548640" y="4023360"/>
+            <a:ext cx="3515258" cy="2148840"/>
+          </a:xfrm>
+          <a:prstGeom prst="roundRect">
+            <a:avLst>
+              <a:gd name="adj" fmla="val 6000"/>
+            </a:avLst>
+          </a:prstGeom>
+          <a:solidFill>
+            <a:srgbClr val="EAF3FF"/>
+          </a:solidFill>
+          <a:ln>
+            <a:noFill/>
+          </a:ln>
+          <a:effectLst/>
+        </p:spPr>
+        <p:style>
+          <a:lnRef idx="1">
+            <a:schemeClr val="accent1"/>
+          </a:lnRef>
+          <a:fillRef idx="3">
+            <a:schemeClr val="accent1"/>
+          </a:fillRef>
+          <a:effectRef idx="2">
+            <a:schemeClr val="accent1"/>
+          </a:effectRef>
+          <a:fontRef idx="minor">
+            <a:schemeClr val="lt1"/>
+          </a:fontRef>
+        </p:style>
+        <p:txBody>
+          <a:bodyPr rtlCol="0" anchor="ctr"/>
+          <a:lstStyle/>
+          <a:p/>
+        </p:txBody>
+      </p:sp>
+      <p:sp>
+        <p:nvSpPr>
+          <p:cNvPr id="19" name="Oval 18"/>
+          <p:cNvSpPr/>
+          <p:nvPr/>
+        </p:nvSpPr>
+        <p:spPr>
+          <a:xfrm>
+            <a:off x="777240" y="4251960"/>
+            <a:ext cx="457200" cy="457200"/>
+          </a:xfrm>
+          <a:prstGeom prst="ellipse">
+            <a:avLst/>
+          </a:prstGeom>
+          <a:solidFill>
+            <a:srgbClr val="F2B705"/>
+          </a:solidFill>
+          <a:ln>
+            <a:noFill/>
+          </a:ln>
+          <a:effectLst/>
+        </p:spPr>
+        <p:style>
+          <a:lnRef idx="1">
+            <a:schemeClr val="accent1"/>
+          </a:lnRef>
+          <a:fillRef idx="3">
+            <a:schemeClr val="accent1"/>
+          </a:fillRef>
+          <a:effectRef idx="2">
+            <a:schemeClr val="accent1"/>
+          </a:effectRef>
+          <a:fontRef idx="minor">
+            <a:schemeClr val="lt1"/>
+          </a:fontRef>
+        </p:style>
+        <p:txBody>
+          <a:bodyPr rtlCol="0" anchor="ctr" lIns="0" rIns="0" tIns="0" bIns="0"/>
+          <a:lstStyle/>
+          <a:p>
+            <a:pPr algn="ctr"/>
+            <a:r>
+              <a:rPr sz="1500" b="1">
+                <a:solidFill>
+                  <a:srgbClr val="202122"/>
+                </a:solidFill>
+                <a:latin typeface="Calibri"/>
+              </a:rPr>
+              <a:t>4</a:t>
+            </a:r>
+          </a:p>
+        </p:txBody>
+      </p:sp>
+      <p:sp>
+        <p:nvSpPr>
+          <p:cNvPr id="20" name="TextBox 19"/>
+          <p:cNvSpPr txBox="1"/>
+          <p:nvPr/>
+        </p:nvSpPr>
+        <p:spPr>
+          <a:xfrm>
+            <a:off x="1371600" y="4224528"/>
+            <a:ext cx="2509418" cy="512064"/>
+          </a:xfrm>
+          <a:prstGeom prst="rect">
+            <a:avLst/>
+          </a:prstGeom>
+          <a:noFill/>
+        </p:spPr>
+        <p:txBody>
+          <a:bodyPr wrap="square" anchor="ctr" lIns="0" rIns="0" tIns="0" bIns="0"/>
+          <a:lstStyle/>
+          <a:p>
+            <a:pPr algn="l"/>
+            <a:r>
+              <a:rPr sz="1900" b="1" i="0">
+                <a:solidFill>
+                  <a:srgbClr val="03306E"/>
+                </a:solidFill>
+                <a:latin typeface="Calibri"/>
+              </a:rPr>
+              <a:t>Kanban</a:t>
+            </a:r>
+          </a:p>
+        </p:txBody>
+      </p:sp>
+      <p:sp>
+        <p:nvSpPr>
+          <p:cNvPr id="21" name="TextBox 20"/>
+          <p:cNvSpPr txBox="1"/>
+          <p:nvPr/>
+        </p:nvSpPr>
+        <p:spPr>
+          <a:xfrm>
+            <a:off x="777240" y="4892040"/>
+            <a:ext cx="3058058" cy="1143000"/>
+          </a:xfrm>
+          <a:prstGeom prst="rect">
+            <a:avLst/>
+          </a:prstGeom>
+          <a:noFill/>
+        </p:spPr>
+        <p:txBody>
+          <a:bodyPr wrap="square" anchor="t" lIns="0" rIns="0" tIns="0" bIns="0"/>
+          <a:lstStyle/>
+          <a:p>
+            <a:pPr algn="l"/>
+            <a:r>
+              <a:rPr sz="2000" b="0" i="0">
+                <a:solidFill>
+                  <a:srgbClr val="202122"/>
+                </a:solidFill>
+                <a:latin typeface="Calibri"/>
+              </a:rPr>
+              <a:t>Board of cards moving through columns such as To do, Doing, Done.</a:t>
+            </a:r>
+          </a:p>
+        </p:txBody>
+      </p:sp>
+      <p:sp>
+        <p:nvSpPr>
+          <p:cNvPr id="22" name="Rounded Rectangle 21"/>
+          <p:cNvSpPr/>
+          <p:nvPr/>
+        </p:nvSpPr>
+        <p:spPr>
+          <a:xfrm>
+            <a:off x="4338218" y="4023360"/>
+            <a:ext cx="3515258" cy="2148840"/>
+          </a:xfrm>
+          <a:prstGeom prst="roundRect">
+            <a:avLst>
+              <a:gd name="adj" fmla="val 6000"/>
+            </a:avLst>
+          </a:prstGeom>
+          <a:solidFill>
+            <a:srgbClr val="EAF3FF"/>
+          </a:solidFill>
+          <a:ln>
+            <a:noFill/>
+          </a:ln>
+          <a:effectLst/>
+        </p:spPr>
+        <p:style>
+          <a:lnRef idx="1">
+            <a:schemeClr val="accent1"/>
+          </a:lnRef>
+          <a:fillRef idx="3">
+            <a:schemeClr val="accent1"/>
+          </a:fillRef>
+          <a:effectRef idx="2">
+            <a:schemeClr val="accent1"/>
+          </a:effectRef>
+          <a:fontRef idx="minor">
+            <a:schemeClr val="lt1"/>
+          </a:fontRef>
+        </p:style>
+        <p:txBody>
+          <a:bodyPr rtlCol="0" anchor="ctr"/>
+          <a:lstStyle/>
+          <a:p/>
+        </p:txBody>
+      </p:sp>
+      <p:sp>
+        <p:nvSpPr>
+          <p:cNvPr id="23" name="Oval 22"/>
+          <p:cNvSpPr/>
+          <p:nvPr/>
+        </p:nvSpPr>
+        <p:spPr>
+          <a:xfrm>
+            <a:off x="4566818" y="4251960"/>
+            <a:ext cx="457200" cy="457200"/>
+          </a:xfrm>
+          <a:prstGeom prst="ellipse">
+            <a:avLst/>
+          </a:prstGeom>
+          <a:solidFill>
+            <a:srgbClr val="F2B705"/>
+          </a:solidFill>
+          <a:ln>
+            <a:noFill/>
+          </a:ln>
+          <a:effectLst/>
+        </p:spPr>
+        <p:style>
+          <a:lnRef idx="1">
+            <a:schemeClr val="accent1"/>
+          </a:lnRef>
+          <a:fillRef idx="3">
+            <a:schemeClr val="accent1"/>
+          </a:fillRef>
+          <a:effectRef idx="2">
+            <a:schemeClr val="accent1"/>
+          </a:effectRef>
+          <a:fontRef idx="minor">
+            <a:schemeClr val="lt1"/>
+          </a:fontRef>
+        </p:style>
+        <p:txBody>
+          <a:bodyPr rtlCol="0" anchor="ctr" lIns="0" rIns="0" tIns="0" bIns="0"/>
+          <a:lstStyle/>
+          <a:p>
+            <a:pPr algn="ctr"/>
+            <a:r>
+              <a:rPr sz="1500" b="1">
+                <a:solidFill>
+                  <a:srgbClr val="202122"/>
+                </a:solidFill>
+                <a:latin typeface="Calibri"/>
+              </a:rPr>
+              <a:t>5</a:t>
+            </a:r>
+          </a:p>
+        </p:txBody>
+      </p:sp>
+      <p:sp>
+        <p:nvSpPr>
+          <p:cNvPr id="24" name="TextBox 23"/>
+          <p:cNvSpPr txBox="1"/>
+          <p:nvPr/>
+        </p:nvSpPr>
+        <p:spPr>
+          <a:xfrm>
+            <a:off x="5161178" y="4224528"/>
+            <a:ext cx="2509418" cy="512064"/>
+          </a:xfrm>
+          <a:prstGeom prst="rect">
+            <a:avLst/>
+          </a:prstGeom>
+          <a:noFill/>
+        </p:spPr>
+        <p:txBody>
+          <a:bodyPr wrap="square" anchor="ctr" lIns="0" rIns="0" tIns="0" bIns="0"/>
+          <a:lstStyle/>
+          <a:p>
+            <a:pPr algn="l"/>
+            <a:r>
+              <a:rPr sz="1600" b="1" i="0">
+                <a:solidFill>
+                  <a:srgbClr val="03306E"/>
+                </a:solidFill>
+                <a:latin typeface="Calibri"/>
+              </a:rPr>
+              <a:t>Critical Path Analysis</a:t>
+            </a:r>
+          </a:p>
+        </p:txBody>
+      </p:sp>
+      <p:sp>
+        <p:nvSpPr>
+          <p:cNvPr id="25" name="TextBox 24"/>
+          <p:cNvSpPr txBox="1"/>
+          <p:nvPr/>
+        </p:nvSpPr>
+        <p:spPr>
+          <a:xfrm>
+            <a:off x="4566818" y="4892040"/>
+            <a:ext cx="3058058" cy="1143000"/>
+          </a:xfrm>
+          <a:prstGeom prst="rect">
+            <a:avLst/>
+          </a:prstGeom>
+          <a:noFill/>
+        </p:spPr>
+        <p:txBody>
+          <a:bodyPr wrap="square" anchor="t" lIns="0" rIns="0" tIns="0" bIns="0"/>
+          <a:lstStyle/>
+          <a:p>
+            <a:pPr algn="l"/>
+            <a:r>
+              <a:rPr sz="1800" b="0" i="0">
+                <a:solidFill>
+                  <a:srgbClr val="202122"/>
+                </a:solidFill>
+                <a:latin typeface="Calibri"/>
+              </a:rPr>
+              <a:t>Finds the longest chain of dependent tasks: the shortest possible project length.</a:t>
+            </a:r>
+          </a:p>
+        </p:txBody>
+      </p:sp>
+    </p:spTree>
+  </p:cSld>
+  <p:clrMapOvr>
+    <a:masterClrMapping/>
+  </p:clrMapOvr>
+</p:sld>
+</file>
+
+<file path=ppt/slides/slide12.xml><?xml version="1.0" encoding="utf-8"?>
+<p:sld xmlns:a="http://schemas.openxmlformats.org/drawingml/2006/main" xmlns:p="http://schemas.openxmlformats.org/presentationml/2006/main" xmlns:r="http://schemas.openxmlformats.org/officeDocument/2006/relationships">
+  <p:cSld>
+    <p:bg>
+      <p:bgPr>
+        <a:solidFill>
+          <a:srgbClr val="FFFFFF"/>
+        </a:solidFill>
+        <a:effectLst/>
+      </p:bgPr>
+    </p:bg>
+    <p:spTree>
+      <p:nvGrpSpPr>
+        <p:cNvPr id="1" name=""/>
+        <p:cNvGrpSpPr/>
+        <p:nvPr/>
+      </p:nvGrpSpPr>
+      <p:grpSpPr/>
+      <p:sp>
+        <p:nvSpPr>
+          <p:cNvPr id="2" name="TextBox 1"/>
+          <p:cNvSpPr txBox="1"/>
+          <p:nvPr/>
+        </p:nvSpPr>
+        <p:spPr>
+          <a:xfrm>
+            <a:off x="548640" y="320040"/>
+            <a:ext cx="11094415" cy="274320"/>
+          </a:xfrm>
+          <a:prstGeom prst="rect">
+            <a:avLst/>
+          </a:prstGeom>
+          <a:noFill/>
+        </p:spPr>
+        <p:txBody>
+          <a:bodyPr wrap="square" anchor="t" lIns="0" rIns="0" tIns="0" bIns="0"/>
+          <a:lstStyle/>
+          <a:p>
+            <a:pPr algn="l"/>
+            <a:r>
+              <a:rPr sz="1100" b="1" i="0">
+                <a:solidFill>
+                  <a:srgbClr val="54595D"/>
+                </a:solidFill>
+                <a:latin typeface="Calibri"/>
+              </a:rPr>
+              <a:t>CORE COMPONENT  ·  Core Paper 1</a:t>
+            </a:r>
+          </a:p>
+        </p:txBody>
+      </p:sp>
+      <p:sp>
+        <p:nvSpPr>
+          <p:cNvPr id="3" name="TextBox 2"/>
+          <p:cNvSpPr txBox="1"/>
+          <p:nvPr/>
+        </p:nvSpPr>
+        <p:spPr>
+          <a:xfrm>
+            <a:off x="548640" y="566928"/>
+            <a:ext cx="11094415" cy="822960"/>
+          </a:xfrm>
+          <a:prstGeom prst="rect">
+            <a:avLst/>
+          </a:prstGeom>
+          <a:noFill/>
+        </p:spPr>
+        <p:txBody>
+          <a:bodyPr wrap="square" anchor="ctr" lIns="0" rIns="0" tIns="0" bIns="0"/>
+          <a:lstStyle/>
+          <a:p>
+            <a:pPr algn="l"/>
+            <a:r>
+              <a:rPr sz="3200" b="1" i="0">
+                <a:solidFill>
+                  <a:srgbClr val="03306E"/>
+                </a:solidFill>
+                <a:latin typeface="Cambria"/>
+              </a:rPr>
+              <a:t>Quick check: Project management techniques</a:t>
+            </a:r>
+          </a:p>
+        </p:txBody>
+      </p:sp>
+      <p:sp>
+        <p:nvSpPr>
+          <p:cNvPr id="4" name="TextBox 3"/>
+          <p:cNvSpPr txBox="1"/>
+          <p:nvPr/>
+        </p:nvSpPr>
+        <p:spPr>
+          <a:xfrm>
+            <a:off x="548640" y="6446520"/>
+            <a:ext cx="8229600" cy="274320"/>
+          </a:xfrm>
+          <a:prstGeom prst="rect">
+            <a:avLst/>
+          </a:prstGeom>
+          <a:noFill/>
+        </p:spPr>
+        <p:txBody>
+          <a:bodyPr wrap="square" anchor="t" lIns="0" rIns="0" tIns="0" bIns="0"/>
+          <a:lstStyle/>
+          <a:p>
+            <a:pPr algn="l"/>
+            <a:r>
+              <a:rPr sz="1000" b="0" i="0">
+                <a:solidFill>
+                  <a:srgbClr val="54595D"/>
+                </a:solidFill>
+                <a:latin typeface="Calibri"/>
+              </a:rPr>
+              <a:t>Digital Support and Security T Level  ·  Project Management and Risk Assessment</a:t>
+            </a:r>
+          </a:p>
+        </p:txBody>
+      </p:sp>
+      <p:sp>
+        <p:nvSpPr>
+          <p:cNvPr id="5" name="TextBox 4"/>
+          <p:cNvSpPr txBox="1"/>
+          <p:nvPr/>
+        </p:nvSpPr>
+        <p:spPr>
+          <a:xfrm>
+            <a:off x="10728655" y="6446520"/>
+            <a:ext cx="914400" cy="274320"/>
+          </a:xfrm>
+          <a:prstGeom prst="rect">
+            <a:avLst/>
+          </a:prstGeom>
+          <a:noFill/>
+        </p:spPr>
+        <p:txBody>
+          <a:bodyPr wrap="square" anchor="t" lIns="0" rIns="0" tIns="0" bIns="0"/>
+          <a:lstStyle/>
+          <a:p>
+            <a:pPr algn="r"/>
+            <a:r>
+              <a:rPr sz="1000" b="0" i="0">
+                <a:solidFill>
+                  <a:srgbClr val="54595D"/>
+                </a:solidFill>
+                <a:latin typeface="Calibri"/>
+              </a:rPr>
+              <a:t>12</a:t>
+            </a:r>
+          </a:p>
+        </p:txBody>
+      </p:sp>
+      <p:sp>
+        <p:nvSpPr>
+          <p:cNvPr id="6" name="Oval 5"/>
+          <p:cNvSpPr/>
+          <p:nvPr/>
+        </p:nvSpPr>
+        <p:spPr>
+          <a:xfrm>
+            <a:off x="548640" y="1691640"/>
+            <a:ext cx="502920" cy="502920"/>
+          </a:xfrm>
+          <a:prstGeom prst="ellipse">
+            <a:avLst/>
+          </a:prstGeom>
+          <a:solidFill>
+            <a:srgbClr val="F2B705"/>
+          </a:solidFill>
+          <a:ln>
+            <a:noFill/>
+          </a:ln>
+          <a:effectLst/>
+        </p:spPr>
+        <p:style>
+          <a:lnRef idx="1">
+            <a:schemeClr val="accent1"/>
+          </a:lnRef>
+          <a:fillRef idx="3">
+            <a:schemeClr val="accent1"/>
+          </a:fillRef>
+          <a:effectRef idx="2">
+            <a:schemeClr val="accent1"/>
+          </a:effectRef>
+          <a:fontRef idx="minor">
+            <a:schemeClr val="lt1"/>
+          </a:fontRef>
+        </p:style>
+        <p:txBody>
+          <a:bodyPr rtlCol="0" anchor="ctr" lIns="0" rIns="0" tIns="0" bIns="0"/>
+          <a:lstStyle/>
+          <a:p>
+            <a:pPr algn="ctr"/>
+            <a:r>
+              <a:rPr sz="1600" b="1">
+                <a:solidFill>
+                  <a:srgbClr val="202122"/>
+                </a:solidFill>
+                <a:latin typeface="Calibri"/>
+              </a:rPr>
+              <a:t>1</a:t>
+            </a:r>
+          </a:p>
+        </p:txBody>
+      </p:sp>
+      <p:sp>
+        <p:nvSpPr>
+          <p:cNvPr id="7" name="TextBox 6"/>
+          <p:cNvSpPr txBox="1"/>
+          <p:nvPr/>
+        </p:nvSpPr>
+        <p:spPr>
+          <a:xfrm>
+            <a:off x="1371600" y="1645920"/>
+            <a:ext cx="10271455" cy="1188720"/>
+          </a:xfrm>
+          <a:prstGeom prst="rect">
+            <a:avLst/>
+          </a:prstGeom>
+          <a:noFill/>
+        </p:spPr>
+        <p:txBody>
+          <a:bodyPr wrap="square" anchor="t" lIns="0" rIns="0" tIns="0" bIns="0"/>
+          <a:lstStyle/>
+          <a:p>
+            <a:pPr algn="l"/>
+            <a:r>
+              <a:rPr sz="2400" b="0" i="0">
+                <a:solidFill>
+                  <a:srgbClr val="202122"/>
+                </a:solidFill>
+                <a:latin typeface="Calibri"/>
+              </a:rPr>
+              <a:t>What does a Gantt chart show?</a:t>
+            </a:r>
+          </a:p>
+        </p:txBody>
+      </p:sp>
+      <p:sp>
+        <p:nvSpPr>
+          <p:cNvPr id="8" name="Oval 7"/>
+          <p:cNvSpPr/>
+          <p:nvPr/>
+        </p:nvSpPr>
+        <p:spPr>
+          <a:xfrm>
+            <a:off x="548640" y="3108960"/>
+            <a:ext cx="502920" cy="502920"/>
+          </a:xfrm>
+          <a:prstGeom prst="ellipse">
+            <a:avLst/>
+          </a:prstGeom>
+          <a:solidFill>
+            <a:srgbClr val="F2B705"/>
+          </a:solidFill>
+          <a:ln>
+            <a:noFill/>
+          </a:ln>
+          <a:effectLst/>
+        </p:spPr>
+        <p:style>
+          <a:lnRef idx="1">
+            <a:schemeClr val="accent1"/>
+          </a:lnRef>
+          <a:fillRef idx="3">
+            <a:schemeClr val="accent1"/>
+          </a:fillRef>
+          <a:effectRef idx="2">
+            <a:schemeClr val="accent1"/>
+          </a:effectRef>
+          <a:fontRef idx="minor">
+            <a:schemeClr val="lt1"/>
+          </a:fontRef>
+        </p:style>
+        <p:txBody>
+          <a:bodyPr rtlCol="0" anchor="ctr" lIns="0" rIns="0" tIns="0" bIns="0"/>
+          <a:lstStyle/>
+          <a:p>
+            <a:pPr algn="ctr"/>
+            <a:r>
+              <a:rPr sz="1600" b="1">
+                <a:solidFill>
+                  <a:srgbClr val="202122"/>
+                </a:solidFill>
+                <a:latin typeface="Calibri"/>
+              </a:rPr>
+              <a:t>2</a:t>
+            </a:r>
+          </a:p>
+        </p:txBody>
+      </p:sp>
+      <p:sp>
+        <p:nvSpPr>
+          <p:cNvPr id="9" name="TextBox 8"/>
+          <p:cNvSpPr txBox="1"/>
+          <p:nvPr/>
+        </p:nvSpPr>
+        <p:spPr>
+          <a:xfrm>
+            <a:off x="1371600" y="3063240"/>
+            <a:ext cx="10271455" cy="1188720"/>
+          </a:xfrm>
+          <a:prstGeom prst="rect">
+            <a:avLst/>
+          </a:prstGeom>
+          <a:noFill/>
+        </p:spPr>
+        <p:txBody>
+          <a:bodyPr wrap="square" anchor="t" lIns="0" rIns="0" tIns="0" bIns="0"/>
+          <a:lstStyle/>
+          <a:p>
+            <a:pPr algn="l"/>
+            <a:r>
+              <a:rPr sz="2400" b="0" i="0">
+                <a:solidFill>
+                  <a:srgbClr val="202122"/>
+                </a:solidFill>
+                <a:latin typeface="Calibri"/>
+              </a:rPr>
+              <a:t>What does the critical path determine?</a:t>
+            </a:r>
+          </a:p>
+        </p:txBody>
+      </p:sp>
+      <p:sp>
+        <p:nvSpPr>
+          <p:cNvPr id="10" name="Oval 9"/>
+          <p:cNvSpPr/>
+          <p:nvPr/>
+        </p:nvSpPr>
+        <p:spPr>
+          <a:xfrm>
+            <a:off x="548640" y="4526280"/>
+            <a:ext cx="502920" cy="502920"/>
+          </a:xfrm>
+          <a:prstGeom prst="ellipse">
+            <a:avLst/>
+          </a:prstGeom>
+          <a:solidFill>
+            <a:srgbClr val="F2B705"/>
+          </a:solidFill>
+          <a:ln>
+            <a:noFill/>
+          </a:ln>
+          <a:effectLst/>
+        </p:spPr>
+        <p:style>
+          <a:lnRef idx="1">
+            <a:schemeClr val="accent1"/>
+          </a:lnRef>
+          <a:fillRef idx="3">
+            <a:schemeClr val="accent1"/>
+          </a:fillRef>
+          <a:effectRef idx="2">
+            <a:schemeClr val="accent1"/>
+          </a:effectRef>
+          <a:fontRef idx="minor">
+            <a:schemeClr val="lt1"/>
+          </a:fontRef>
+        </p:style>
+        <p:txBody>
+          <a:bodyPr rtlCol="0" anchor="ctr" lIns="0" rIns="0" tIns="0" bIns="0"/>
+          <a:lstStyle/>
+          <a:p>
+            <a:pPr algn="ctr"/>
+            <a:r>
+              <a:rPr sz="1600" b="1">
+                <a:solidFill>
+                  <a:srgbClr val="202122"/>
+                </a:solidFill>
+                <a:latin typeface="Calibri"/>
+              </a:rPr>
+              <a:t>3</a:t>
+            </a:r>
+          </a:p>
+        </p:txBody>
+      </p:sp>
+      <p:sp>
+        <p:nvSpPr>
+          <p:cNvPr id="11" name="TextBox 10"/>
+          <p:cNvSpPr txBox="1"/>
+          <p:nvPr/>
+        </p:nvSpPr>
+        <p:spPr>
+          <a:xfrm>
+            <a:off x="1371600" y="4480560"/>
+            <a:ext cx="10271455" cy="1188720"/>
+          </a:xfrm>
+          <a:prstGeom prst="rect">
+            <a:avLst/>
+          </a:prstGeom>
+          <a:noFill/>
+        </p:spPr>
+        <p:txBody>
+          <a:bodyPr wrap="square" anchor="t" lIns="0" rIns="0" tIns="0" bIns="0"/>
+          <a:lstStyle/>
+          <a:p>
+            <a:pPr algn="l"/>
+            <a:r>
+              <a:rPr sz="2400" b="0" i="0">
+                <a:solidFill>
+                  <a:srgbClr val="202122"/>
+                </a:solidFill>
+                <a:latin typeface="Calibri"/>
+              </a:rPr>
+              <a:t>What columns might a Kanban board have?</a:t>
+            </a:r>
+          </a:p>
+        </p:txBody>
+      </p:sp>
+      <p:sp>
+        <p:nvSpPr>
+          <p:cNvPr id="12" name="TextBox 11"/>
+          <p:cNvSpPr txBox="1"/>
+          <p:nvPr/>
+        </p:nvSpPr>
+        <p:spPr>
+          <a:xfrm>
+            <a:off x="548640" y="5852160"/>
+            <a:ext cx="11094415" cy="365760"/>
+          </a:xfrm>
+          <a:prstGeom prst="rect">
+            <a:avLst/>
+          </a:prstGeom>
+          <a:noFill/>
+        </p:spPr>
+        <p:txBody>
+          <a:bodyPr wrap="square" anchor="t" lIns="0" rIns="0" tIns="0" bIns="0"/>
+          <a:lstStyle/>
+          <a:p>
+            <a:pPr algn="l"/>
+            <a:r>
+              <a:rPr sz="1300" b="0" i="1">
+                <a:solidFill>
+                  <a:srgbClr val="54595D"/>
+                </a:solidFill>
+                <a:latin typeface="Calibri"/>
+              </a:rPr>
+              <a:t>Answer on mini whiteboards or in your book. Answers are in the speaker notes.</a:t>
+            </a:r>
+          </a:p>
+        </p:txBody>
+      </p:sp>
+    </p:spTree>
+  </p:cSld>
+  <p:clrMapOvr>
+    <a:masterClrMapping/>
+  </p:clrMapOvr>
+</p:sld>
+</file>
+
+<file path=ppt/slides/slide13.xml><?xml version="1.0" encoding="utf-8"?>
+<p:sld xmlns:a="http://schemas.openxmlformats.org/drawingml/2006/main" xmlns:p="http://schemas.openxmlformats.org/presentationml/2006/main" xmlns:r="http://schemas.openxmlformats.org/officeDocument/2006/relationships">
+  <p:cSld>
+    <p:bg>
+      <p:bgPr>
+        <a:solidFill>
+          <a:srgbClr val="FFFFFF"/>
+        </a:solidFill>
+        <a:effectLst/>
+      </p:bgPr>
+    </p:bg>
+    <p:spTree>
+      <p:nvGrpSpPr>
+        <p:cNvPr id="1" name=""/>
+        <p:cNvGrpSpPr/>
+        <p:nvPr/>
+      </p:nvGrpSpPr>
+      <p:grpSpPr/>
+      <p:sp>
+        <p:nvSpPr>
+          <p:cNvPr id="2" name="TextBox 1"/>
+          <p:cNvSpPr txBox="1"/>
+          <p:nvPr/>
+        </p:nvSpPr>
+        <p:spPr>
+          <a:xfrm>
+            <a:off x="548640" y="320040"/>
+            <a:ext cx="11094415" cy="274320"/>
+          </a:xfrm>
+          <a:prstGeom prst="rect">
+            <a:avLst/>
+          </a:prstGeom>
+          <a:noFill/>
+        </p:spPr>
+        <p:txBody>
+          <a:bodyPr wrap="square" anchor="t" lIns="0" rIns="0" tIns="0" bIns="0"/>
+          <a:lstStyle/>
+          <a:p>
+            <a:pPr algn="l"/>
+            <a:r>
+              <a:rPr sz="1100" b="1" i="0">
+                <a:solidFill>
+                  <a:srgbClr val="54595D"/>
+                </a:solidFill>
+                <a:latin typeface="Calibri"/>
+              </a:rPr>
+              <a:t>CORE COMPONENT  ·  Core Paper 1</a:t>
+            </a:r>
+          </a:p>
+        </p:txBody>
+      </p:sp>
+      <p:sp>
+        <p:nvSpPr>
+          <p:cNvPr id="3" name="TextBox 2"/>
+          <p:cNvSpPr txBox="1"/>
+          <p:nvPr/>
+        </p:nvSpPr>
+        <p:spPr>
+          <a:xfrm>
+            <a:off x="548640" y="566928"/>
+            <a:ext cx="11094415" cy="822960"/>
+          </a:xfrm>
+          <a:prstGeom prst="rect">
+            <a:avLst/>
+          </a:prstGeom>
+          <a:noFill/>
+        </p:spPr>
+        <p:txBody>
+          <a:bodyPr wrap="square" anchor="ctr" lIns="0" rIns="0" tIns="0" bIns="0"/>
+          <a:lstStyle/>
+          <a:p>
+            <a:pPr algn="l"/>
+            <a:r>
+              <a:rPr sz="3200" b="1" i="0">
+                <a:solidFill>
+                  <a:srgbClr val="03306E"/>
+                </a:solidFill>
+                <a:latin typeface="Cambria"/>
+              </a:rPr>
+              <a:t>Finding the critical path</a:t>
+            </a:r>
+          </a:p>
+        </p:txBody>
+      </p:sp>
+      <p:sp>
+        <p:nvSpPr>
+          <p:cNvPr id="4" name="TextBox 3"/>
+          <p:cNvSpPr txBox="1"/>
+          <p:nvPr/>
+        </p:nvSpPr>
+        <p:spPr>
+          <a:xfrm>
+            <a:off x="548640" y="6446520"/>
+            <a:ext cx="8229600" cy="274320"/>
+          </a:xfrm>
+          <a:prstGeom prst="rect">
+            <a:avLst/>
+          </a:prstGeom>
+          <a:noFill/>
+        </p:spPr>
+        <p:txBody>
+          <a:bodyPr wrap="square" anchor="t" lIns="0" rIns="0" tIns="0" bIns="0"/>
+          <a:lstStyle/>
+          <a:p>
+            <a:pPr algn="l"/>
+            <a:r>
+              <a:rPr sz="1000" b="0" i="0">
+                <a:solidFill>
+                  <a:srgbClr val="54595D"/>
+                </a:solidFill>
+                <a:latin typeface="Calibri"/>
+              </a:rPr>
+              <a:t>Digital Support and Security T Level  ·  Project Management and Risk Assessment</a:t>
+            </a:r>
+          </a:p>
+        </p:txBody>
+      </p:sp>
+      <p:sp>
+        <p:nvSpPr>
+          <p:cNvPr id="5" name="TextBox 4"/>
+          <p:cNvSpPr txBox="1"/>
+          <p:nvPr/>
+        </p:nvSpPr>
+        <p:spPr>
+          <a:xfrm>
+            <a:off x="10728655" y="6446520"/>
+            <a:ext cx="914400" cy="274320"/>
+          </a:xfrm>
+          <a:prstGeom prst="rect">
+            <a:avLst/>
+          </a:prstGeom>
+          <a:noFill/>
+        </p:spPr>
+        <p:txBody>
+          <a:bodyPr wrap="square" anchor="t" lIns="0" rIns="0" tIns="0" bIns="0"/>
+          <a:lstStyle/>
+          <a:p>
+            <a:pPr algn="r"/>
+            <a:r>
+              <a:rPr sz="1000" b="0" i="0">
+                <a:solidFill>
+                  <a:srgbClr val="54595D"/>
+                </a:solidFill>
+                <a:latin typeface="Calibri"/>
+              </a:rPr>
+              <a:t>13</a:t>
+            </a:r>
+          </a:p>
+        </p:txBody>
+      </p:sp>
+      <p:sp>
+        <p:nvSpPr>
+          <p:cNvPr id="6" name="TextBox 5"/>
+          <p:cNvSpPr txBox="1"/>
+          <p:nvPr/>
+        </p:nvSpPr>
+        <p:spPr>
+          <a:xfrm>
+            <a:off x="548640" y="1554480"/>
+            <a:ext cx="6720840" cy="4617720"/>
+          </a:xfrm>
+          <a:prstGeom prst="rect">
+            <a:avLst/>
+          </a:prstGeom>
+          <a:noFill/>
+        </p:spPr>
+        <p:txBody>
+          <a:bodyPr wrap="square" lIns="0" rIns="0" tIns="0" bIns="0">
+            <a:spAutoFit/>
+          </a:bodyPr>
+          <a:lstStyle/>
+          <a:p>
+            <a:pPr>
+              <a:spcAft>
+                <a:spcPts val="1320"/>
+              </a:spcAft>
+            </a:pPr>
+            <a:r>
+              <a:rPr sz="2200" b="0">
+                <a:solidFill>
+                  <a:srgbClr val="202122"/>
+                </a:solidFill>
+                <a:latin typeface="Calibri"/>
+              </a:rPr>
+              <a:t>The critical path is the longest route through a project's dependent tasks.</a:t>
+            </a:r>
+          </a:p>
+          <a:p>
+            <a:pPr>
+              <a:spcAft>
+                <a:spcPts val="1320"/>
+              </a:spcAft>
+            </a:pPr>
+            <a:r>
+              <a:rPr sz="2200" b="0">
+                <a:solidFill>
+                  <a:srgbClr val="202122"/>
+                </a:solidFill>
+                <a:latin typeface="Calibri"/>
+              </a:rPr>
+              <a:t>First, build a precedence table with every task, its duration and what must finish first. Then draw the tasks as a network in dependency order and add up the duration along every route from start to finish.</a:t>
+            </a:r>
+          </a:p>
+          <a:p>
+            <a:pPr>
+              <a:spcAft>
+                <a:spcPts val="1320"/>
+              </a:spcAft>
+            </a:pPr>
+            <a:r>
+              <a:rPr sz="2200" b="0">
+                <a:solidFill>
+                  <a:srgbClr val="202122"/>
+                </a:solidFill>
+                <a:latin typeface="Calibri"/>
+              </a:rPr>
+              <a:t>The longest total is the critical path. Any delay to a task on it delays the whole project.</a:t>
+            </a:r>
+          </a:p>
+          <a:p>
+            <a:pPr>
+              <a:spcAft>
+                <a:spcPts val="1320"/>
+              </a:spcAft>
+            </a:pPr>
+            <a:r>
+              <a:rPr sz="2200" b="0">
+                <a:solidFill>
+                  <a:srgbClr val="202122"/>
+                </a:solidFill>
+                <a:latin typeface="Calibri"/>
+              </a:rPr>
+              <a:t>Tasks off the critical path have float: spare time they can slip without delaying the finish. Managers watch critical tasks most closely.</a:t>
+            </a:r>
+          </a:p>
+        </p:txBody>
+      </p:sp>
+      <p:sp>
+        <p:nvSpPr>
+          <p:cNvPr id="7" name="Rounded Rectangle 6"/>
+          <p:cNvSpPr/>
+          <p:nvPr/>
+        </p:nvSpPr>
+        <p:spPr>
+          <a:xfrm>
+            <a:off x="7772400" y="1554480"/>
+            <a:ext cx="3867912" cy="4526280"/>
+          </a:xfrm>
+          <a:prstGeom prst="roundRect">
+            <a:avLst>
+              <a:gd name="adj" fmla="val 8000"/>
+            </a:avLst>
+          </a:prstGeom>
+          <a:solidFill>
+            <a:srgbClr val="03306E"/>
+          </a:solidFill>
+          <a:ln>
+            <a:noFill/>
+          </a:ln>
+          <a:effectLst/>
+        </p:spPr>
+        <p:style>
+          <a:lnRef idx="1">
+            <a:schemeClr val="accent1"/>
+          </a:lnRef>
+          <a:fillRef idx="3">
+            <a:schemeClr val="accent1"/>
+          </a:fillRef>
+          <a:effectRef idx="2">
+            <a:schemeClr val="accent1"/>
+          </a:effectRef>
+          <a:fontRef idx="minor">
+            <a:schemeClr val="lt1"/>
+          </a:fontRef>
+        </p:style>
+        <p:txBody>
+          <a:bodyPr rtlCol="0" anchor="ctr"/>
+          <a:lstStyle/>
+          <a:p/>
+        </p:txBody>
+      </p:sp>
+      <p:sp>
+        <p:nvSpPr>
+          <p:cNvPr id="8" name="Oval 7"/>
+          <p:cNvSpPr/>
+          <p:nvPr/>
+        </p:nvSpPr>
+        <p:spPr>
+          <a:xfrm>
+            <a:off x="8046720" y="1828800"/>
+            <a:ext cx="548640" cy="548640"/>
+          </a:xfrm>
+          <a:prstGeom prst="ellipse">
+            <a:avLst/>
+          </a:prstGeom>
+          <a:solidFill>
+            <a:srgbClr val="F2B705"/>
+          </a:solidFill>
+          <a:ln>
+            <a:noFill/>
+          </a:ln>
+          <a:effectLst/>
+        </p:spPr>
+        <p:style>
+          <a:lnRef idx="1">
+            <a:schemeClr val="accent1"/>
+          </a:lnRef>
+          <a:fillRef idx="3">
+            <a:schemeClr val="accent1"/>
+          </a:fillRef>
+          <a:effectRef idx="2">
+            <a:schemeClr val="accent1"/>
+          </a:effectRef>
+          <a:fontRef idx="minor">
+            <a:schemeClr val="lt1"/>
+          </a:fontRef>
+        </p:style>
+        <p:txBody>
+          <a:bodyPr rtlCol="0" anchor="ctr" lIns="0" rIns="0" tIns="0" bIns="0"/>
+          <a:lstStyle/>
+          <a:p>
+            <a:pPr algn="ctr"/>
+            <a:r>
+              <a:rPr sz="1300" b="1">
+                <a:solidFill>
+                  <a:srgbClr val="202122"/>
+                </a:solidFill>
+                <a:latin typeface="Calibri"/>
+              </a:rPr>
+              <a:t>e.g.</a:t>
+            </a:r>
+          </a:p>
+        </p:txBody>
+      </p:sp>
+      <p:sp>
+        <p:nvSpPr>
+          <p:cNvPr id="9" name="TextBox 8"/>
+          <p:cNvSpPr txBox="1"/>
+          <p:nvPr/>
+        </p:nvSpPr>
+        <p:spPr>
+          <a:xfrm>
+            <a:off x="8046720" y="2560320"/>
+            <a:ext cx="3291840" cy="365760"/>
+          </a:xfrm>
+          <a:prstGeom prst="rect">
+            <a:avLst/>
+          </a:prstGeom>
+          <a:noFill/>
+        </p:spPr>
+        <p:txBody>
+          <a:bodyPr wrap="square" anchor="t" lIns="0" rIns="0" tIns="0" bIns="0"/>
+          <a:lstStyle/>
+          <a:p>
+            <a:pPr algn="l"/>
+            <a:r>
+              <a:rPr sz="1300" b="1" i="0">
+                <a:solidFill>
+                  <a:srgbClr val="A9C8F0"/>
+                </a:solidFill>
+                <a:latin typeface="Calibri"/>
+              </a:rPr>
+              <a:t>EXAMPLE</a:t>
+            </a:r>
+          </a:p>
+        </p:txBody>
+      </p:sp>
+      <p:sp>
+        <p:nvSpPr>
+          <p:cNvPr id="10" name="TextBox 9"/>
+          <p:cNvSpPr txBox="1"/>
+          <p:nvPr/>
+        </p:nvSpPr>
+        <p:spPr>
+          <a:xfrm>
+            <a:off x="8046720" y="2971800"/>
+            <a:ext cx="3291840" cy="2971800"/>
+          </a:xfrm>
+          <a:prstGeom prst="rect">
+            <a:avLst/>
+          </a:prstGeom>
+          <a:noFill/>
+        </p:spPr>
+        <p:txBody>
+          <a:bodyPr wrap="square" anchor="t" lIns="0" rIns="0" tIns="0" bIns="0"/>
+          <a:lstStyle/>
+          <a:p>
+            <a:pPr algn="l"/>
+            <a:r>
+              <a:rPr sz="1900" b="0" i="0">
+                <a:solidFill>
+                  <a:srgbClr val="FFFFFF"/>
+                </a:solidFill>
+                <a:latin typeface="Cambria"/>
+              </a:rPr>
+              <a:t>Route A: order kit (5) + image PCs (3) + install (2) + test (1) = 11 days. Route B: remove old PCs (1) + fit desks (2) + install (2) + test (1) = 6 days. Route A is critical; route B has float.</a:t>
+            </a:r>
+          </a:p>
+        </p:txBody>
+      </p:sp>
+    </p:spTree>
+  </p:cSld>
+  <p:clrMapOvr>
+    <a:masterClrMapping/>
+  </p:clrMapOvr>
+</p:sld>
+</file>
+
+<file path=ppt/slides/slide14.xml><?xml version="1.0" encoding="utf-8"?>
+<p:sld xmlns:a="http://schemas.openxmlformats.org/drawingml/2006/main" xmlns:p="http://schemas.openxmlformats.org/presentationml/2006/main" xmlns:r="http://schemas.openxmlformats.org/officeDocument/2006/relationships">
+  <p:cSld>
+    <p:bg>
+      <p:bgPr>
+        <a:solidFill>
+          <a:srgbClr val="FFFFFF"/>
+        </a:solidFill>
+        <a:effectLst/>
+      </p:bgPr>
+    </p:bg>
+    <p:spTree>
+      <p:nvGrpSpPr>
+        <p:cNvPr id="1" name=""/>
+        <p:cNvGrpSpPr/>
+        <p:nvPr/>
+      </p:nvGrpSpPr>
+      <p:grpSpPr/>
+      <p:sp>
+        <p:nvSpPr>
+          <p:cNvPr id="2" name="TextBox 1"/>
+          <p:cNvSpPr txBox="1"/>
+          <p:nvPr/>
+        </p:nvSpPr>
+        <p:spPr>
+          <a:xfrm>
+            <a:off x="548640" y="320040"/>
+            <a:ext cx="11094415" cy="274320"/>
+          </a:xfrm>
+          <a:prstGeom prst="rect">
+            <a:avLst/>
+          </a:prstGeom>
+          <a:noFill/>
+        </p:spPr>
+        <p:txBody>
+          <a:bodyPr wrap="square" anchor="t" lIns="0" rIns="0" tIns="0" bIns="0"/>
+          <a:lstStyle/>
+          <a:p>
+            <a:pPr algn="l"/>
+            <a:r>
+              <a:rPr sz="1100" b="1" i="0">
+                <a:solidFill>
+                  <a:srgbClr val="54595D"/>
+                </a:solidFill>
+                <a:latin typeface="Calibri"/>
+              </a:rPr>
+              <a:t>CORE COMPONENT  ·  Core Paper 1</a:t>
+            </a:r>
+          </a:p>
+        </p:txBody>
+      </p:sp>
+      <p:sp>
+        <p:nvSpPr>
+          <p:cNvPr id="3" name="TextBox 2"/>
+          <p:cNvSpPr txBox="1"/>
+          <p:nvPr/>
+        </p:nvSpPr>
+        <p:spPr>
+          <a:xfrm>
+            <a:off x="548640" y="566928"/>
+            <a:ext cx="11094415" cy="822960"/>
+          </a:xfrm>
+          <a:prstGeom prst="rect">
+            <a:avLst/>
+          </a:prstGeom>
+          <a:noFill/>
+        </p:spPr>
+        <p:txBody>
+          <a:bodyPr wrap="square" anchor="ctr" lIns="0" rIns="0" tIns="0" bIns="0"/>
+          <a:lstStyle/>
+          <a:p>
+            <a:pPr algn="l"/>
+            <a:r>
+              <a:rPr sz="3200" b="1" i="0">
+                <a:solidFill>
+                  <a:srgbClr val="03306E"/>
+                </a:solidFill>
+                <a:latin typeface="Cambria"/>
+              </a:rPr>
+              <a:t>Finding the critical path</a:t>
+            </a:r>
+          </a:p>
+        </p:txBody>
+      </p:sp>
+      <p:sp>
+        <p:nvSpPr>
+          <p:cNvPr id="4" name="TextBox 3"/>
+          <p:cNvSpPr txBox="1"/>
+          <p:nvPr/>
+        </p:nvSpPr>
+        <p:spPr>
+          <a:xfrm>
+            <a:off x="548640" y="6446520"/>
+            <a:ext cx="8229600" cy="274320"/>
+          </a:xfrm>
+          <a:prstGeom prst="rect">
+            <a:avLst/>
+          </a:prstGeom>
+          <a:noFill/>
+        </p:spPr>
+        <p:txBody>
+          <a:bodyPr wrap="square" anchor="t" lIns="0" rIns="0" tIns="0" bIns="0"/>
+          <a:lstStyle/>
+          <a:p>
+            <a:pPr algn="l"/>
+            <a:r>
+              <a:rPr sz="1000" b="0" i="0">
+                <a:solidFill>
+                  <a:srgbClr val="54595D"/>
+                </a:solidFill>
+                <a:latin typeface="Calibri"/>
+              </a:rPr>
+              <a:t>Digital Support and Security T Level  ·  Project Management and Risk Assessment</a:t>
+            </a:r>
+          </a:p>
+        </p:txBody>
+      </p:sp>
+      <p:sp>
+        <p:nvSpPr>
+          <p:cNvPr id="5" name="TextBox 4"/>
+          <p:cNvSpPr txBox="1"/>
+          <p:nvPr/>
+        </p:nvSpPr>
+        <p:spPr>
+          <a:xfrm>
+            <a:off x="10728655" y="6446520"/>
+            <a:ext cx="914400" cy="274320"/>
+          </a:xfrm>
+          <a:prstGeom prst="rect">
+            <a:avLst/>
+          </a:prstGeom>
+          <a:noFill/>
+        </p:spPr>
+        <p:txBody>
+          <a:bodyPr wrap="square" anchor="t" lIns="0" rIns="0" tIns="0" bIns="0"/>
+          <a:lstStyle/>
+          <a:p>
+            <a:pPr algn="r"/>
+            <a:r>
+              <a:rPr sz="1000" b="0" i="0">
+                <a:solidFill>
+                  <a:srgbClr val="54595D"/>
+                </a:solidFill>
+                <a:latin typeface="Calibri"/>
+              </a:rPr>
+              <a:t>14</a:t>
+            </a:r>
+          </a:p>
+        </p:txBody>
+      </p:sp>
+      <p:sp>
+        <p:nvSpPr>
+          <p:cNvPr id="6" name="TextBox 5"/>
+          <p:cNvSpPr txBox="1"/>
+          <p:nvPr/>
+        </p:nvSpPr>
+        <p:spPr>
+          <a:xfrm>
+            <a:off x="548640" y="1600200"/>
+            <a:ext cx="6675120" cy="4572000"/>
+          </a:xfrm>
+          <a:prstGeom prst="rect">
+            <a:avLst/>
+          </a:prstGeom>
+          <a:noFill/>
+        </p:spPr>
+        <p:txBody>
+          <a:bodyPr wrap="square" lIns="0" rIns="0" tIns="0" bIns="0">
+            <a:spAutoFit/>
+          </a:bodyPr>
+          <a:lstStyle/>
+          <a:p>
+            <a:pPr marL="274320" indent="-274320">
+              <a:spcAft>
+                <a:spcPts val="1080"/>
+              </a:spcAft>
+              <a:buClr>
+                <a:srgbClr val="0645AD"/>
+              </a:buClr>
+              <a:buFont typeface="Arial"/>
+              <a:buChar char="•"/>
+            </a:pPr>
+            <a:r>
+              <a:rPr sz="2400" b="0">
+                <a:solidFill>
+                  <a:srgbClr val="202122"/>
+                </a:solidFill>
+                <a:latin typeface="Calibri"/>
+              </a:rPr>
+              <a:t>List every task with its duration and dependencies (a precedence table).</a:t>
+            </a:r>
+          </a:p>
+          <a:p>
+            <a:pPr marL="274320" indent="-274320">
+              <a:spcAft>
+                <a:spcPts val="1080"/>
+              </a:spcAft>
+              <a:buClr>
+                <a:srgbClr val="0645AD"/>
+              </a:buClr>
+              <a:buFont typeface="Arial"/>
+              <a:buChar char="•"/>
+            </a:pPr>
+            <a:r>
+              <a:rPr sz="2400" b="0">
+                <a:solidFill>
+                  <a:srgbClr val="202122"/>
+                </a:solidFill>
+                <a:latin typeface="Calibri"/>
+              </a:rPr>
+              <a:t>Draw the tasks as a network in dependency order.</a:t>
+            </a:r>
+          </a:p>
+          <a:p>
+            <a:pPr marL="274320" indent="-274320">
+              <a:spcAft>
+                <a:spcPts val="1080"/>
+              </a:spcAft>
+              <a:buClr>
+                <a:srgbClr val="0645AD"/>
+              </a:buClr>
+              <a:buFont typeface="Arial"/>
+              <a:buChar char="•"/>
+            </a:pPr>
+            <a:r>
+              <a:rPr sz="2400" b="0">
+                <a:solidFill>
+                  <a:srgbClr val="202122"/>
+                </a:solidFill>
+                <a:latin typeface="Calibri"/>
+              </a:rPr>
+              <a:t>Add up the duration along every route from start to finish.</a:t>
+            </a:r>
+          </a:p>
+          <a:p>
+            <a:pPr marL="274320" indent="-274320">
+              <a:spcAft>
+                <a:spcPts val="1080"/>
+              </a:spcAft>
+              <a:buClr>
+                <a:srgbClr val="0645AD"/>
+              </a:buClr>
+              <a:buFont typeface="Arial"/>
+              <a:buChar char="•"/>
+            </a:pPr>
+            <a:r>
+              <a:rPr sz="2400" b="0">
+                <a:solidFill>
+                  <a:srgbClr val="202122"/>
+                </a:solidFill>
+                <a:latin typeface="Calibri"/>
+              </a:rPr>
+              <a:t>The longest route is the critical path.</a:t>
+            </a:r>
+          </a:p>
+          <a:p>
+            <a:pPr marL="274320" indent="-274320">
+              <a:spcAft>
+                <a:spcPts val="1080"/>
+              </a:spcAft>
+              <a:buClr>
+                <a:srgbClr val="0645AD"/>
+              </a:buClr>
+              <a:buFont typeface="Arial"/>
+              <a:buChar char="•"/>
+            </a:pPr>
+            <a:r>
+              <a:rPr sz="2400" b="0">
+                <a:solidFill>
+                  <a:srgbClr val="202122"/>
+                </a:solidFill>
+                <a:latin typeface="Calibri"/>
+              </a:rPr>
+              <a:t>A delay to any task on it delays the whole project.</a:t>
+            </a:r>
+          </a:p>
+        </p:txBody>
+      </p:sp>
+      <p:sp>
+        <p:nvSpPr>
+          <p:cNvPr id="7" name="Rounded Rectangle 6"/>
+          <p:cNvSpPr/>
+          <p:nvPr/>
+        </p:nvSpPr>
+        <p:spPr>
+          <a:xfrm>
+            <a:off x="7772400" y="1600200"/>
+            <a:ext cx="3867912" cy="4434840"/>
+          </a:xfrm>
+          <a:prstGeom prst="roundRect">
+            <a:avLst>
+              <a:gd name="adj" fmla="val 8000"/>
+            </a:avLst>
+          </a:prstGeom>
+          <a:solidFill>
+            <a:srgbClr val="03306E"/>
+          </a:solidFill>
+          <a:ln>
+            <a:noFill/>
+          </a:ln>
+          <a:effectLst/>
+        </p:spPr>
+        <p:style>
+          <a:lnRef idx="1">
+            <a:schemeClr val="accent1"/>
+          </a:lnRef>
+          <a:fillRef idx="3">
+            <a:schemeClr val="accent1"/>
+          </a:fillRef>
+          <a:effectRef idx="2">
+            <a:schemeClr val="accent1"/>
+          </a:effectRef>
+          <a:fontRef idx="minor">
+            <a:schemeClr val="lt1"/>
+          </a:fontRef>
+        </p:style>
+        <p:txBody>
+          <a:bodyPr rtlCol="0" anchor="ctr"/>
+          <a:lstStyle/>
+          <a:p/>
+        </p:txBody>
+      </p:sp>
+      <p:sp>
+        <p:nvSpPr>
+          <p:cNvPr id="8" name="Oval 7"/>
+          <p:cNvSpPr/>
+          <p:nvPr/>
+        </p:nvSpPr>
+        <p:spPr>
+          <a:xfrm>
+            <a:off x="8046720" y="1874519"/>
+            <a:ext cx="548640" cy="548640"/>
+          </a:xfrm>
+          <a:prstGeom prst="ellipse">
+            <a:avLst/>
+          </a:prstGeom>
+          <a:solidFill>
+            <a:srgbClr val="F2B705"/>
+          </a:solidFill>
+          <a:ln>
+            <a:noFill/>
+          </a:ln>
+          <a:effectLst/>
+        </p:spPr>
+        <p:style>
+          <a:lnRef idx="1">
+            <a:schemeClr val="accent1"/>
+          </a:lnRef>
+          <a:fillRef idx="3">
+            <a:schemeClr val="accent1"/>
+          </a:fillRef>
+          <a:effectRef idx="2">
+            <a:schemeClr val="accent1"/>
+          </a:effectRef>
+          <a:fontRef idx="minor">
+            <a:schemeClr val="lt1"/>
+          </a:fontRef>
+        </p:style>
+        <p:txBody>
+          <a:bodyPr rtlCol="0" anchor="ctr" lIns="0" rIns="0" tIns="0" bIns="0"/>
+          <a:lstStyle/>
+          <a:p>
+            <a:pPr algn="ctr"/>
+            <a:r>
+              <a:rPr sz="2000" b="1">
+                <a:solidFill>
+                  <a:srgbClr val="202122"/>
+                </a:solidFill>
+                <a:latin typeface="Calibri"/>
+              </a:rPr>
+              <a:t>!</a:t>
+            </a:r>
+          </a:p>
+        </p:txBody>
+      </p:sp>
+      <p:sp>
+        <p:nvSpPr>
+          <p:cNvPr id="9" name="TextBox 8"/>
+          <p:cNvSpPr txBox="1"/>
+          <p:nvPr/>
+        </p:nvSpPr>
+        <p:spPr>
+          <a:xfrm>
+            <a:off x="8046720" y="2606040"/>
+            <a:ext cx="3291840" cy="365760"/>
+          </a:xfrm>
+          <a:prstGeom prst="rect">
+            <a:avLst/>
+          </a:prstGeom>
+          <a:noFill/>
+        </p:spPr>
+        <p:txBody>
+          <a:bodyPr wrap="square" anchor="t" lIns="0" rIns="0" tIns="0" bIns="0"/>
+          <a:lstStyle/>
+          <a:p>
+            <a:pPr algn="l"/>
+            <a:r>
+              <a:rPr sz="1300" b="1" i="0">
+                <a:solidFill>
+                  <a:srgbClr val="A9C8F0"/>
+                </a:solidFill>
+                <a:latin typeface="Calibri"/>
+              </a:rPr>
+              <a:t>KEY IDEA</a:t>
+            </a:r>
+          </a:p>
+        </p:txBody>
+      </p:sp>
+      <p:sp>
+        <p:nvSpPr>
+          <p:cNvPr id="10" name="TextBox 9"/>
+          <p:cNvSpPr txBox="1"/>
+          <p:nvPr/>
+        </p:nvSpPr>
+        <p:spPr>
+          <a:xfrm>
+            <a:off x="8046720" y="3017520"/>
+            <a:ext cx="3291840" cy="2926080"/>
+          </a:xfrm>
+          <a:prstGeom prst="rect">
+            <a:avLst/>
+          </a:prstGeom>
+          <a:noFill/>
+        </p:spPr>
+        <p:txBody>
+          <a:bodyPr wrap="square" anchor="t" lIns="0" rIns="0" tIns="0" bIns="0"/>
+          <a:lstStyle/>
+          <a:p>
+            <a:pPr algn="l"/>
+            <a:r>
+              <a:rPr sz="2200" b="0" i="0">
+                <a:solidFill>
+                  <a:srgbClr val="FFFFFF"/>
+                </a:solidFill>
+                <a:latin typeface="Cambria"/>
+              </a:rPr>
+              <a:t>Tasks not on the critical path have float: spare time they can slip without delaying the finish.</a:t>
+            </a:r>
+          </a:p>
+        </p:txBody>
+      </p:sp>
+    </p:spTree>
+  </p:cSld>
+  <p:clrMapOvr>
+    <a:masterClrMapping/>
+  </p:clrMapOvr>
+</p:sld>
+</file>
+
+<file path=ppt/slides/slide15.xml><?xml version="1.0" encoding="utf-8"?>
+<p:sld xmlns:a="http://schemas.openxmlformats.org/drawingml/2006/main" xmlns:p="http://schemas.openxmlformats.org/presentationml/2006/main" xmlns:r="http://schemas.openxmlformats.org/officeDocument/2006/relationships">
+  <p:cSld>
+    <p:bg>
+      <p:bgPr>
+        <a:solidFill>
+          <a:srgbClr val="FFFFFF"/>
+        </a:solidFill>
+        <a:effectLst/>
+      </p:bgPr>
+    </p:bg>
+    <p:spTree>
+      <p:nvGrpSpPr>
+        <p:cNvPr id="1" name=""/>
+        <p:cNvGrpSpPr/>
+        <p:nvPr/>
+      </p:nvGrpSpPr>
+      <p:grpSpPr/>
+      <p:sp>
+        <p:nvSpPr>
+          <p:cNvPr id="2" name="TextBox 1"/>
+          <p:cNvSpPr txBox="1"/>
+          <p:nvPr/>
+        </p:nvSpPr>
+        <p:spPr>
+          <a:xfrm>
+            <a:off x="548640" y="320040"/>
+            <a:ext cx="11094415" cy="274320"/>
+          </a:xfrm>
+          <a:prstGeom prst="rect">
+            <a:avLst/>
+          </a:prstGeom>
+          <a:noFill/>
+        </p:spPr>
+        <p:txBody>
+          <a:bodyPr wrap="square" anchor="t" lIns="0" rIns="0" tIns="0" bIns="0"/>
+          <a:lstStyle/>
+          <a:p>
+            <a:pPr algn="l"/>
+            <a:r>
+              <a:rPr sz="1100" b="1" i="0">
+                <a:solidFill>
+                  <a:srgbClr val="54595D"/>
+                </a:solidFill>
+                <a:latin typeface="Calibri"/>
+              </a:rPr>
+              <a:t>CORE COMPONENT  ·  Core Paper 1</a:t>
+            </a:r>
+          </a:p>
+        </p:txBody>
+      </p:sp>
+      <p:sp>
+        <p:nvSpPr>
+          <p:cNvPr id="3" name="TextBox 2"/>
+          <p:cNvSpPr txBox="1"/>
+          <p:nvPr/>
+        </p:nvSpPr>
+        <p:spPr>
+          <a:xfrm>
+            <a:off x="548640" y="566928"/>
+            <a:ext cx="11094415" cy="822960"/>
+          </a:xfrm>
+          <a:prstGeom prst="rect">
+            <a:avLst/>
+          </a:prstGeom>
+          <a:noFill/>
+        </p:spPr>
+        <p:txBody>
+          <a:bodyPr wrap="square" anchor="ctr" lIns="0" rIns="0" tIns="0" bIns="0"/>
+          <a:lstStyle/>
+          <a:p>
+            <a:pPr algn="l"/>
+            <a:r>
+              <a:rPr sz="3200" b="1" i="0">
+                <a:solidFill>
+                  <a:srgbClr val="03306E"/>
+                </a:solidFill>
+                <a:latin typeface="Cambria"/>
+              </a:rPr>
+              <a:t>Quick check: Finding the critical path</a:t>
+            </a:r>
+          </a:p>
+        </p:txBody>
+      </p:sp>
+      <p:sp>
+        <p:nvSpPr>
+          <p:cNvPr id="4" name="TextBox 3"/>
+          <p:cNvSpPr txBox="1"/>
+          <p:nvPr/>
+        </p:nvSpPr>
+        <p:spPr>
+          <a:xfrm>
+            <a:off x="548640" y="6446520"/>
+            <a:ext cx="8229600" cy="274320"/>
+          </a:xfrm>
+          <a:prstGeom prst="rect">
+            <a:avLst/>
+          </a:prstGeom>
+          <a:noFill/>
+        </p:spPr>
+        <p:txBody>
+          <a:bodyPr wrap="square" anchor="t" lIns="0" rIns="0" tIns="0" bIns="0"/>
+          <a:lstStyle/>
+          <a:p>
+            <a:pPr algn="l"/>
+            <a:r>
+              <a:rPr sz="1000" b="0" i="0">
+                <a:solidFill>
+                  <a:srgbClr val="54595D"/>
+                </a:solidFill>
+                <a:latin typeface="Calibri"/>
+              </a:rPr>
+              <a:t>Digital Support and Security T Level  ·  Project Management and Risk Assessment</a:t>
+            </a:r>
+          </a:p>
+        </p:txBody>
+      </p:sp>
+      <p:sp>
+        <p:nvSpPr>
+          <p:cNvPr id="5" name="TextBox 4"/>
+          <p:cNvSpPr txBox="1"/>
+          <p:nvPr/>
+        </p:nvSpPr>
+        <p:spPr>
+          <a:xfrm>
+            <a:off x="10728655" y="6446520"/>
+            <a:ext cx="914400" cy="274320"/>
+          </a:xfrm>
+          <a:prstGeom prst="rect">
+            <a:avLst/>
+          </a:prstGeom>
+          <a:noFill/>
+        </p:spPr>
+        <p:txBody>
+          <a:bodyPr wrap="square" anchor="t" lIns="0" rIns="0" tIns="0" bIns="0"/>
+          <a:lstStyle/>
+          <a:p>
+            <a:pPr algn="r"/>
+            <a:r>
+              <a:rPr sz="1000" b="0" i="0">
+                <a:solidFill>
+                  <a:srgbClr val="54595D"/>
+                </a:solidFill>
+                <a:latin typeface="Calibri"/>
+              </a:rPr>
+              <a:t>15</a:t>
+            </a:r>
+          </a:p>
+        </p:txBody>
+      </p:sp>
+      <p:sp>
+        <p:nvSpPr>
+          <p:cNvPr id="6" name="Oval 5"/>
+          <p:cNvSpPr/>
+          <p:nvPr/>
+        </p:nvSpPr>
+        <p:spPr>
+          <a:xfrm>
+            <a:off x="548640" y="1691640"/>
+            <a:ext cx="502920" cy="502920"/>
+          </a:xfrm>
+          <a:prstGeom prst="ellipse">
+            <a:avLst/>
+          </a:prstGeom>
+          <a:solidFill>
+            <a:srgbClr val="F2B705"/>
+          </a:solidFill>
+          <a:ln>
+            <a:noFill/>
+          </a:ln>
+          <a:effectLst/>
+        </p:spPr>
+        <p:style>
+          <a:lnRef idx="1">
+            <a:schemeClr val="accent1"/>
+          </a:lnRef>
+          <a:fillRef idx="3">
+            <a:schemeClr val="accent1"/>
+          </a:fillRef>
+          <a:effectRef idx="2">
+            <a:schemeClr val="accent1"/>
+          </a:effectRef>
+          <a:fontRef idx="minor">
+            <a:schemeClr val="lt1"/>
+          </a:fontRef>
+        </p:style>
+        <p:txBody>
+          <a:bodyPr rtlCol="0" anchor="ctr" lIns="0" rIns="0" tIns="0" bIns="0"/>
+          <a:lstStyle/>
+          <a:p>
+            <a:pPr algn="ctr"/>
+            <a:r>
+              <a:rPr sz="1600" b="1">
+                <a:solidFill>
+                  <a:srgbClr val="202122"/>
+                </a:solidFill>
+                <a:latin typeface="Calibri"/>
+              </a:rPr>
+              <a:t>1</a:t>
+            </a:r>
+          </a:p>
+        </p:txBody>
+      </p:sp>
+      <p:sp>
+        <p:nvSpPr>
+          <p:cNvPr id="7" name="TextBox 6"/>
+          <p:cNvSpPr txBox="1"/>
+          <p:nvPr/>
+        </p:nvSpPr>
+        <p:spPr>
+          <a:xfrm>
+            <a:off x="1371600" y="1645920"/>
+            <a:ext cx="10271455" cy="1188720"/>
+          </a:xfrm>
+          <a:prstGeom prst="rect">
+            <a:avLst/>
+          </a:prstGeom>
+          <a:noFill/>
+        </p:spPr>
+        <p:txBody>
+          <a:bodyPr wrap="square" anchor="t" lIns="0" rIns="0" tIns="0" bIns="0"/>
+          <a:lstStyle/>
+          <a:p>
+            <a:pPr algn="l"/>
+            <a:r>
+              <a:rPr sz="2400" b="0" i="0">
+                <a:solidFill>
+                  <a:srgbClr val="202122"/>
+                </a:solidFill>
+                <a:latin typeface="Calibri"/>
+              </a:rPr>
+              <a:t>What is float?</a:t>
+            </a:r>
+          </a:p>
+        </p:txBody>
+      </p:sp>
+      <p:sp>
+        <p:nvSpPr>
+          <p:cNvPr id="8" name="Oval 7"/>
+          <p:cNvSpPr/>
+          <p:nvPr/>
+        </p:nvSpPr>
+        <p:spPr>
+          <a:xfrm>
+            <a:off x="548640" y="3108960"/>
+            <a:ext cx="502920" cy="502920"/>
+          </a:xfrm>
+          <a:prstGeom prst="ellipse">
+            <a:avLst/>
+          </a:prstGeom>
+          <a:solidFill>
+            <a:srgbClr val="F2B705"/>
+          </a:solidFill>
+          <a:ln>
+            <a:noFill/>
+          </a:ln>
+          <a:effectLst/>
+        </p:spPr>
+        <p:style>
+          <a:lnRef idx="1">
+            <a:schemeClr val="accent1"/>
+          </a:lnRef>
+          <a:fillRef idx="3">
+            <a:schemeClr val="accent1"/>
+          </a:fillRef>
+          <a:effectRef idx="2">
+            <a:schemeClr val="accent1"/>
+          </a:effectRef>
+          <a:fontRef idx="minor">
+            <a:schemeClr val="lt1"/>
+          </a:fontRef>
+        </p:style>
+        <p:txBody>
+          <a:bodyPr rtlCol="0" anchor="ctr" lIns="0" rIns="0" tIns="0" bIns="0"/>
+          <a:lstStyle/>
+          <a:p>
+            <a:pPr algn="ctr"/>
+            <a:r>
+              <a:rPr sz="1600" b="1">
+                <a:solidFill>
+                  <a:srgbClr val="202122"/>
+                </a:solidFill>
+                <a:latin typeface="Calibri"/>
+              </a:rPr>
+              <a:t>2</a:t>
+            </a:r>
+          </a:p>
+        </p:txBody>
+      </p:sp>
+      <p:sp>
+        <p:nvSpPr>
+          <p:cNvPr id="9" name="TextBox 8"/>
+          <p:cNvSpPr txBox="1"/>
+          <p:nvPr/>
+        </p:nvSpPr>
+        <p:spPr>
+          <a:xfrm>
+            <a:off x="1371600" y="3063240"/>
+            <a:ext cx="10271455" cy="1188720"/>
+          </a:xfrm>
+          <a:prstGeom prst="rect">
+            <a:avLst/>
+          </a:prstGeom>
+          <a:noFill/>
+        </p:spPr>
+        <p:txBody>
+          <a:bodyPr wrap="square" anchor="t" lIns="0" rIns="0" tIns="0" bIns="0"/>
+          <a:lstStyle/>
+          <a:p>
+            <a:pPr algn="l"/>
+            <a:r>
+              <a:rPr sz="2400" b="0" i="0">
+                <a:solidFill>
+                  <a:srgbClr val="202122"/>
+                </a:solidFill>
+                <a:latin typeface="Calibri"/>
+              </a:rPr>
+              <a:t>What happens if a critical task is late?</a:t>
+            </a:r>
+          </a:p>
+        </p:txBody>
+      </p:sp>
+      <p:sp>
+        <p:nvSpPr>
+          <p:cNvPr id="10" name="Oval 9"/>
+          <p:cNvSpPr/>
+          <p:nvPr/>
+        </p:nvSpPr>
+        <p:spPr>
+          <a:xfrm>
+            <a:off x="548640" y="4526280"/>
+            <a:ext cx="502920" cy="502920"/>
+          </a:xfrm>
+          <a:prstGeom prst="ellipse">
+            <a:avLst/>
+          </a:prstGeom>
+          <a:solidFill>
+            <a:srgbClr val="F2B705"/>
+          </a:solidFill>
+          <a:ln>
+            <a:noFill/>
+          </a:ln>
+          <a:effectLst/>
+        </p:spPr>
+        <p:style>
+          <a:lnRef idx="1">
+            <a:schemeClr val="accent1"/>
+          </a:lnRef>
+          <a:fillRef idx="3">
+            <a:schemeClr val="accent1"/>
+          </a:fillRef>
+          <a:effectRef idx="2">
+            <a:schemeClr val="accent1"/>
+          </a:effectRef>
+          <a:fontRef idx="minor">
+            <a:schemeClr val="lt1"/>
+          </a:fontRef>
+        </p:style>
+        <p:txBody>
+          <a:bodyPr rtlCol="0" anchor="ctr" lIns="0" rIns="0" tIns="0" bIns="0"/>
+          <a:lstStyle/>
+          <a:p>
+            <a:pPr algn="ctr"/>
+            <a:r>
+              <a:rPr sz="1600" b="1">
+                <a:solidFill>
+                  <a:srgbClr val="202122"/>
+                </a:solidFill>
+                <a:latin typeface="Calibri"/>
+              </a:rPr>
+              <a:t>3</a:t>
+            </a:r>
+          </a:p>
+        </p:txBody>
+      </p:sp>
+      <p:sp>
+        <p:nvSpPr>
+          <p:cNvPr id="11" name="TextBox 10"/>
+          <p:cNvSpPr txBox="1"/>
+          <p:nvPr/>
+        </p:nvSpPr>
+        <p:spPr>
+          <a:xfrm>
+            <a:off x="1371600" y="4480560"/>
+            <a:ext cx="10271455" cy="1188720"/>
+          </a:xfrm>
+          <a:prstGeom prst="rect">
+            <a:avLst/>
+          </a:prstGeom>
+          <a:noFill/>
+        </p:spPr>
+        <p:txBody>
+          <a:bodyPr wrap="square" anchor="t" lIns="0" rIns="0" tIns="0" bIns="0"/>
+          <a:lstStyle/>
+          <a:p>
+            <a:pPr algn="l"/>
+            <a:r>
+              <a:rPr sz="2400" b="0" i="0">
+                <a:solidFill>
+                  <a:srgbClr val="202122"/>
+                </a:solidFill>
+                <a:latin typeface="Calibri"/>
+              </a:rPr>
+              <a:t>What do you need before you can find the critical path?</a:t>
+            </a:r>
+          </a:p>
+        </p:txBody>
+      </p:sp>
+      <p:sp>
+        <p:nvSpPr>
+          <p:cNvPr id="12" name="TextBox 11"/>
+          <p:cNvSpPr txBox="1"/>
+          <p:nvPr/>
+        </p:nvSpPr>
+        <p:spPr>
+          <a:xfrm>
+            <a:off x="548640" y="5852160"/>
+            <a:ext cx="11094415" cy="365760"/>
+          </a:xfrm>
+          <a:prstGeom prst="rect">
+            <a:avLst/>
+          </a:prstGeom>
+          <a:noFill/>
+        </p:spPr>
+        <p:txBody>
+          <a:bodyPr wrap="square" anchor="t" lIns="0" rIns="0" tIns="0" bIns="0"/>
+          <a:lstStyle/>
+          <a:p>
+            <a:pPr algn="l"/>
+            <a:r>
+              <a:rPr sz="1300" b="0" i="1">
+                <a:solidFill>
+                  <a:srgbClr val="54595D"/>
+                </a:solidFill>
+                <a:latin typeface="Calibri"/>
+              </a:rPr>
+              <a:t>Answer on mini whiteboards or in your book. Answers are in the speaker notes.</a:t>
+            </a:r>
+          </a:p>
+        </p:txBody>
+      </p:sp>
+    </p:spTree>
+  </p:cSld>
+  <p:clrMapOvr>
+    <a:masterClrMapping/>
+  </p:clrMapOvr>
+</p:sld>
+</file>
+
+<file path=ppt/slides/slide16.xml><?xml version="1.0" encoding="utf-8"?>
+<p:sld xmlns:a="http://schemas.openxmlformats.org/drawingml/2006/main" xmlns:p="http://schemas.openxmlformats.org/presentationml/2006/main" xmlns:r="http://schemas.openxmlformats.org/officeDocument/2006/relationships">
+  <p:cSld>
+    <p:bg>
+      <p:bgPr>
+        <a:solidFill>
+          <a:srgbClr val="FFFFFF"/>
+        </a:solidFill>
+        <a:effectLst/>
+      </p:bgPr>
+    </p:bg>
+    <p:spTree>
+      <p:nvGrpSpPr>
+        <p:cNvPr id="1" name=""/>
+        <p:cNvGrpSpPr/>
+        <p:nvPr/>
+      </p:nvGrpSpPr>
+      <p:grpSpPr/>
+      <p:sp>
+        <p:nvSpPr>
+          <p:cNvPr id="2" name="TextBox 1"/>
+          <p:cNvSpPr txBox="1"/>
+          <p:nvPr/>
+        </p:nvSpPr>
+        <p:spPr>
+          <a:xfrm>
+            <a:off x="548640" y="320040"/>
+            <a:ext cx="11094415" cy="274320"/>
+          </a:xfrm>
+          <a:prstGeom prst="rect">
+            <a:avLst/>
+          </a:prstGeom>
+          <a:noFill/>
+        </p:spPr>
+        <p:txBody>
+          <a:bodyPr wrap="square" anchor="t" lIns="0" rIns="0" tIns="0" bIns="0"/>
+          <a:lstStyle/>
+          <a:p>
+            <a:pPr algn="l"/>
+            <a:r>
+              <a:rPr sz="1100" b="1" i="0">
+                <a:solidFill>
+                  <a:srgbClr val="54595D"/>
+                </a:solidFill>
+                <a:latin typeface="Calibri"/>
+              </a:rPr>
+              <a:t>CORE COMPONENT  ·  Core Paper 1</a:t>
+            </a:r>
+          </a:p>
+        </p:txBody>
+      </p:sp>
+      <p:sp>
+        <p:nvSpPr>
+          <p:cNvPr id="3" name="TextBox 2"/>
+          <p:cNvSpPr txBox="1"/>
+          <p:nvPr/>
+        </p:nvSpPr>
+        <p:spPr>
+          <a:xfrm>
+            <a:off x="548640" y="566928"/>
+            <a:ext cx="11094415" cy="822960"/>
+          </a:xfrm>
+          <a:prstGeom prst="rect">
+            <a:avLst/>
+          </a:prstGeom>
+          <a:noFill/>
+        </p:spPr>
+        <p:txBody>
+          <a:bodyPr wrap="square" anchor="ctr" lIns="0" rIns="0" tIns="0" bIns="0"/>
+          <a:lstStyle/>
+          <a:p>
+            <a:pPr algn="l"/>
+            <a:r>
+              <a:rPr sz="3200" b="1" i="0">
+                <a:solidFill>
+                  <a:srgbClr val="03306E"/>
+                </a:solidFill>
+                <a:latin typeface="Cambria"/>
+              </a:rPr>
+              <a:t>Check your understanding</a:t>
+            </a:r>
+          </a:p>
+        </p:txBody>
+      </p:sp>
+      <p:sp>
+        <p:nvSpPr>
+          <p:cNvPr id="4" name="TextBox 3"/>
+          <p:cNvSpPr txBox="1"/>
+          <p:nvPr/>
+        </p:nvSpPr>
+        <p:spPr>
+          <a:xfrm>
+            <a:off x="548640" y="6446520"/>
+            <a:ext cx="8229600" cy="274320"/>
+          </a:xfrm>
+          <a:prstGeom prst="rect">
+            <a:avLst/>
+          </a:prstGeom>
+          <a:noFill/>
+        </p:spPr>
+        <p:txBody>
+          <a:bodyPr wrap="square" anchor="t" lIns="0" rIns="0" tIns="0" bIns="0"/>
+          <a:lstStyle/>
+          <a:p>
+            <a:pPr algn="l"/>
+            <a:r>
+              <a:rPr sz="1000" b="0" i="0">
+                <a:solidFill>
+                  <a:srgbClr val="54595D"/>
+                </a:solidFill>
+                <a:latin typeface="Calibri"/>
+              </a:rPr>
+              <a:t>Digital Support and Security T Level  ·  Project Management and Risk Assessment</a:t>
+            </a:r>
+          </a:p>
+        </p:txBody>
+      </p:sp>
+      <p:sp>
+        <p:nvSpPr>
+          <p:cNvPr id="5" name="TextBox 4"/>
+          <p:cNvSpPr txBox="1"/>
+          <p:nvPr/>
+        </p:nvSpPr>
+        <p:spPr>
+          <a:xfrm>
+            <a:off x="10728655" y="6446520"/>
+            <a:ext cx="914400" cy="274320"/>
+          </a:xfrm>
+          <a:prstGeom prst="rect">
+            <a:avLst/>
+          </a:prstGeom>
+          <a:noFill/>
+        </p:spPr>
+        <p:txBody>
+          <a:bodyPr wrap="square" anchor="t" lIns="0" rIns="0" tIns="0" bIns="0"/>
+          <a:lstStyle/>
+          <a:p>
+            <a:pPr algn="r"/>
+            <a:r>
+              <a:rPr sz="1000" b="0" i="0">
+                <a:solidFill>
+                  <a:srgbClr val="54595D"/>
+                </a:solidFill>
+                <a:latin typeface="Calibri"/>
+              </a:rPr>
+              <a:t>16</a:t>
+            </a:r>
+          </a:p>
+        </p:txBody>
+      </p:sp>
+      <p:sp>
+        <p:nvSpPr>
+          <p:cNvPr id="6" name="Oval 5"/>
+          <p:cNvSpPr/>
+          <p:nvPr/>
+        </p:nvSpPr>
+        <p:spPr>
+          <a:xfrm>
+            <a:off x="548640" y="1618488"/>
+            <a:ext cx="411480" cy="411480"/>
+          </a:xfrm>
+          <a:prstGeom prst="ellipse">
+            <a:avLst/>
+          </a:prstGeom>
+          <a:solidFill>
+            <a:srgbClr val="F2B705"/>
+          </a:solidFill>
+          <a:ln>
+            <a:noFill/>
+          </a:ln>
+          <a:effectLst/>
+        </p:spPr>
+        <p:style>
+          <a:lnRef idx="1">
+            <a:schemeClr val="accent1"/>
+          </a:lnRef>
+          <a:fillRef idx="3">
+            <a:schemeClr val="accent1"/>
+          </a:fillRef>
+          <a:effectRef idx="2">
+            <a:schemeClr val="accent1"/>
+          </a:effectRef>
+          <a:fontRef idx="minor">
+            <a:schemeClr val="lt1"/>
+          </a:fontRef>
+        </p:style>
+        <p:txBody>
+          <a:bodyPr rtlCol="0" anchor="ctr" lIns="0" rIns="0" tIns="0" bIns="0"/>
+          <a:lstStyle/>
+          <a:p>
+            <a:pPr algn="ctr"/>
+            <a:r>
+              <a:rPr sz="1400" b="1">
+                <a:solidFill>
+                  <a:srgbClr val="202122"/>
+                </a:solidFill>
+                <a:latin typeface="Calibri"/>
+              </a:rPr>
+              <a:t>1</a:t>
+            </a:r>
+          </a:p>
+        </p:txBody>
+      </p:sp>
+      <p:sp>
+        <p:nvSpPr>
+          <p:cNvPr id="7" name="TextBox 6"/>
+          <p:cNvSpPr txBox="1"/>
+          <p:nvPr/>
+        </p:nvSpPr>
+        <p:spPr>
+          <a:xfrm>
+            <a:off x="1234440" y="1600200"/>
+            <a:ext cx="10408615" cy="791870"/>
+          </a:xfrm>
+          <a:prstGeom prst="rect">
+            <a:avLst/>
+          </a:prstGeom>
+          <a:noFill/>
+        </p:spPr>
+        <p:txBody>
+          <a:bodyPr wrap="square" anchor="t" lIns="0" rIns="0" tIns="0" bIns="0"/>
+          <a:lstStyle/>
+          <a:p>
+            <a:pPr algn="l"/>
+            <a:r>
+              <a:rPr sz="2200" b="0" i="0">
+                <a:solidFill>
+                  <a:srgbClr val="202122"/>
+                </a:solidFill>
+                <a:latin typeface="Calibri"/>
+              </a:rPr>
+              <a:t>A risk is 'probable' and 'critical'. What is its score?</a:t>
+            </a:r>
+          </a:p>
+        </p:txBody>
+      </p:sp>
+      <p:sp>
+        <p:nvSpPr>
+          <p:cNvPr id="8" name="Oval 7"/>
+          <p:cNvSpPr/>
+          <p:nvPr/>
+        </p:nvSpPr>
+        <p:spPr>
+          <a:xfrm>
+            <a:off x="548640" y="2574950"/>
+            <a:ext cx="411480" cy="411480"/>
+          </a:xfrm>
+          <a:prstGeom prst="ellipse">
+            <a:avLst/>
+          </a:prstGeom>
+          <a:solidFill>
+            <a:srgbClr val="F2B705"/>
+          </a:solidFill>
+          <a:ln>
+            <a:noFill/>
+          </a:ln>
+          <a:effectLst/>
+        </p:spPr>
+        <p:style>
+          <a:lnRef idx="1">
+            <a:schemeClr val="accent1"/>
+          </a:lnRef>
+          <a:fillRef idx="3">
+            <a:schemeClr val="accent1"/>
+          </a:fillRef>
+          <a:effectRef idx="2">
+            <a:schemeClr val="accent1"/>
+          </a:effectRef>
+          <a:fontRef idx="minor">
+            <a:schemeClr val="lt1"/>
+          </a:fontRef>
+        </p:style>
+        <p:txBody>
+          <a:bodyPr rtlCol="0" anchor="ctr" lIns="0" rIns="0" tIns="0" bIns="0"/>
+          <a:lstStyle/>
+          <a:p>
+            <a:pPr algn="ctr"/>
+            <a:r>
+              <a:rPr sz="1400" b="1">
+                <a:solidFill>
+                  <a:srgbClr val="202122"/>
+                </a:solidFill>
+                <a:latin typeface="Calibri"/>
+              </a:rPr>
+              <a:t>2</a:t>
+            </a:r>
+          </a:p>
+        </p:txBody>
+      </p:sp>
+      <p:sp>
+        <p:nvSpPr>
+          <p:cNvPr id="9" name="TextBox 8"/>
+          <p:cNvSpPr txBox="1"/>
+          <p:nvPr/>
+        </p:nvSpPr>
+        <p:spPr>
+          <a:xfrm>
+            <a:off x="1234440" y="2556662"/>
+            <a:ext cx="10408615" cy="791870"/>
+          </a:xfrm>
+          <a:prstGeom prst="rect">
+            <a:avLst/>
+          </a:prstGeom>
+          <a:noFill/>
+        </p:spPr>
+        <p:txBody>
+          <a:bodyPr wrap="square" anchor="t" lIns="0" rIns="0" tIns="0" bIns="0"/>
+          <a:lstStyle/>
+          <a:p>
+            <a:pPr algn="l"/>
+            <a:r>
+              <a:rPr sz="2200" b="0" i="0">
+                <a:solidFill>
+                  <a:srgbClr val="202122"/>
+                </a:solidFill>
+                <a:latin typeface="Calibri"/>
+              </a:rPr>
+              <a:t>Name three things a risk assessment should record.</a:t>
+            </a:r>
+          </a:p>
+        </p:txBody>
+      </p:sp>
+      <p:sp>
+        <p:nvSpPr>
+          <p:cNvPr id="10" name="Oval 9"/>
+          <p:cNvSpPr/>
+          <p:nvPr/>
+        </p:nvSpPr>
+        <p:spPr>
+          <a:xfrm>
+            <a:off x="548640" y="3531412"/>
+            <a:ext cx="411480" cy="411480"/>
+          </a:xfrm>
+          <a:prstGeom prst="ellipse">
+            <a:avLst/>
+          </a:prstGeom>
+          <a:solidFill>
+            <a:srgbClr val="F2B705"/>
+          </a:solidFill>
+          <a:ln>
+            <a:noFill/>
+          </a:ln>
+          <a:effectLst/>
+        </p:spPr>
+        <p:style>
+          <a:lnRef idx="1">
+            <a:schemeClr val="accent1"/>
+          </a:lnRef>
+          <a:fillRef idx="3">
+            <a:schemeClr val="accent1"/>
+          </a:fillRef>
+          <a:effectRef idx="2">
+            <a:schemeClr val="accent1"/>
+          </a:effectRef>
+          <a:fontRef idx="minor">
+            <a:schemeClr val="lt1"/>
+          </a:fontRef>
+        </p:style>
+        <p:txBody>
+          <a:bodyPr rtlCol="0" anchor="ctr" lIns="0" rIns="0" tIns="0" bIns="0"/>
+          <a:lstStyle/>
+          <a:p>
+            <a:pPr algn="ctr"/>
+            <a:r>
+              <a:rPr sz="1400" b="1">
+                <a:solidFill>
+                  <a:srgbClr val="202122"/>
+                </a:solidFill>
+                <a:latin typeface="Calibri"/>
+              </a:rPr>
+              <a:t>3</a:t>
+            </a:r>
+          </a:p>
+        </p:txBody>
+      </p:sp>
+      <p:sp>
+        <p:nvSpPr>
+          <p:cNvPr id="11" name="TextBox 10"/>
+          <p:cNvSpPr txBox="1"/>
+          <p:nvPr/>
+        </p:nvSpPr>
+        <p:spPr>
+          <a:xfrm>
+            <a:off x="1234440" y="3513124"/>
+            <a:ext cx="10408615" cy="791870"/>
+          </a:xfrm>
+          <a:prstGeom prst="rect">
+            <a:avLst/>
+          </a:prstGeom>
+          <a:noFill/>
+        </p:spPr>
+        <p:txBody>
+          <a:bodyPr wrap="square" anchor="t" lIns="0" rIns="0" tIns="0" bIns="0"/>
+          <a:lstStyle/>
+          <a:p>
+            <a:pPr algn="l"/>
+            <a:r>
+              <a:rPr sz="2200" b="0" i="0">
+                <a:solidFill>
+                  <a:srgbClr val="202122"/>
+                </a:solidFill>
+                <a:latin typeface="Calibri"/>
+              </a:rPr>
+              <a:t>Which methodology suits a project whose requirements will change?</a:t>
+            </a:r>
+          </a:p>
+        </p:txBody>
+      </p:sp>
+      <p:sp>
+        <p:nvSpPr>
+          <p:cNvPr id="12" name="Oval 11"/>
+          <p:cNvSpPr/>
+          <p:nvPr/>
+        </p:nvSpPr>
+        <p:spPr>
+          <a:xfrm>
+            <a:off x="548640" y="4487875"/>
+            <a:ext cx="411480" cy="411480"/>
+          </a:xfrm>
+          <a:prstGeom prst="ellipse">
+            <a:avLst/>
+          </a:prstGeom>
+          <a:solidFill>
+            <a:srgbClr val="F2B705"/>
+          </a:solidFill>
+          <a:ln>
+            <a:noFill/>
+          </a:ln>
+          <a:effectLst/>
+        </p:spPr>
+        <p:style>
+          <a:lnRef idx="1">
+            <a:schemeClr val="accent1"/>
+          </a:lnRef>
+          <a:fillRef idx="3">
+            <a:schemeClr val="accent1"/>
+          </a:fillRef>
+          <a:effectRef idx="2">
+            <a:schemeClr val="accent1"/>
+          </a:effectRef>
+          <a:fontRef idx="minor">
+            <a:schemeClr val="lt1"/>
+          </a:fontRef>
+        </p:style>
+        <p:txBody>
+          <a:bodyPr rtlCol="0" anchor="ctr" lIns="0" rIns="0" tIns="0" bIns="0"/>
+          <a:lstStyle/>
+          <a:p>
+            <a:pPr algn="ctr"/>
+            <a:r>
+              <a:rPr sz="1400" b="1">
+                <a:solidFill>
+                  <a:srgbClr val="202122"/>
+                </a:solidFill>
+                <a:latin typeface="Calibri"/>
+              </a:rPr>
+              <a:t>4</a:t>
+            </a:r>
+          </a:p>
+        </p:txBody>
+      </p:sp>
+      <p:sp>
+        <p:nvSpPr>
+          <p:cNvPr id="13" name="TextBox 12"/>
+          <p:cNvSpPr txBox="1"/>
+          <p:nvPr/>
+        </p:nvSpPr>
+        <p:spPr>
+          <a:xfrm>
+            <a:off x="1234440" y="4469587"/>
+            <a:ext cx="10408615" cy="791870"/>
+          </a:xfrm>
+          <a:prstGeom prst="rect">
+            <a:avLst/>
+          </a:prstGeom>
+          <a:noFill/>
+        </p:spPr>
+        <p:txBody>
+          <a:bodyPr wrap="square" anchor="t" lIns="0" rIns="0" tIns="0" bIns="0"/>
+          <a:lstStyle/>
+          <a:p>
+            <a:pPr algn="l"/>
+            <a:r>
+              <a:rPr sz="2200" b="0" i="0">
+                <a:solidFill>
+                  <a:srgbClr val="202122"/>
+                </a:solidFill>
+                <a:latin typeface="Calibri"/>
+              </a:rPr>
+              <a:t>What does a Gantt chart show?</a:t>
+            </a:r>
+          </a:p>
+        </p:txBody>
+      </p:sp>
+      <p:sp>
+        <p:nvSpPr>
+          <p:cNvPr id="14" name="Oval 13"/>
+          <p:cNvSpPr/>
+          <p:nvPr/>
+        </p:nvSpPr>
+        <p:spPr>
+          <a:xfrm>
+            <a:off x="548640" y="5444337"/>
+            <a:ext cx="411480" cy="411480"/>
+          </a:xfrm>
+          <a:prstGeom prst="ellipse">
+            <a:avLst/>
+          </a:prstGeom>
+          <a:solidFill>
+            <a:srgbClr val="F2B705"/>
+          </a:solidFill>
+          <a:ln>
+            <a:noFill/>
+          </a:ln>
+          <a:effectLst/>
+        </p:spPr>
+        <p:style>
+          <a:lnRef idx="1">
+            <a:schemeClr val="accent1"/>
+          </a:lnRef>
+          <a:fillRef idx="3">
+            <a:schemeClr val="accent1"/>
+          </a:fillRef>
+          <a:effectRef idx="2">
+            <a:schemeClr val="accent1"/>
+          </a:effectRef>
+          <a:fontRef idx="minor">
+            <a:schemeClr val="lt1"/>
+          </a:fontRef>
+        </p:style>
+        <p:txBody>
+          <a:bodyPr rtlCol="0" anchor="ctr" lIns="0" rIns="0" tIns="0" bIns="0"/>
+          <a:lstStyle/>
+          <a:p>
+            <a:pPr algn="ctr"/>
+            <a:r>
+              <a:rPr sz="1400" b="1">
+                <a:solidFill>
+                  <a:srgbClr val="202122"/>
+                </a:solidFill>
+                <a:latin typeface="Calibri"/>
+              </a:rPr>
+              <a:t>5</a:t>
+            </a:r>
+          </a:p>
+        </p:txBody>
+      </p:sp>
+      <p:sp>
+        <p:nvSpPr>
+          <p:cNvPr id="15" name="TextBox 14"/>
+          <p:cNvSpPr txBox="1"/>
+          <p:nvPr/>
+        </p:nvSpPr>
+        <p:spPr>
+          <a:xfrm>
+            <a:off x="1234440" y="5426049"/>
+            <a:ext cx="10408615" cy="791870"/>
+          </a:xfrm>
+          <a:prstGeom prst="rect">
+            <a:avLst/>
+          </a:prstGeom>
+          <a:noFill/>
+        </p:spPr>
+        <p:txBody>
+          <a:bodyPr wrap="square" anchor="t" lIns="0" rIns="0" tIns="0" bIns="0"/>
+          <a:lstStyle/>
+          <a:p>
+            <a:pPr algn="l"/>
+            <a:r>
+              <a:rPr sz="2200" b="0" i="0">
+                <a:solidFill>
+                  <a:srgbClr val="202122"/>
+                </a:solidFill>
+                <a:latin typeface="Calibri"/>
+              </a:rPr>
+              <a:t>What happens if a task on the critical path is delayed?</a:t>
+            </a:r>
+          </a:p>
+        </p:txBody>
+      </p:sp>
+    </p:spTree>
+  </p:cSld>
+  <p:clrMapOvr>
+    <a:masterClrMapping/>
+  </p:clrMapOvr>
+</p:sld>
+</file>
+
+<file path=ppt/slides/slide17.xml><?xml version="1.0" encoding="utf-8"?>
+<p:sld xmlns:a="http://schemas.openxmlformats.org/drawingml/2006/main" xmlns:p="http://schemas.openxmlformats.org/presentationml/2006/main" xmlns:r="http://schemas.openxmlformats.org/officeDocument/2006/relationships">
+  <p:cSld>
+    <p:bg>
+      <p:bgPr>
+        <a:solidFill>
+          <a:srgbClr val="FFFFFF"/>
+        </a:solidFill>
+        <a:effectLst/>
+      </p:bgPr>
+    </p:bg>
+    <p:spTree>
+      <p:nvGrpSpPr>
+        <p:cNvPr id="1" name=""/>
+        <p:cNvGrpSpPr/>
+        <p:nvPr/>
+      </p:nvGrpSpPr>
+      <p:grpSpPr/>
+      <p:sp>
+        <p:nvSpPr>
+          <p:cNvPr id="2" name="TextBox 1"/>
+          <p:cNvSpPr txBox="1"/>
+          <p:nvPr/>
+        </p:nvSpPr>
+        <p:spPr>
+          <a:xfrm>
+            <a:off x="548640" y="320040"/>
+            <a:ext cx="11094415" cy="274320"/>
+          </a:xfrm>
+          <a:prstGeom prst="rect">
+            <a:avLst/>
+          </a:prstGeom>
+          <a:noFill/>
+        </p:spPr>
+        <p:txBody>
+          <a:bodyPr wrap="square" anchor="t" lIns="0" rIns="0" tIns="0" bIns="0"/>
+          <a:lstStyle/>
+          <a:p>
+            <a:pPr algn="l"/>
+            <a:r>
+              <a:rPr sz="1100" b="1" i="0">
+                <a:solidFill>
+                  <a:srgbClr val="54595D"/>
+                </a:solidFill>
+                <a:latin typeface="Calibri"/>
+              </a:rPr>
+              <a:t>CORE COMPONENT  ·  Core Paper 1</a:t>
+            </a:r>
+          </a:p>
+        </p:txBody>
+      </p:sp>
+      <p:sp>
+        <p:nvSpPr>
+          <p:cNvPr id="3" name="TextBox 2"/>
+          <p:cNvSpPr txBox="1"/>
+          <p:nvPr/>
+        </p:nvSpPr>
+        <p:spPr>
+          <a:xfrm>
+            <a:off x="548640" y="566928"/>
+            <a:ext cx="11094415" cy="822960"/>
+          </a:xfrm>
+          <a:prstGeom prst="rect">
+            <a:avLst/>
+          </a:prstGeom>
+          <a:noFill/>
+        </p:spPr>
+        <p:txBody>
+          <a:bodyPr wrap="square" anchor="ctr" lIns="0" rIns="0" tIns="0" bIns="0"/>
+          <a:lstStyle/>
+          <a:p>
+            <a:pPr algn="l"/>
+            <a:r>
+              <a:rPr sz="3200" b="1" i="0">
+                <a:solidFill>
+                  <a:srgbClr val="03306E"/>
+                </a:solidFill>
+                <a:latin typeface="Cambria"/>
+              </a:rPr>
+              <a:t>Answers</a:t>
+            </a:r>
+          </a:p>
+        </p:txBody>
+      </p:sp>
+      <p:sp>
+        <p:nvSpPr>
+          <p:cNvPr id="4" name="TextBox 3"/>
+          <p:cNvSpPr txBox="1"/>
+          <p:nvPr/>
+        </p:nvSpPr>
+        <p:spPr>
+          <a:xfrm>
+            <a:off x="548640" y="6446520"/>
+            <a:ext cx="8229600" cy="274320"/>
+          </a:xfrm>
+          <a:prstGeom prst="rect">
+            <a:avLst/>
+          </a:prstGeom>
+          <a:noFill/>
+        </p:spPr>
+        <p:txBody>
+          <a:bodyPr wrap="square" anchor="t" lIns="0" rIns="0" tIns="0" bIns="0"/>
+          <a:lstStyle/>
+          <a:p>
+            <a:pPr algn="l"/>
+            <a:r>
+              <a:rPr sz="1000" b="0" i="0">
+                <a:solidFill>
+                  <a:srgbClr val="54595D"/>
+                </a:solidFill>
+                <a:latin typeface="Calibri"/>
+              </a:rPr>
+              <a:t>Digital Support and Security T Level  ·  Project Management and Risk Assessment</a:t>
+            </a:r>
+          </a:p>
+        </p:txBody>
+      </p:sp>
+      <p:sp>
+        <p:nvSpPr>
+          <p:cNvPr id="5" name="TextBox 4"/>
+          <p:cNvSpPr txBox="1"/>
+          <p:nvPr/>
+        </p:nvSpPr>
+        <p:spPr>
+          <a:xfrm>
+            <a:off x="10728655" y="6446520"/>
+            <a:ext cx="914400" cy="274320"/>
+          </a:xfrm>
+          <a:prstGeom prst="rect">
+            <a:avLst/>
+          </a:prstGeom>
+          <a:noFill/>
+        </p:spPr>
+        <p:txBody>
+          <a:bodyPr wrap="square" anchor="t" lIns="0" rIns="0" tIns="0" bIns="0"/>
+          <a:lstStyle/>
+          <a:p>
+            <a:pPr algn="r"/>
+            <a:r>
+              <a:rPr sz="1000" b="0" i="0">
+                <a:solidFill>
+                  <a:srgbClr val="54595D"/>
+                </a:solidFill>
+                <a:latin typeface="Calibri"/>
+              </a:rPr>
+              <a:t>17</a:t>
+            </a:r>
+          </a:p>
+        </p:txBody>
+      </p:sp>
+      <p:sp>
+        <p:nvSpPr>
+          <p:cNvPr id="6" name="Oval 5"/>
+          <p:cNvSpPr/>
+          <p:nvPr/>
+        </p:nvSpPr>
+        <p:spPr>
+          <a:xfrm>
+            <a:off x="548640" y="1618488"/>
+            <a:ext cx="411480" cy="411480"/>
+          </a:xfrm>
+          <a:prstGeom prst="ellipse">
+            <a:avLst/>
+          </a:prstGeom>
+          <a:solidFill>
+            <a:srgbClr val="F2B705"/>
+          </a:solidFill>
+          <a:ln>
+            <a:noFill/>
+          </a:ln>
+          <a:effectLst/>
+        </p:spPr>
+        <p:style>
+          <a:lnRef idx="1">
+            <a:schemeClr val="accent1"/>
+          </a:lnRef>
+          <a:fillRef idx="3">
+            <a:schemeClr val="accent1"/>
+          </a:fillRef>
+          <a:effectRef idx="2">
+            <a:schemeClr val="accent1"/>
+          </a:effectRef>
+          <a:fontRef idx="minor">
+            <a:schemeClr val="lt1"/>
+          </a:fontRef>
+        </p:style>
+        <p:txBody>
+          <a:bodyPr rtlCol="0" anchor="ctr" lIns="0" rIns="0" tIns="0" bIns="0"/>
+          <a:lstStyle/>
+          <a:p>
+            <a:pPr algn="ctr"/>
+            <a:r>
+              <a:rPr sz="1400" b="1">
+                <a:solidFill>
+                  <a:srgbClr val="202122"/>
+                </a:solidFill>
+                <a:latin typeface="Calibri"/>
+              </a:rPr>
+              <a:t>1</a:t>
+            </a:r>
+          </a:p>
+        </p:txBody>
+      </p:sp>
+      <p:sp>
+        <p:nvSpPr>
+          <p:cNvPr id="7" name="TextBox 6"/>
+          <p:cNvSpPr txBox="1"/>
+          <p:nvPr/>
+        </p:nvSpPr>
+        <p:spPr>
+          <a:xfrm>
+            <a:off x="1234440" y="1600200"/>
+            <a:ext cx="10408615" cy="791870"/>
+          </a:xfrm>
+          <a:prstGeom prst="rect">
+            <a:avLst/>
+          </a:prstGeom>
+          <a:noFill/>
+        </p:spPr>
+        <p:txBody>
+          <a:bodyPr wrap="square" anchor="t" lIns="0" rIns="0" tIns="0" bIns="0"/>
+          <a:lstStyle/>
+          <a:p>
+            <a:pPr algn="l"/>
+            <a:r>
+              <a:rPr sz="1800" b="0" i="0">
+                <a:solidFill>
+                  <a:srgbClr val="54595D"/>
+                </a:solidFill>
+                <a:latin typeface="Calibri"/>
+              </a:rPr>
+              <a:t>A risk is 'probable' and 'critical'. What is its score?</a:t>
+            </a:r>
+          </a:p>
+          <a:p>
+            <a:r>
+              <a:rPr sz="1800" b="1">
+                <a:solidFill>
+                  <a:srgbClr val="03306E"/>
+                </a:solidFill>
+                <a:latin typeface="Calibri"/>
+              </a:rPr>
+              <a:t>4 x 4 = 16.</a:t>
+            </a:r>
+          </a:p>
+        </p:txBody>
+      </p:sp>
+      <p:sp>
+        <p:nvSpPr>
+          <p:cNvPr id="8" name="Oval 7"/>
+          <p:cNvSpPr/>
+          <p:nvPr/>
+        </p:nvSpPr>
+        <p:spPr>
+          <a:xfrm>
+            <a:off x="548640" y="2574950"/>
+            <a:ext cx="411480" cy="411480"/>
+          </a:xfrm>
+          <a:prstGeom prst="ellipse">
+            <a:avLst/>
+          </a:prstGeom>
+          <a:solidFill>
+            <a:srgbClr val="F2B705"/>
+          </a:solidFill>
+          <a:ln>
+            <a:noFill/>
+          </a:ln>
+          <a:effectLst/>
+        </p:spPr>
+        <p:style>
+          <a:lnRef idx="1">
+            <a:schemeClr val="accent1"/>
+          </a:lnRef>
+          <a:fillRef idx="3">
+            <a:schemeClr val="accent1"/>
+          </a:fillRef>
+          <a:effectRef idx="2">
+            <a:schemeClr val="accent1"/>
+          </a:effectRef>
+          <a:fontRef idx="minor">
+            <a:schemeClr val="lt1"/>
+          </a:fontRef>
+        </p:style>
+        <p:txBody>
+          <a:bodyPr rtlCol="0" anchor="ctr" lIns="0" rIns="0" tIns="0" bIns="0"/>
+          <a:lstStyle/>
+          <a:p>
+            <a:pPr algn="ctr"/>
+            <a:r>
+              <a:rPr sz="1400" b="1">
+                <a:solidFill>
+                  <a:srgbClr val="202122"/>
+                </a:solidFill>
+                <a:latin typeface="Calibri"/>
+              </a:rPr>
+              <a:t>2</a:t>
+            </a:r>
+          </a:p>
+        </p:txBody>
+      </p:sp>
+      <p:sp>
+        <p:nvSpPr>
+          <p:cNvPr id="9" name="TextBox 8"/>
+          <p:cNvSpPr txBox="1"/>
+          <p:nvPr/>
+        </p:nvSpPr>
+        <p:spPr>
+          <a:xfrm>
+            <a:off x="1234440" y="2556662"/>
+            <a:ext cx="10408615" cy="791870"/>
+          </a:xfrm>
+          <a:prstGeom prst="rect">
+            <a:avLst/>
+          </a:prstGeom>
+          <a:noFill/>
+        </p:spPr>
+        <p:txBody>
+          <a:bodyPr wrap="square" anchor="t" lIns="0" rIns="0" tIns="0" bIns="0"/>
+          <a:lstStyle/>
+          <a:p>
+            <a:pPr algn="l"/>
+            <a:r>
+              <a:rPr sz="1600" b="0" i="0">
+                <a:solidFill>
+                  <a:srgbClr val="54595D"/>
+                </a:solidFill>
+                <a:latin typeface="Calibri"/>
+              </a:rPr>
+              <a:t>Name three things a risk assessment should record.</a:t>
+            </a:r>
+          </a:p>
+          <a:p>
+            <a:r>
+              <a:rPr sz="1600" b="1">
+                <a:solidFill>
+                  <a:srgbClr val="03306E"/>
+                </a:solidFill>
+                <a:latin typeface="Calibri"/>
+              </a:rPr>
+              <a:t>Any three of: description, who/what could be harmed, how, existing mitigations, further mitigation, owner, due date.</a:t>
+            </a:r>
+          </a:p>
+        </p:txBody>
+      </p:sp>
+      <p:sp>
+        <p:nvSpPr>
+          <p:cNvPr id="10" name="Oval 9"/>
+          <p:cNvSpPr/>
+          <p:nvPr/>
+        </p:nvSpPr>
+        <p:spPr>
+          <a:xfrm>
+            <a:off x="548640" y="3531412"/>
+            <a:ext cx="411480" cy="411480"/>
+          </a:xfrm>
+          <a:prstGeom prst="ellipse">
+            <a:avLst/>
+          </a:prstGeom>
+          <a:solidFill>
+            <a:srgbClr val="F2B705"/>
+          </a:solidFill>
+          <a:ln>
+            <a:noFill/>
+          </a:ln>
+          <a:effectLst/>
+        </p:spPr>
+        <p:style>
+          <a:lnRef idx="1">
+            <a:schemeClr val="accent1"/>
+          </a:lnRef>
+          <a:fillRef idx="3">
+            <a:schemeClr val="accent1"/>
+          </a:fillRef>
+          <a:effectRef idx="2">
+            <a:schemeClr val="accent1"/>
+          </a:effectRef>
+          <a:fontRef idx="minor">
+            <a:schemeClr val="lt1"/>
+          </a:fontRef>
+        </p:style>
+        <p:txBody>
+          <a:bodyPr rtlCol="0" anchor="ctr" lIns="0" rIns="0" tIns="0" bIns="0"/>
+          <a:lstStyle/>
+          <a:p>
+            <a:pPr algn="ctr"/>
+            <a:r>
+              <a:rPr sz="1400" b="1">
+                <a:solidFill>
+                  <a:srgbClr val="202122"/>
+                </a:solidFill>
+                <a:latin typeface="Calibri"/>
+              </a:rPr>
+              <a:t>3</a:t>
+            </a:r>
+          </a:p>
+        </p:txBody>
+      </p:sp>
+      <p:sp>
+        <p:nvSpPr>
+          <p:cNvPr id="11" name="TextBox 10"/>
+          <p:cNvSpPr txBox="1"/>
+          <p:nvPr/>
+        </p:nvSpPr>
+        <p:spPr>
+          <a:xfrm>
+            <a:off x="1234440" y="3513124"/>
+            <a:ext cx="10408615" cy="791870"/>
+          </a:xfrm>
+          <a:prstGeom prst="rect">
+            <a:avLst/>
+          </a:prstGeom>
+          <a:noFill/>
+        </p:spPr>
+        <p:txBody>
+          <a:bodyPr wrap="square" anchor="t" lIns="0" rIns="0" tIns="0" bIns="0"/>
+          <a:lstStyle/>
+          <a:p>
+            <a:pPr algn="l"/>
+            <a:r>
+              <a:rPr sz="1800" b="0" i="0">
+                <a:solidFill>
+                  <a:srgbClr val="54595D"/>
+                </a:solidFill>
+                <a:latin typeface="Calibri"/>
+              </a:rPr>
+              <a:t>Which methodology suits a project whose requirements will change?</a:t>
+            </a:r>
+          </a:p>
+          <a:p>
+            <a:r>
+              <a:rPr sz="1800" b="1">
+                <a:solidFill>
+                  <a:srgbClr val="03306E"/>
+                </a:solidFill>
+                <a:latin typeface="Calibri"/>
+              </a:rPr>
+              <a:t>Agile.</a:t>
+            </a:r>
+          </a:p>
+        </p:txBody>
+      </p:sp>
+      <p:sp>
+        <p:nvSpPr>
+          <p:cNvPr id="12" name="Oval 11"/>
+          <p:cNvSpPr/>
+          <p:nvPr/>
+        </p:nvSpPr>
+        <p:spPr>
+          <a:xfrm>
+            <a:off x="548640" y="4487875"/>
+            <a:ext cx="411480" cy="411480"/>
+          </a:xfrm>
+          <a:prstGeom prst="ellipse">
+            <a:avLst/>
+          </a:prstGeom>
+          <a:solidFill>
+            <a:srgbClr val="F2B705"/>
+          </a:solidFill>
+          <a:ln>
+            <a:noFill/>
+          </a:ln>
+          <a:effectLst/>
+        </p:spPr>
+        <p:style>
+          <a:lnRef idx="1">
+            <a:schemeClr val="accent1"/>
+          </a:lnRef>
+          <a:fillRef idx="3">
+            <a:schemeClr val="accent1"/>
+          </a:fillRef>
+          <a:effectRef idx="2">
+            <a:schemeClr val="accent1"/>
+          </a:effectRef>
+          <a:fontRef idx="minor">
+            <a:schemeClr val="lt1"/>
+          </a:fontRef>
+        </p:style>
+        <p:txBody>
+          <a:bodyPr rtlCol="0" anchor="ctr" lIns="0" rIns="0" tIns="0" bIns="0"/>
+          <a:lstStyle/>
+          <a:p>
+            <a:pPr algn="ctr"/>
+            <a:r>
+              <a:rPr sz="1400" b="1">
+                <a:solidFill>
+                  <a:srgbClr val="202122"/>
+                </a:solidFill>
+                <a:latin typeface="Calibri"/>
+              </a:rPr>
+              <a:t>4</a:t>
+            </a:r>
+          </a:p>
+        </p:txBody>
+      </p:sp>
+      <p:sp>
+        <p:nvSpPr>
+          <p:cNvPr id="13" name="TextBox 12"/>
+          <p:cNvSpPr txBox="1"/>
+          <p:nvPr/>
+        </p:nvSpPr>
+        <p:spPr>
+          <a:xfrm>
+            <a:off x="1234440" y="4469587"/>
+            <a:ext cx="10408615" cy="791870"/>
+          </a:xfrm>
+          <a:prstGeom prst="rect">
+            <a:avLst/>
+          </a:prstGeom>
+          <a:noFill/>
+        </p:spPr>
+        <p:txBody>
+          <a:bodyPr wrap="square" anchor="t" lIns="0" rIns="0" tIns="0" bIns="0"/>
+          <a:lstStyle/>
+          <a:p>
+            <a:pPr algn="l"/>
+            <a:r>
+              <a:rPr sz="1800" b="0" i="0">
+                <a:solidFill>
+                  <a:srgbClr val="54595D"/>
+                </a:solidFill>
+                <a:latin typeface="Calibri"/>
+              </a:rPr>
+              <a:t>What does a Gantt chart show?</a:t>
+            </a:r>
+          </a:p>
+          <a:p>
+            <a:r>
+              <a:rPr sz="1800" b="1">
+                <a:solidFill>
+                  <a:srgbClr val="03306E"/>
+                </a:solidFill>
+                <a:latin typeface="Calibri"/>
+              </a:rPr>
+              <a:t>When each task starts and finishes on a timeline.</a:t>
+            </a:r>
+          </a:p>
+        </p:txBody>
+      </p:sp>
+      <p:sp>
+        <p:nvSpPr>
+          <p:cNvPr id="14" name="Oval 13"/>
+          <p:cNvSpPr/>
+          <p:nvPr/>
+        </p:nvSpPr>
+        <p:spPr>
+          <a:xfrm>
+            <a:off x="548640" y="5444337"/>
+            <a:ext cx="411480" cy="411480"/>
+          </a:xfrm>
+          <a:prstGeom prst="ellipse">
+            <a:avLst/>
+          </a:prstGeom>
+          <a:solidFill>
+            <a:srgbClr val="F2B705"/>
+          </a:solidFill>
+          <a:ln>
+            <a:noFill/>
+          </a:ln>
+          <a:effectLst/>
+        </p:spPr>
+        <p:style>
+          <a:lnRef idx="1">
+            <a:schemeClr val="accent1"/>
+          </a:lnRef>
+          <a:fillRef idx="3">
+            <a:schemeClr val="accent1"/>
+          </a:fillRef>
+          <a:effectRef idx="2">
+            <a:schemeClr val="accent1"/>
+          </a:effectRef>
+          <a:fontRef idx="minor">
+            <a:schemeClr val="lt1"/>
+          </a:fontRef>
+        </p:style>
+        <p:txBody>
+          <a:bodyPr rtlCol="0" anchor="ctr" lIns="0" rIns="0" tIns="0" bIns="0"/>
+          <a:lstStyle/>
+          <a:p>
+            <a:pPr algn="ctr"/>
+            <a:r>
+              <a:rPr sz="1400" b="1">
+                <a:solidFill>
+                  <a:srgbClr val="202122"/>
+                </a:solidFill>
+                <a:latin typeface="Calibri"/>
+              </a:rPr>
+              <a:t>5</a:t>
+            </a:r>
+          </a:p>
+        </p:txBody>
+      </p:sp>
+      <p:sp>
+        <p:nvSpPr>
+          <p:cNvPr id="15" name="TextBox 14"/>
+          <p:cNvSpPr txBox="1"/>
+          <p:nvPr/>
+        </p:nvSpPr>
+        <p:spPr>
+          <a:xfrm>
+            <a:off x="1234440" y="5426049"/>
+            <a:ext cx="10408615" cy="791870"/>
+          </a:xfrm>
+          <a:prstGeom prst="rect">
+            <a:avLst/>
+          </a:prstGeom>
+          <a:noFill/>
+        </p:spPr>
+        <p:txBody>
+          <a:bodyPr wrap="square" anchor="t" lIns="0" rIns="0" tIns="0" bIns="0"/>
+          <a:lstStyle/>
+          <a:p>
+            <a:pPr algn="l"/>
+            <a:r>
+              <a:rPr sz="1800" b="0" i="0">
+                <a:solidFill>
+                  <a:srgbClr val="54595D"/>
+                </a:solidFill>
+                <a:latin typeface="Calibri"/>
+              </a:rPr>
+              <a:t>What happens if a task on the critical path is delayed?</a:t>
+            </a:r>
+          </a:p>
+          <a:p>
+            <a:r>
+              <a:rPr sz="1800" b="1">
+                <a:solidFill>
+                  <a:srgbClr val="03306E"/>
+                </a:solidFill>
+                <a:latin typeface="Calibri"/>
+              </a:rPr>
+              <a:t>The whole project is delayed.</a:t>
+            </a:r>
+          </a:p>
+        </p:txBody>
+      </p:sp>
+    </p:spTree>
+  </p:cSld>
+  <p:clrMapOvr>
+    <a:masterClrMapping/>
+  </p:clrMapOvr>
+</p:sld>
+</file>
+
+<file path=ppt/slides/slide18.xml><?xml version="1.0" encoding="utf-8"?>
+<p:sld xmlns:a="http://schemas.openxmlformats.org/drawingml/2006/main" xmlns:p="http://schemas.openxmlformats.org/presentationml/2006/main" xmlns:r="http://schemas.openxmlformats.org/officeDocument/2006/relationships">
+  <p:cSld>
+    <p:bg>
+      <p:bgPr>
+        <a:solidFill>
+          <a:srgbClr val="FFFFFF"/>
+        </a:solidFill>
+        <a:effectLst/>
+      </p:bgPr>
+    </p:bg>
+    <p:spTree>
+      <p:nvGrpSpPr>
+        <p:cNvPr id="1" name=""/>
+        <p:cNvGrpSpPr/>
+        <p:nvPr/>
+      </p:nvGrpSpPr>
+      <p:grpSpPr/>
+      <p:sp>
+        <p:nvSpPr>
+          <p:cNvPr id="2" name="TextBox 1"/>
+          <p:cNvSpPr txBox="1"/>
+          <p:nvPr/>
+        </p:nvSpPr>
+        <p:spPr>
+          <a:xfrm>
+            <a:off x="548640" y="320040"/>
+            <a:ext cx="11094415" cy="274320"/>
+          </a:xfrm>
+          <a:prstGeom prst="rect">
+            <a:avLst/>
+          </a:prstGeom>
+          <a:noFill/>
+        </p:spPr>
+        <p:txBody>
+          <a:bodyPr wrap="square" anchor="t" lIns="0" rIns="0" tIns="0" bIns="0"/>
+          <a:lstStyle/>
+          <a:p>
+            <a:pPr algn="l"/>
+            <a:r>
+              <a:rPr sz="1100" b="1" i="0">
+                <a:solidFill>
+                  <a:srgbClr val="54595D"/>
+                </a:solidFill>
+                <a:latin typeface="Calibri"/>
+              </a:rPr>
+              <a:t>CORE COMPONENT  ·  Core Paper 1</a:t>
+            </a:r>
+          </a:p>
+        </p:txBody>
+      </p:sp>
+      <p:sp>
+        <p:nvSpPr>
+          <p:cNvPr id="3" name="TextBox 2"/>
+          <p:cNvSpPr txBox="1"/>
+          <p:nvPr/>
+        </p:nvSpPr>
+        <p:spPr>
+          <a:xfrm>
+            <a:off x="548640" y="566928"/>
+            <a:ext cx="11094415" cy="822960"/>
+          </a:xfrm>
+          <a:prstGeom prst="rect">
+            <a:avLst/>
+          </a:prstGeom>
+          <a:noFill/>
+        </p:spPr>
+        <p:txBody>
+          <a:bodyPr wrap="square" anchor="ctr" lIns="0" rIns="0" tIns="0" bIns="0"/>
+          <a:lstStyle/>
+          <a:p>
+            <a:pPr algn="l"/>
+            <a:r>
+              <a:rPr sz="3200" b="1" i="0">
+                <a:solidFill>
+                  <a:srgbClr val="03306E"/>
+                </a:solidFill>
+                <a:latin typeface="Cambria"/>
+              </a:rPr>
+              <a:t>Activity: Plan the PC rollout</a:t>
+            </a:r>
+          </a:p>
+        </p:txBody>
+      </p:sp>
+      <p:sp>
+        <p:nvSpPr>
+          <p:cNvPr id="4" name="TextBox 3"/>
+          <p:cNvSpPr txBox="1"/>
+          <p:nvPr/>
+        </p:nvSpPr>
+        <p:spPr>
+          <a:xfrm>
+            <a:off x="548640" y="6446520"/>
+            <a:ext cx="8229600" cy="274320"/>
+          </a:xfrm>
+          <a:prstGeom prst="rect">
+            <a:avLst/>
+          </a:prstGeom>
+          <a:noFill/>
+        </p:spPr>
+        <p:txBody>
+          <a:bodyPr wrap="square" anchor="t" lIns="0" rIns="0" tIns="0" bIns="0"/>
+          <a:lstStyle/>
+          <a:p>
+            <a:pPr algn="l"/>
+            <a:r>
+              <a:rPr sz="1000" b="0" i="0">
+                <a:solidFill>
+                  <a:srgbClr val="54595D"/>
+                </a:solidFill>
+                <a:latin typeface="Calibri"/>
+              </a:rPr>
+              <a:t>Digital Support and Security T Level  ·  Project Management and Risk Assessment</a:t>
+            </a:r>
+          </a:p>
+        </p:txBody>
+      </p:sp>
+      <p:sp>
+        <p:nvSpPr>
+          <p:cNvPr id="5" name="TextBox 4"/>
+          <p:cNvSpPr txBox="1"/>
+          <p:nvPr/>
+        </p:nvSpPr>
+        <p:spPr>
+          <a:xfrm>
+            <a:off x="10728655" y="6446520"/>
+            <a:ext cx="914400" cy="274320"/>
+          </a:xfrm>
+          <a:prstGeom prst="rect">
+            <a:avLst/>
+          </a:prstGeom>
+          <a:noFill/>
+        </p:spPr>
+        <p:txBody>
+          <a:bodyPr wrap="square" anchor="t" lIns="0" rIns="0" tIns="0" bIns="0"/>
+          <a:lstStyle/>
+          <a:p>
+            <a:pPr algn="r"/>
+            <a:r>
+              <a:rPr sz="1000" b="0" i="0">
+                <a:solidFill>
+                  <a:srgbClr val="54595D"/>
+                </a:solidFill>
+                <a:latin typeface="Calibri"/>
+              </a:rPr>
+              <a:t>18</a:t>
             </a:r>
           </a:p>
         </p:txBody>
@@ -4913,7 +9644,7 @@
 </p:sld>
 </file>
 
-<file path=ppt/slides/slide11.xml><?xml version="1.0" encoding="utf-8"?>
+<file path=ppt/slides/slide19.xml><?xml version="1.0" encoding="utf-8"?>
 <p:sld xmlns:a="http://schemas.openxmlformats.org/drawingml/2006/main" xmlns:p="http://schemas.openxmlformats.org/presentationml/2006/main" xmlns:r="http://schemas.openxmlformats.org/officeDocument/2006/relationships">
   <p:cSld>
     <p:bg>
@@ -6230,6 +10961,414 @@
                 <a:latin typeface="Calibri"/>
               </a:rPr>
               <a:t>3</a:t>
+            </a:r>
+          </a:p>
+        </p:txBody>
+      </p:sp>
+      <p:sp>
+        <p:nvSpPr>
+          <p:cNvPr id="6" name="TextBox 5"/>
+          <p:cNvSpPr txBox="1"/>
+          <p:nvPr/>
+        </p:nvSpPr>
+        <p:spPr>
+          <a:xfrm>
+            <a:off x="548640" y="1554480"/>
+            <a:ext cx="6720840" cy="4617720"/>
+          </a:xfrm>
+          <a:prstGeom prst="rect">
+            <a:avLst/>
+          </a:prstGeom>
+          <a:noFill/>
+        </p:spPr>
+        <p:txBody>
+          <a:bodyPr wrap="square" lIns="0" rIns="0" tIns="0" bIns="0">
+            <a:spAutoFit/>
+          </a:bodyPr>
+          <a:lstStyle/>
+          <a:p>
+            <a:pPr>
+              <a:spcAft>
+                <a:spcPts val="1260"/>
+              </a:spcAft>
+            </a:pPr>
+            <a:r>
+              <a:rPr sz="2100" b="0">
+                <a:solidFill>
+                  <a:srgbClr val="202122"/>
+                </a:solidFill>
+                <a:latin typeface="Calibri"/>
+              </a:rPr>
+              <a:t>A risk matrix puts a number on how serious a risk is, so you can decide what to deal with first.</a:t>
+            </a:r>
+          </a:p>
+          <a:p>
+            <a:pPr>
+              <a:spcAft>
+                <a:spcPts val="1260"/>
+              </a:spcAft>
+            </a:pPr>
+            <a:r>
+              <a:rPr sz="2100" b="0">
+                <a:solidFill>
+                  <a:srgbClr val="202122"/>
+                </a:solidFill>
+                <a:latin typeface="Calibri"/>
+              </a:rPr>
+              <a:t>Rate the likelihood from 1 (improbable) to 5 (frequent) and the severity from 1 (negligible) to 5 (catastrophic). Multiply them to get a risk score from 1 to 25.</a:t>
+            </a:r>
+          </a:p>
+          <a:p>
+            <a:pPr>
+              <a:spcAft>
+                <a:spcPts val="1260"/>
+              </a:spcAft>
+            </a:pPr>
+            <a:r>
+              <a:rPr sz="2100" b="0">
+                <a:solidFill>
+                  <a:srgbClr val="202122"/>
+                </a:solidFill>
+                <a:latin typeface="Calibri"/>
+              </a:rPr>
+              <a:t>High scores (often 15 and above) need action straight away. Medium scores need controls and monitoring. Low scores may be accepted.</a:t>
+            </a:r>
+          </a:p>
+          <a:p>
+            <a:pPr>
+              <a:spcAft>
+                <a:spcPts val="1260"/>
+              </a:spcAft>
+            </a:pPr>
+            <a:r>
+              <a:rPr sz="2100" b="0">
+                <a:solidFill>
+                  <a:srgbClr val="202122"/>
+                </a:solidFill>
+                <a:latin typeface="Calibri"/>
+              </a:rPr>
+              <a:t>A risk assessment then records the risk, who or what could be harmed and how, existing and further mitigations, who is responsible and a due date.</a:t>
+            </a:r>
+          </a:p>
+        </p:txBody>
+      </p:sp>
+      <p:sp>
+        <p:nvSpPr>
+          <p:cNvPr id="7" name="Rounded Rectangle 6"/>
+          <p:cNvSpPr/>
+          <p:nvPr/>
+        </p:nvSpPr>
+        <p:spPr>
+          <a:xfrm>
+            <a:off x="7772400" y="1554480"/>
+            <a:ext cx="3867912" cy="4526280"/>
+          </a:xfrm>
+          <a:prstGeom prst="roundRect">
+            <a:avLst>
+              <a:gd name="adj" fmla="val 8000"/>
+            </a:avLst>
+          </a:prstGeom>
+          <a:solidFill>
+            <a:srgbClr val="03306E"/>
+          </a:solidFill>
+          <a:ln>
+            <a:noFill/>
+          </a:ln>
+          <a:effectLst/>
+        </p:spPr>
+        <p:style>
+          <a:lnRef idx="1">
+            <a:schemeClr val="accent1"/>
+          </a:lnRef>
+          <a:fillRef idx="3">
+            <a:schemeClr val="accent1"/>
+          </a:fillRef>
+          <a:effectRef idx="2">
+            <a:schemeClr val="accent1"/>
+          </a:effectRef>
+          <a:fontRef idx="minor">
+            <a:schemeClr val="lt1"/>
+          </a:fontRef>
+        </p:style>
+        <p:txBody>
+          <a:bodyPr rtlCol="0" anchor="ctr"/>
+          <a:lstStyle/>
+          <a:p/>
+        </p:txBody>
+      </p:sp>
+      <p:sp>
+        <p:nvSpPr>
+          <p:cNvPr id="8" name="Oval 7"/>
+          <p:cNvSpPr/>
+          <p:nvPr/>
+        </p:nvSpPr>
+        <p:spPr>
+          <a:xfrm>
+            <a:off x="8046720" y="1828800"/>
+            <a:ext cx="548640" cy="548640"/>
+          </a:xfrm>
+          <a:prstGeom prst="ellipse">
+            <a:avLst/>
+          </a:prstGeom>
+          <a:solidFill>
+            <a:srgbClr val="F2B705"/>
+          </a:solidFill>
+          <a:ln>
+            <a:noFill/>
+          </a:ln>
+          <a:effectLst/>
+        </p:spPr>
+        <p:style>
+          <a:lnRef idx="1">
+            <a:schemeClr val="accent1"/>
+          </a:lnRef>
+          <a:fillRef idx="3">
+            <a:schemeClr val="accent1"/>
+          </a:fillRef>
+          <a:effectRef idx="2">
+            <a:schemeClr val="accent1"/>
+          </a:effectRef>
+          <a:fontRef idx="minor">
+            <a:schemeClr val="lt1"/>
+          </a:fontRef>
+        </p:style>
+        <p:txBody>
+          <a:bodyPr rtlCol="0" anchor="ctr" lIns="0" rIns="0" tIns="0" bIns="0"/>
+          <a:lstStyle/>
+          <a:p>
+            <a:pPr algn="ctr"/>
+            <a:r>
+              <a:rPr sz="1300" b="1">
+                <a:solidFill>
+                  <a:srgbClr val="202122"/>
+                </a:solidFill>
+                <a:latin typeface="Calibri"/>
+              </a:rPr>
+              <a:t>e.g.</a:t>
+            </a:r>
+          </a:p>
+        </p:txBody>
+      </p:sp>
+      <p:sp>
+        <p:nvSpPr>
+          <p:cNvPr id="9" name="TextBox 8"/>
+          <p:cNvSpPr txBox="1"/>
+          <p:nvPr/>
+        </p:nvSpPr>
+        <p:spPr>
+          <a:xfrm>
+            <a:off x="8046720" y="2560320"/>
+            <a:ext cx="3291840" cy="365760"/>
+          </a:xfrm>
+          <a:prstGeom prst="rect">
+            <a:avLst/>
+          </a:prstGeom>
+          <a:noFill/>
+        </p:spPr>
+        <p:txBody>
+          <a:bodyPr wrap="square" anchor="t" lIns="0" rIns="0" tIns="0" bIns="0"/>
+          <a:lstStyle/>
+          <a:p>
+            <a:pPr algn="l"/>
+            <a:r>
+              <a:rPr sz="1300" b="1" i="0">
+                <a:solidFill>
+                  <a:srgbClr val="A9C8F0"/>
+                </a:solidFill>
+                <a:latin typeface="Calibri"/>
+              </a:rPr>
+              <a:t>EXAMPLE</a:t>
+            </a:r>
+          </a:p>
+        </p:txBody>
+      </p:sp>
+      <p:sp>
+        <p:nvSpPr>
+          <p:cNvPr id="10" name="TextBox 9"/>
+          <p:cNvSpPr txBox="1"/>
+          <p:nvPr/>
+        </p:nvSpPr>
+        <p:spPr>
+          <a:xfrm>
+            <a:off x="8046720" y="2971800"/>
+            <a:ext cx="3291840" cy="2971800"/>
+          </a:xfrm>
+          <a:prstGeom prst="rect">
+            <a:avLst/>
+          </a:prstGeom>
+          <a:noFill/>
+        </p:spPr>
+        <p:txBody>
+          <a:bodyPr wrap="square" anchor="t" lIns="0" rIns="0" tIns="0" bIns="0"/>
+          <a:lstStyle/>
+          <a:p>
+            <a:pPr algn="l"/>
+            <a:r>
+              <a:rPr sz="1900" b="0" i="0">
+                <a:solidFill>
+                  <a:srgbClr val="FFFFFF"/>
+                </a:solidFill>
+                <a:latin typeface="Cambria"/>
+              </a:rPr>
+              <a:t>Server room overheating: likelihood 3 (occasional) x severity 4 (critical) = 12. Mitigation: add a temperature alarm and a second air-conditioning unit.</a:t>
+            </a:r>
+          </a:p>
+        </p:txBody>
+      </p:sp>
+    </p:spTree>
+  </p:cSld>
+  <p:clrMapOvr>
+    <a:masterClrMapping/>
+  </p:clrMapOvr>
+</p:sld>
+</file>
+
+<file path=ppt/slides/slide4.xml><?xml version="1.0" encoding="utf-8"?>
+<p:sld xmlns:a="http://schemas.openxmlformats.org/drawingml/2006/main" xmlns:p="http://schemas.openxmlformats.org/presentationml/2006/main" xmlns:r="http://schemas.openxmlformats.org/officeDocument/2006/relationships">
+  <p:cSld>
+    <p:bg>
+      <p:bgPr>
+        <a:solidFill>
+          <a:srgbClr val="FFFFFF"/>
+        </a:solidFill>
+        <a:effectLst/>
+      </p:bgPr>
+    </p:bg>
+    <p:spTree>
+      <p:nvGrpSpPr>
+        <p:cNvPr id="1" name=""/>
+        <p:cNvGrpSpPr/>
+        <p:nvPr/>
+      </p:nvGrpSpPr>
+      <p:grpSpPr/>
+      <p:sp>
+        <p:nvSpPr>
+          <p:cNvPr id="2" name="TextBox 1"/>
+          <p:cNvSpPr txBox="1"/>
+          <p:nvPr/>
+        </p:nvSpPr>
+        <p:spPr>
+          <a:xfrm>
+            <a:off x="548640" y="320040"/>
+            <a:ext cx="11094415" cy="274320"/>
+          </a:xfrm>
+          <a:prstGeom prst="rect">
+            <a:avLst/>
+          </a:prstGeom>
+          <a:noFill/>
+        </p:spPr>
+        <p:txBody>
+          <a:bodyPr wrap="square" anchor="t" lIns="0" rIns="0" tIns="0" bIns="0"/>
+          <a:lstStyle/>
+          <a:p>
+            <a:pPr algn="l"/>
+            <a:r>
+              <a:rPr sz="1100" b="1" i="0">
+                <a:solidFill>
+                  <a:srgbClr val="54595D"/>
+                </a:solidFill>
+                <a:latin typeface="Calibri"/>
+              </a:rPr>
+              <a:t>CORE COMPONENT  ·  Core Paper 1</a:t>
+            </a:r>
+          </a:p>
+        </p:txBody>
+      </p:sp>
+      <p:sp>
+        <p:nvSpPr>
+          <p:cNvPr id="3" name="TextBox 2"/>
+          <p:cNvSpPr txBox="1"/>
+          <p:nvPr/>
+        </p:nvSpPr>
+        <p:spPr>
+          <a:xfrm>
+            <a:off x="548640" y="566928"/>
+            <a:ext cx="11094415" cy="822960"/>
+          </a:xfrm>
+          <a:prstGeom prst="rect">
+            <a:avLst/>
+          </a:prstGeom>
+          <a:noFill/>
+        </p:spPr>
+        <p:txBody>
+          <a:bodyPr wrap="square" anchor="ctr" lIns="0" rIns="0" tIns="0" bIns="0"/>
+          <a:lstStyle/>
+          <a:p>
+            <a:pPr algn="l"/>
+            <a:r>
+              <a:rPr sz="3200" b="1" i="0">
+                <a:solidFill>
+                  <a:srgbClr val="03306E"/>
+                </a:solidFill>
+                <a:latin typeface="Cambria"/>
+              </a:rPr>
+              <a:t>The 5 by 5 risk matrix</a:t>
+            </a:r>
+          </a:p>
+        </p:txBody>
+      </p:sp>
+      <p:sp>
+        <p:nvSpPr>
+          <p:cNvPr id="4" name="TextBox 3"/>
+          <p:cNvSpPr txBox="1"/>
+          <p:nvPr/>
+        </p:nvSpPr>
+        <p:spPr>
+          <a:xfrm>
+            <a:off x="548640" y="6446520"/>
+            <a:ext cx="8229600" cy="274320"/>
+          </a:xfrm>
+          <a:prstGeom prst="rect">
+            <a:avLst/>
+          </a:prstGeom>
+          <a:noFill/>
+        </p:spPr>
+        <p:txBody>
+          <a:bodyPr wrap="square" anchor="t" lIns="0" rIns="0" tIns="0" bIns="0"/>
+          <a:lstStyle/>
+          <a:p>
+            <a:pPr algn="l"/>
+            <a:r>
+              <a:rPr sz="1000" b="0" i="0">
+                <a:solidFill>
+                  <a:srgbClr val="54595D"/>
+                </a:solidFill>
+                <a:latin typeface="Calibri"/>
+              </a:rPr>
+              <a:t>Digital Support and Security T Level  ·  Project Management and Risk Assessment</a:t>
+            </a:r>
+          </a:p>
+        </p:txBody>
+      </p:sp>
+      <p:sp>
+        <p:nvSpPr>
+          <p:cNvPr id="5" name="TextBox 4"/>
+          <p:cNvSpPr txBox="1"/>
+          <p:nvPr/>
+        </p:nvSpPr>
+        <p:spPr>
+          <a:xfrm>
+            <a:off x="10728655" y="6446520"/>
+            <a:ext cx="914400" cy="274320"/>
+          </a:xfrm>
+          <a:prstGeom prst="rect">
+            <a:avLst/>
+          </a:prstGeom>
+          <a:noFill/>
+        </p:spPr>
+        <p:txBody>
+          <a:bodyPr wrap="square" anchor="t" lIns="0" rIns="0" tIns="0" bIns="0"/>
+          <a:lstStyle/>
+          <a:p>
+            <a:pPr algn="r"/>
+            <a:r>
+              <a:rPr sz="1000" b="0" i="0">
+                <a:solidFill>
+                  <a:srgbClr val="54595D"/>
+                </a:solidFill>
+                <a:latin typeface="Calibri"/>
+              </a:rPr>
+              <a:t>4</a:t>
             </a:r>
           </a:p>
         </p:txBody>
@@ -7109,455 +12248,6 @@
 </p:sld>
 </file>
 
-<file path=ppt/slides/slide4.xml><?xml version="1.0" encoding="utf-8"?>
-<p:sld xmlns:a="http://schemas.openxmlformats.org/drawingml/2006/main" xmlns:p="http://schemas.openxmlformats.org/presentationml/2006/main" xmlns:r="http://schemas.openxmlformats.org/officeDocument/2006/relationships">
-  <p:cSld>
-    <p:bg>
-      <p:bgPr>
-        <a:solidFill>
-          <a:srgbClr val="FFFFFF"/>
-        </a:solidFill>
-        <a:effectLst/>
-      </p:bgPr>
-    </p:bg>
-    <p:spTree>
-      <p:nvGrpSpPr>
-        <p:cNvPr id="1" name=""/>
-        <p:cNvGrpSpPr/>
-        <p:nvPr/>
-      </p:nvGrpSpPr>
-      <p:grpSpPr/>
-      <p:sp>
-        <p:nvSpPr>
-          <p:cNvPr id="2" name="TextBox 1"/>
-          <p:cNvSpPr txBox="1"/>
-          <p:nvPr/>
-        </p:nvSpPr>
-        <p:spPr>
-          <a:xfrm>
-            <a:off x="548640" y="320040"/>
-            <a:ext cx="11094415" cy="274320"/>
-          </a:xfrm>
-          <a:prstGeom prst="rect">
-            <a:avLst/>
-          </a:prstGeom>
-          <a:noFill/>
-        </p:spPr>
-        <p:txBody>
-          <a:bodyPr wrap="square" anchor="t" lIns="0" rIns="0" tIns="0" bIns="0"/>
-          <a:lstStyle/>
-          <a:p>
-            <a:pPr algn="l"/>
-            <a:r>
-              <a:rPr sz="1100" b="1" i="0">
-                <a:solidFill>
-                  <a:srgbClr val="54595D"/>
-                </a:solidFill>
-                <a:latin typeface="Calibri"/>
-              </a:rPr>
-              <a:t>CORE COMPONENT  ·  Core Paper 1</a:t>
-            </a:r>
-          </a:p>
-        </p:txBody>
-      </p:sp>
-      <p:sp>
-        <p:nvSpPr>
-          <p:cNvPr id="3" name="TextBox 2"/>
-          <p:cNvSpPr txBox="1"/>
-          <p:nvPr/>
-        </p:nvSpPr>
-        <p:spPr>
-          <a:xfrm>
-            <a:off x="548640" y="566928"/>
-            <a:ext cx="11094415" cy="822960"/>
-          </a:xfrm>
-          <a:prstGeom prst="rect">
-            <a:avLst/>
-          </a:prstGeom>
-          <a:noFill/>
-        </p:spPr>
-        <p:txBody>
-          <a:bodyPr wrap="square" anchor="ctr" lIns="0" rIns="0" tIns="0" bIns="0"/>
-          <a:lstStyle/>
-          <a:p>
-            <a:pPr algn="l"/>
-            <a:r>
-              <a:rPr sz="3200" b="1" i="0">
-                <a:solidFill>
-                  <a:srgbClr val="03306E"/>
-                </a:solidFill>
-                <a:latin typeface="Cambria"/>
-              </a:rPr>
-              <a:t>Risk assessment documentation</a:t>
-            </a:r>
-          </a:p>
-        </p:txBody>
-      </p:sp>
-      <p:sp>
-        <p:nvSpPr>
-          <p:cNvPr id="4" name="TextBox 3"/>
-          <p:cNvSpPr txBox="1"/>
-          <p:nvPr/>
-        </p:nvSpPr>
-        <p:spPr>
-          <a:xfrm>
-            <a:off x="548640" y="6446520"/>
-            <a:ext cx="8229600" cy="274320"/>
-          </a:xfrm>
-          <a:prstGeom prst="rect">
-            <a:avLst/>
-          </a:prstGeom>
-          <a:noFill/>
-        </p:spPr>
-        <p:txBody>
-          <a:bodyPr wrap="square" anchor="t" lIns="0" rIns="0" tIns="0" bIns="0"/>
-          <a:lstStyle/>
-          <a:p>
-            <a:pPr algn="l"/>
-            <a:r>
-              <a:rPr sz="1000" b="0" i="0">
-                <a:solidFill>
-                  <a:srgbClr val="54595D"/>
-                </a:solidFill>
-                <a:latin typeface="Calibri"/>
-              </a:rPr>
-              <a:t>Digital Support and Security T Level  ·  Project Management and Risk Assessment</a:t>
-            </a:r>
-          </a:p>
-        </p:txBody>
-      </p:sp>
-      <p:sp>
-        <p:nvSpPr>
-          <p:cNvPr id="5" name="TextBox 4"/>
-          <p:cNvSpPr txBox="1"/>
-          <p:nvPr/>
-        </p:nvSpPr>
-        <p:spPr>
-          <a:xfrm>
-            <a:off x="10728655" y="6446520"/>
-            <a:ext cx="914400" cy="274320"/>
-          </a:xfrm>
-          <a:prstGeom prst="rect">
-            <a:avLst/>
-          </a:prstGeom>
-          <a:noFill/>
-        </p:spPr>
-        <p:txBody>
-          <a:bodyPr wrap="square" anchor="t" lIns="0" rIns="0" tIns="0" bIns="0"/>
-          <a:lstStyle/>
-          <a:p>
-            <a:pPr algn="r"/>
-            <a:r>
-              <a:rPr sz="1000" b="0" i="0">
-                <a:solidFill>
-                  <a:srgbClr val="54595D"/>
-                </a:solidFill>
-                <a:latin typeface="Calibri"/>
-              </a:rPr>
-              <a:t>4</a:t>
-            </a:r>
-          </a:p>
-        </p:txBody>
-      </p:sp>
-      <p:sp>
-        <p:nvSpPr>
-          <p:cNvPr id="6" name="TextBox 5"/>
-          <p:cNvSpPr txBox="1"/>
-          <p:nvPr/>
-        </p:nvSpPr>
-        <p:spPr>
-          <a:xfrm>
-            <a:off x="548640" y="1600200"/>
-            <a:ext cx="6675120" cy="4572000"/>
-          </a:xfrm>
-          <a:prstGeom prst="rect">
-            <a:avLst/>
-          </a:prstGeom>
-          <a:noFill/>
-        </p:spPr>
-        <p:txBody>
-          <a:bodyPr wrap="square" lIns="0" rIns="0" tIns="0" bIns="0">
-            <a:spAutoFit/>
-          </a:bodyPr>
-          <a:lstStyle/>
-          <a:p>
-            <a:pPr marL="274320" indent="-274320">
-              <a:spcAft>
-                <a:spcPts val="1080"/>
-              </a:spcAft>
-              <a:buClr>
-                <a:srgbClr val="0645AD"/>
-              </a:buClr>
-              <a:buFont typeface="Arial"/>
-              <a:buChar char="•"/>
-            </a:pPr>
-            <a:r>
-              <a:rPr sz="2400" b="0">
-                <a:solidFill>
-                  <a:srgbClr val="202122"/>
-                </a:solidFill>
-                <a:latin typeface="Calibri"/>
-              </a:rPr>
-              <a:t>A description of the risk</a:t>
-            </a:r>
-          </a:p>
-          <a:p>
-            <a:pPr marL="274320" indent="-274320">
-              <a:spcAft>
-                <a:spcPts val="1080"/>
-              </a:spcAft>
-              <a:buClr>
-                <a:srgbClr val="0645AD"/>
-              </a:buClr>
-              <a:buFont typeface="Arial"/>
-              <a:buChar char="•"/>
-            </a:pPr>
-            <a:r>
-              <a:rPr sz="2400" b="0">
-                <a:solidFill>
-                  <a:srgbClr val="202122"/>
-                </a:solidFill>
-                <a:latin typeface="Calibri"/>
-              </a:rPr>
-              <a:t>Who or what could be harmed, and how</a:t>
-            </a:r>
-          </a:p>
-          <a:p>
-            <a:pPr marL="274320" indent="-274320">
-              <a:spcAft>
-                <a:spcPts val="1080"/>
-              </a:spcAft>
-              <a:buClr>
-                <a:srgbClr val="0645AD"/>
-              </a:buClr>
-              <a:buFont typeface="Arial"/>
-              <a:buChar char="•"/>
-            </a:pPr>
-            <a:r>
-              <a:rPr sz="2400" b="0">
-                <a:solidFill>
-                  <a:srgbClr val="202122"/>
-                </a:solidFill>
-                <a:latin typeface="Calibri"/>
-              </a:rPr>
-              <a:t>Mitigations already in place</a:t>
-            </a:r>
-          </a:p>
-          <a:p>
-            <a:pPr marL="274320" indent="-274320">
-              <a:spcAft>
-                <a:spcPts val="1080"/>
-              </a:spcAft>
-              <a:buClr>
-                <a:srgbClr val="0645AD"/>
-              </a:buClr>
-              <a:buFont typeface="Arial"/>
-              <a:buChar char="•"/>
-            </a:pPr>
-            <a:r>
-              <a:rPr sz="2400" b="0">
-                <a:solidFill>
-                  <a:srgbClr val="202122"/>
-                </a:solidFill>
-                <a:latin typeface="Calibri"/>
-              </a:rPr>
-              <a:t>Further mitigation needed</a:t>
-            </a:r>
-          </a:p>
-          <a:p>
-            <a:pPr marL="274320" indent="-274320">
-              <a:spcAft>
-                <a:spcPts val="1080"/>
-              </a:spcAft>
-              <a:buClr>
-                <a:srgbClr val="0645AD"/>
-              </a:buClr>
-              <a:buFont typeface="Arial"/>
-              <a:buChar char="•"/>
-            </a:pPr>
-            <a:r>
-              <a:rPr sz="2400" b="0">
-                <a:solidFill>
-                  <a:srgbClr val="202122"/>
-                </a:solidFill>
-                <a:latin typeface="Calibri"/>
-              </a:rPr>
-              <a:t>Who is responsible, and the due date</a:t>
-            </a:r>
-          </a:p>
-        </p:txBody>
-      </p:sp>
-      <p:sp>
-        <p:nvSpPr>
-          <p:cNvPr id="7" name="Rounded Rectangle 6"/>
-          <p:cNvSpPr/>
-          <p:nvPr/>
-        </p:nvSpPr>
-        <p:spPr>
-          <a:xfrm>
-            <a:off x="7772400" y="1600200"/>
-            <a:ext cx="3867912" cy="4434840"/>
-          </a:xfrm>
-          <a:prstGeom prst="roundRect">
-            <a:avLst>
-              <a:gd name="adj" fmla="val 8000"/>
-            </a:avLst>
-          </a:prstGeom>
-          <a:solidFill>
-            <a:srgbClr val="03306E"/>
-          </a:solidFill>
-          <a:ln>
-            <a:noFill/>
-          </a:ln>
-          <a:effectLst/>
-        </p:spPr>
-        <p:style>
-          <a:lnRef idx="1">
-            <a:schemeClr val="accent1"/>
-          </a:lnRef>
-          <a:fillRef idx="3">
-            <a:schemeClr val="accent1"/>
-          </a:fillRef>
-          <a:effectRef idx="2">
-            <a:schemeClr val="accent1"/>
-          </a:effectRef>
-          <a:fontRef idx="minor">
-            <a:schemeClr val="lt1"/>
-          </a:fontRef>
-        </p:style>
-        <p:txBody>
-          <a:bodyPr rtlCol="0" anchor="ctr"/>
-          <a:lstStyle/>
-          <a:p/>
-        </p:txBody>
-      </p:sp>
-      <p:sp>
-        <p:nvSpPr>
-          <p:cNvPr id="8" name="Oval 7"/>
-          <p:cNvSpPr/>
-          <p:nvPr/>
-        </p:nvSpPr>
-        <p:spPr>
-          <a:xfrm>
-            <a:off x="8046720" y="1874519"/>
-            <a:ext cx="548640" cy="548640"/>
-          </a:xfrm>
-          <a:prstGeom prst="ellipse">
-            <a:avLst/>
-          </a:prstGeom>
-          <a:solidFill>
-            <a:srgbClr val="F2B705"/>
-          </a:solidFill>
-          <a:ln>
-            <a:noFill/>
-          </a:ln>
-          <a:effectLst/>
-        </p:spPr>
-        <p:style>
-          <a:lnRef idx="1">
-            <a:schemeClr val="accent1"/>
-          </a:lnRef>
-          <a:fillRef idx="3">
-            <a:schemeClr val="accent1"/>
-          </a:fillRef>
-          <a:effectRef idx="2">
-            <a:schemeClr val="accent1"/>
-          </a:effectRef>
-          <a:fontRef idx="minor">
-            <a:schemeClr val="lt1"/>
-          </a:fontRef>
-        </p:style>
-        <p:txBody>
-          <a:bodyPr rtlCol="0" anchor="ctr" lIns="0" rIns="0" tIns="0" bIns="0"/>
-          <a:lstStyle/>
-          <a:p>
-            <a:pPr algn="ctr"/>
-            <a:r>
-              <a:rPr sz="2000" b="1">
-                <a:solidFill>
-                  <a:srgbClr val="202122"/>
-                </a:solidFill>
-                <a:latin typeface="Calibri"/>
-              </a:rPr>
-              <a:t>!</a:t>
-            </a:r>
-          </a:p>
-        </p:txBody>
-      </p:sp>
-      <p:sp>
-        <p:nvSpPr>
-          <p:cNvPr id="9" name="TextBox 8"/>
-          <p:cNvSpPr txBox="1"/>
-          <p:nvPr/>
-        </p:nvSpPr>
-        <p:spPr>
-          <a:xfrm>
-            <a:off x="8046720" y="2606040"/>
-            <a:ext cx="3291840" cy="365760"/>
-          </a:xfrm>
-          <a:prstGeom prst="rect">
-            <a:avLst/>
-          </a:prstGeom>
-          <a:noFill/>
-        </p:spPr>
-        <p:txBody>
-          <a:bodyPr wrap="square" anchor="t" lIns="0" rIns="0" tIns="0" bIns="0"/>
-          <a:lstStyle/>
-          <a:p>
-            <a:pPr algn="l"/>
-            <a:r>
-              <a:rPr sz="1300" b="1" i="0">
-                <a:solidFill>
-                  <a:srgbClr val="A9C8F0"/>
-                </a:solidFill>
-                <a:latin typeface="Calibri"/>
-              </a:rPr>
-              <a:t>KEY IDEA</a:t>
-            </a:r>
-          </a:p>
-        </p:txBody>
-      </p:sp>
-      <p:sp>
-        <p:nvSpPr>
-          <p:cNvPr id="10" name="TextBox 9"/>
-          <p:cNvSpPr txBox="1"/>
-          <p:nvPr/>
-        </p:nvSpPr>
-        <p:spPr>
-          <a:xfrm>
-            <a:off x="8046720" y="3017520"/>
-            <a:ext cx="3291840" cy="2926080"/>
-          </a:xfrm>
-          <a:prstGeom prst="rect">
-            <a:avLst/>
-          </a:prstGeom>
-          <a:noFill/>
-        </p:spPr>
-        <p:txBody>
-          <a:bodyPr wrap="square" anchor="t" lIns="0" rIns="0" tIns="0" bIns="0"/>
-          <a:lstStyle/>
-          <a:p>
-            <a:pPr algn="l"/>
-            <a:r>
-              <a:rPr sz="2200" b="0" i="0">
-                <a:solidFill>
-                  <a:srgbClr val="FFFFFF"/>
-                </a:solidFill>
-                <a:latin typeface="Cambria"/>
-              </a:rPr>
-              <a:t>Risk assessments exist to ensure continuity of service, health and safety, and regulatory compliance.</a:t>
-            </a:r>
-          </a:p>
-        </p:txBody>
-      </p:sp>
-    </p:spTree>
-  </p:cSld>
-  <p:clrMapOvr>
-    <a:masterClrMapping/>
-  </p:clrMapOvr>
-</p:sld>
-</file>
-
 <file path=ppt/slides/slide5.xml><?xml version="1.0" encoding="utf-8"?>
 <p:sld xmlns:a="http://schemas.openxmlformats.org/drawingml/2006/main" xmlns:p="http://schemas.openxmlformats.org/presentationml/2006/main" xmlns:r="http://schemas.openxmlformats.org/officeDocument/2006/relationships">
   <p:cSld>
@@ -7637,7 +12327,7 @@
                 </a:solidFill>
                 <a:latin typeface="Cambria"/>
               </a:rPr>
-              <a:t>Waterfall and Agile</a:t>
+              <a:t>Quick check: The 5 by 5 risk matrix</a:t>
             </a:r>
           </a:p>
         </p:txBody>
@@ -7710,22 +12400,20 @@
       </p:sp>
       <p:sp>
         <p:nvSpPr>
-          <p:cNvPr id="6" name="Rounded Rectangle 5"/>
+          <p:cNvPr id="6" name="Oval 5"/>
           <p:cNvSpPr/>
           <p:nvPr/>
         </p:nvSpPr>
         <p:spPr>
           <a:xfrm>
-            <a:off x="548640" y="1600200"/>
-            <a:ext cx="5364327" cy="640080"/>
-          </a:xfrm>
-          <a:prstGeom prst="roundRect">
-            <a:avLst>
-              <a:gd name="adj" fmla="val 15000"/>
-            </a:avLst>
+            <a:off x="548640" y="1691640"/>
+            <a:ext cx="502920" cy="502920"/>
+          </a:xfrm>
+          <a:prstGeom prst="ellipse">
+            <a:avLst/>
           </a:prstGeom>
           <a:solidFill>
-            <a:srgbClr val="03306E"/>
+            <a:srgbClr val="F2B705"/>
           </a:solidFill>
           <a:ln>
             <a:noFill/>
@@ -7747,9 +12435,20 @@
           </a:fontRef>
         </p:style>
         <p:txBody>
-          <a:bodyPr rtlCol="0" anchor="ctr"/>
-          <a:lstStyle/>
-          <a:p/>
+          <a:bodyPr rtlCol="0" anchor="ctr" lIns="0" rIns="0" tIns="0" bIns="0"/>
+          <a:lstStyle/>
+          <a:p>
+            <a:pPr algn="ctr"/>
+            <a:r>
+              <a:rPr sz="1600" b="1">
+                <a:solidFill>
+                  <a:srgbClr val="202122"/>
+                </a:solidFill>
+                <a:latin typeface="Calibri"/>
+              </a:rPr>
+              <a:t>1</a:t>
+            </a:r>
+          </a:p>
         </p:txBody>
       </p:sp>
       <p:sp>
@@ -7760,49 +12459,47 @@
         </p:nvSpPr>
         <p:spPr>
           <a:xfrm>
-            <a:off x="777240" y="1600200"/>
-            <a:ext cx="4907127" cy="640080"/>
-          </a:xfrm>
-          <a:prstGeom prst="rect">
-            <a:avLst/>
-          </a:prstGeom>
-          <a:noFill/>
-        </p:spPr>
-        <p:txBody>
-          <a:bodyPr wrap="square" anchor="ctr" lIns="0" rIns="0" tIns="0" bIns="0"/>
+            <a:off x="1371600" y="1645920"/>
+            <a:ext cx="10271455" cy="1188720"/>
+          </a:xfrm>
+          <a:prstGeom prst="rect">
+            <a:avLst/>
+          </a:prstGeom>
+          <a:noFill/>
+        </p:spPr>
+        <p:txBody>
+          <a:bodyPr wrap="square" anchor="t" lIns="0" rIns="0" tIns="0" bIns="0"/>
           <a:lstStyle/>
           <a:p>
             <a:pPr algn="l"/>
             <a:r>
-              <a:rPr sz="2000" b="1" i="0">
-                <a:solidFill>
-                  <a:srgbClr val="FFFFFF"/>
-                </a:solidFill>
-                <a:latin typeface="Calibri"/>
-              </a:rPr>
-              <a:t>Waterfall</a:t>
-            </a:r>
-          </a:p>
-        </p:txBody>
-      </p:sp>
-      <p:sp>
-        <p:nvSpPr>
-          <p:cNvPr id="8" name="Rounded Rectangle 7"/>
+              <a:rPr sz="2400" b="0" i="0">
+                <a:solidFill>
+                  <a:srgbClr val="202122"/>
+                </a:solidFill>
+                <a:latin typeface="Calibri"/>
+              </a:rPr>
+              <a:t>How is a risk score calculated?</a:t>
+            </a:r>
+          </a:p>
+        </p:txBody>
+      </p:sp>
+      <p:sp>
+        <p:nvSpPr>
+          <p:cNvPr id="8" name="Oval 7"/>
           <p:cNvSpPr/>
           <p:nvPr/>
         </p:nvSpPr>
         <p:spPr>
           <a:xfrm>
-            <a:off x="548640" y="2377440"/>
-            <a:ext cx="5364327" cy="3794760"/>
-          </a:xfrm>
-          <a:prstGeom prst="roundRect">
-            <a:avLst>
-              <a:gd name="adj" fmla="val 4000"/>
-            </a:avLst>
+            <a:off x="548640" y="3108960"/>
+            <a:ext cx="502920" cy="502920"/>
+          </a:xfrm>
+          <a:prstGeom prst="ellipse">
+            <a:avLst/>
           </a:prstGeom>
           <a:solidFill>
-            <a:srgbClr val="EAF3FF"/>
+            <a:srgbClr val="F2B705"/>
           </a:solidFill>
           <a:ln>
             <a:noFill/>
@@ -7824,9 +12521,20 @@
           </a:fontRef>
         </p:style>
         <p:txBody>
-          <a:bodyPr rtlCol="0" anchor="ctr"/>
-          <a:lstStyle/>
-          <a:p/>
+          <a:bodyPr rtlCol="0" anchor="ctr" lIns="0" rIns="0" tIns="0" bIns="0"/>
+          <a:lstStyle/>
+          <a:p>
+            <a:pPr algn="ctr"/>
+            <a:r>
+              <a:rPr sz="1600" b="1">
+                <a:solidFill>
+                  <a:srgbClr val="202122"/>
+                </a:solidFill>
+                <a:latin typeface="Calibri"/>
+              </a:rPr>
+              <a:t>2</a:t>
+            </a:r>
+          </a:p>
         </p:txBody>
       </p:sp>
       <p:sp>
@@ -7837,144 +12545,47 @@
         </p:nvSpPr>
         <p:spPr>
           <a:xfrm>
-            <a:off x="822959" y="2606040"/>
-            <a:ext cx="4815687" cy="3337560"/>
-          </a:xfrm>
-          <a:prstGeom prst="rect">
-            <a:avLst/>
-          </a:prstGeom>
-          <a:noFill/>
-        </p:spPr>
-        <p:txBody>
-          <a:bodyPr wrap="square" lIns="0" rIns="0" tIns="0" bIns="0">
-            <a:spAutoFit/>
-          </a:bodyPr>
-          <a:lstStyle/>
-          <a:p>
-            <a:pPr marL="274320" indent="-274320">
-              <a:spcAft>
-                <a:spcPts val="945"/>
-              </a:spcAft>
-              <a:buClr>
-                <a:srgbClr val="0645AD"/>
-              </a:buClr>
-              <a:buFont typeface="Arial"/>
-              <a:buChar char="•"/>
-            </a:pPr>
-            <a:r>
-              <a:rPr sz="2100" b="0">
+            <a:off x="1371600" y="3063240"/>
+            <a:ext cx="10271455" cy="1188720"/>
+          </a:xfrm>
+          <a:prstGeom prst="rect">
+            <a:avLst/>
+          </a:prstGeom>
+          <a:noFill/>
+        </p:spPr>
+        <p:txBody>
+          <a:bodyPr wrap="square" anchor="t" lIns="0" rIns="0" tIns="0" bIns="0"/>
+          <a:lstStyle/>
+          <a:p>
+            <a:pPr algn="l"/>
+            <a:r>
+              <a:rPr sz="2400" b="0" i="0">
                 <a:solidFill>
                   <a:srgbClr val="202122"/>
                 </a:solidFill>
                 <a:latin typeface="Calibri"/>
               </a:rPr>
-              <a:t>Linear stages completed in order</a:t>
-            </a:r>
-          </a:p>
-          <a:p>
-            <a:pPr marL="274320" indent="-274320">
-              <a:spcAft>
-                <a:spcPts val="945"/>
-              </a:spcAft>
-              <a:buClr>
-                <a:srgbClr val="0645AD"/>
-              </a:buClr>
-              <a:buFont typeface="Arial"/>
-              <a:buChar char="•"/>
-            </a:pPr>
-            <a:r>
-              <a:rPr sz="2100" b="0">
-                <a:solidFill>
-                  <a:srgbClr val="202122"/>
-                </a:solidFill>
-                <a:latin typeface="Calibri"/>
-              </a:rPr>
-              <a:t>Requirements fixed at the start</a:t>
-            </a:r>
-          </a:p>
-          <a:p>
-            <a:pPr marL="274320" indent="-274320">
-              <a:spcAft>
-                <a:spcPts val="945"/>
-              </a:spcAft>
-              <a:buClr>
-                <a:srgbClr val="0645AD"/>
-              </a:buClr>
-              <a:buFont typeface="Arial"/>
-              <a:buChar char="•"/>
-            </a:pPr>
-            <a:r>
-              <a:rPr sz="2100" b="0">
-                <a:solidFill>
-                  <a:srgbClr val="202122"/>
-                </a:solidFill>
-                <a:latin typeface="Calibri"/>
-              </a:rPr>
-              <a:t>Easy to plan, budget and document</a:t>
-            </a:r>
-          </a:p>
-          <a:p>
-            <a:pPr marL="274320" indent="-274320">
-              <a:spcAft>
-                <a:spcPts val="945"/>
-              </a:spcAft>
-              <a:buClr>
-                <a:srgbClr val="0645AD"/>
-              </a:buClr>
-              <a:buFont typeface="Arial"/>
-              <a:buChar char="•"/>
-            </a:pPr>
-            <a:r>
-              <a:rPr sz="2100" b="0">
-                <a:solidFill>
-                  <a:srgbClr val="202122"/>
-                </a:solidFill>
-                <a:latin typeface="Calibri"/>
-              </a:rPr>
-              <a:t>Hard to change once a stage is finished</a:t>
-            </a:r>
-          </a:p>
-          <a:p>
-            <a:pPr marL="274320" indent="-274320">
-              <a:spcAft>
-                <a:spcPts val="945"/>
-              </a:spcAft>
-              <a:buClr>
-                <a:srgbClr val="0645AD"/>
-              </a:buClr>
-              <a:buFont typeface="Arial"/>
-              <a:buChar char="•"/>
-            </a:pPr>
-            <a:r>
-              <a:rPr sz="2100" b="0">
-                <a:solidFill>
-                  <a:srgbClr val="202122"/>
-                </a:solidFill>
-                <a:latin typeface="Calibri"/>
-              </a:rPr>
-              <a:t>Suits projects with clear, stable requirements</a:t>
-            </a:r>
-          </a:p>
-        </p:txBody>
-      </p:sp>
-      <p:sp>
-        <p:nvSpPr>
-          <p:cNvPr id="10" name="Rounded Rectangle 9"/>
+              <a:t>What is the highest possible score?</a:t>
+            </a:r>
+          </a:p>
+        </p:txBody>
+      </p:sp>
+      <p:sp>
+        <p:nvSpPr>
+          <p:cNvPr id="10" name="Oval 9"/>
           <p:cNvSpPr/>
           <p:nvPr/>
         </p:nvSpPr>
         <p:spPr>
           <a:xfrm>
-            <a:off x="6278727" y="1600200"/>
-            <a:ext cx="5364327" cy="640080"/>
-          </a:xfrm>
-          <a:prstGeom prst="roundRect">
-            <a:avLst>
-              <a:gd name="adj" fmla="val 15000"/>
-            </a:avLst>
+            <a:off x="548640" y="4526280"/>
+            <a:ext cx="502920" cy="502920"/>
+          </a:xfrm>
+          <a:prstGeom prst="ellipse">
+            <a:avLst/>
           </a:prstGeom>
           <a:solidFill>
-            <a:srgbClr val="0645AD"/>
+            <a:srgbClr val="F2B705"/>
           </a:solidFill>
           <a:ln>
             <a:noFill/>
@@ -7996,9 +12607,20 @@
           </a:fontRef>
         </p:style>
         <p:txBody>
-          <a:bodyPr rtlCol="0" anchor="ctr"/>
-          <a:lstStyle/>
-          <a:p/>
+          <a:bodyPr rtlCol="0" anchor="ctr" lIns="0" rIns="0" tIns="0" bIns="0"/>
+          <a:lstStyle/>
+          <a:p>
+            <a:pPr algn="ctr"/>
+            <a:r>
+              <a:rPr sz="1600" b="1">
+                <a:solidFill>
+                  <a:srgbClr val="202122"/>
+                </a:solidFill>
+                <a:latin typeface="Calibri"/>
+              </a:rPr>
+              <a:t>3</a:t>
+            </a:r>
+          </a:p>
         </p:txBody>
       </p:sp>
       <p:sp>
@@ -8009,199 +12631,60 @@
         </p:nvSpPr>
         <p:spPr>
           <a:xfrm>
-            <a:off x="6507327" y="1600200"/>
-            <a:ext cx="4907127" cy="640080"/>
-          </a:xfrm>
-          <a:prstGeom prst="rect">
-            <a:avLst/>
-          </a:prstGeom>
-          <a:noFill/>
-        </p:spPr>
-        <p:txBody>
-          <a:bodyPr wrap="square" anchor="ctr" lIns="0" rIns="0" tIns="0" bIns="0"/>
+            <a:off x="1371600" y="4480560"/>
+            <a:ext cx="10271455" cy="1188720"/>
+          </a:xfrm>
+          <a:prstGeom prst="rect">
+            <a:avLst/>
+          </a:prstGeom>
+          <a:noFill/>
+        </p:spPr>
+        <p:txBody>
+          <a:bodyPr wrap="square" anchor="t" lIns="0" rIns="0" tIns="0" bIns="0"/>
           <a:lstStyle/>
           <a:p>
             <a:pPr algn="l"/>
             <a:r>
-              <a:rPr sz="2000" b="1" i="0">
-                <a:solidFill>
-                  <a:srgbClr val="FFFFFF"/>
-                </a:solidFill>
-                <a:latin typeface="Calibri"/>
-              </a:rPr>
-              <a:t>Agile</a:t>
-            </a:r>
-          </a:p>
-        </p:txBody>
-      </p:sp>
-      <p:sp>
-        <p:nvSpPr>
-          <p:cNvPr id="12" name="Rounded Rectangle 11"/>
-          <p:cNvSpPr/>
-          <p:nvPr/>
-        </p:nvSpPr>
-        <p:spPr>
-          <a:xfrm>
-            <a:off x="6278727" y="2377440"/>
-            <a:ext cx="5364327" cy="3794760"/>
-          </a:xfrm>
-          <a:prstGeom prst="roundRect">
-            <a:avLst>
-              <a:gd name="adj" fmla="val 4000"/>
-            </a:avLst>
-          </a:prstGeom>
-          <a:solidFill>
-            <a:srgbClr val="EAF3FF"/>
-          </a:solidFill>
-          <a:ln>
-            <a:noFill/>
-          </a:ln>
-          <a:effectLst/>
-        </p:spPr>
-        <p:style>
-          <a:lnRef idx="1">
-            <a:schemeClr val="accent1"/>
-          </a:lnRef>
-          <a:fillRef idx="3">
-            <a:schemeClr val="accent1"/>
-          </a:fillRef>
-          <a:effectRef idx="2">
-            <a:schemeClr val="accent1"/>
-          </a:effectRef>
-          <a:fontRef idx="minor">
-            <a:schemeClr val="lt1"/>
-          </a:fontRef>
-        </p:style>
-        <p:txBody>
-          <a:bodyPr rtlCol="0" anchor="ctr"/>
-          <a:lstStyle/>
-          <a:p/>
-        </p:txBody>
-      </p:sp>
-      <p:sp>
-        <p:nvSpPr>
-          <p:cNvPr id="13" name="TextBox 12"/>
-          <p:cNvSpPr txBox="1"/>
-          <p:nvPr/>
-        </p:nvSpPr>
-        <p:spPr>
-          <a:xfrm>
-            <a:off x="6553047" y="2606040"/>
-            <a:ext cx="4815687" cy="3337560"/>
-          </a:xfrm>
-          <a:prstGeom prst="rect">
-            <a:avLst/>
-          </a:prstGeom>
-          <a:noFill/>
-        </p:spPr>
-        <p:txBody>
-          <a:bodyPr wrap="square" lIns="0" rIns="0" tIns="0" bIns="0">
-            <a:spAutoFit/>
-          </a:bodyPr>
-          <a:lstStyle/>
-          <a:p>
-            <a:pPr marL="274320" indent="-274320">
-              <a:spcAft>
-                <a:spcPts val="855"/>
-              </a:spcAft>
-              <a:buClr>
-                <a:srgbClr val="0645AD"/>
-              </a:buClr>
-              <a:buFont typeface="Arial"/>
-              <a:buChar char="•"/>
-            </a:pPr>
-            <a:r>
-              <a:rPr sz="1900" b="0">
+              <a:rPr sz="2400" b="0" i="0">
                 <a:solidFill>
                   <a:srgbClr val="202122"/>
                 </a:solidFill>
                 <a:latin typeface="Calibri"/>
               </a:rPr>
-              <a:t>Short iterations delivering working pieces</a:t>
-            </a:r>
-          </a:p>
-          <a:p>
-            <a:pPr marL="274320" indent="-274320">
-              <a:spcAft>
-                <a:spcPts val="855"/>
-              </a:spcAft>
-              <a:buClr>
-                <a:srgbClr val="0645AD"/>
-              </a:buClr>
-              <a:buFont typeface="Arial"/>
-              <a:buChar char="•"/>
-            </a:pPr>
-            <a:r>
-              <a:rPr sz="1900" b="0">
-                <a:solidFill>
-                  <a:srgbClr val="202122"/>
-                </a:solidFill>
-                <a:latin typeface="Calibri"/>
-              </a:rPr>
-              <a:t>Requirements evolve with feedback</a:t>
-            </a:r>
-          </a:p>
-          <a:p>
-            <a:pPr marL="274320" indent="-274320">
-              <a:spcAft>
-                <a:spcPts val="855"/>
-              </a:spcAft>
-              <a:buClr>
-                <a:srgbClr val="0645AD"/>
-              </a:buClr>
-              <a:buFont typeface="Arial"/>
-              <a:buChar char="•"/>
-            </a:pPr>
-            <a:r>
-              <a:rPr sz="1900" b="0">
-                <a:solidFill>
-                  <a:srgbClr val="202122"/>
-                </a:solidFill>
-                <a:latin typeface="Calibri"/>
-              </a:rPr>
-              <a:t>Frequent contact with the customer</a:t>
-            </a:r>
-          </a:p>
-          <a:p>
-            <a:pPr marL="274320" indent="-274320">
-              <a:spcAft>
-                <a:spcPts val="855"/>
-              </a:spcAft>
-              <a:buClr>
-                <a:srgbClr val="0645AD"/>
-              </a:buClr>
-              <a:buFont typeface="Arial"/>
-              <a:buChar char="•"/>
-            </a:pPr>
-            <a:r>
-              <a:rPr sz="1900" b="0">
-                <a:solidFill>
-                  <a:srgbClr val="202122"/>
-                </a:solidFill>
-                <a:latin typeface="Calibri"/>
-              </a:rPr>
-              <a:t>Harder to predict final cost and date</a:t>
-            </a:r>
-          </a:p>
-          <a:p>
-            <a:pPr marL="274320" indent="-274320">
-              <a:spcAft>
-                <a:spcPts val="855"/>
-              </a:spcAft>
-              <a:buClr>
-                <a:srgbClr val="0645AD"/>
-              </a:buClr>
-              <a:buFont typeface="Arial"/>
-              <a:buChar char="•"/>
-            </a:pPr>
-            <a:r>
-              <a:rPr sz="1900" b="0">
-                <a:solidFill>
-                  <a:srgbClr val="202122"/>
-                </a:solidFill>
-                <a:latin typeface="Calibri"/>
-              </a:rPr>
-              <a:t>Suits projects where needs will change</a:t>
+              <a:t>Name three things a risk assessment records.</a:t>
+            </a:r>
+          </a:p>
+        </p:txBody>
+      </p:sp>
+      <p:sp>
+        <p:nvSpPr>
+          <p:cNvPr id="12" name="TextBox 11"/>
+          <p:cNvSpPr txBox="1"/>
+          <p:nvPr/>
+        </p:nvSpPr>
+        <p:spPr>
+          <a:xfrm>
+            <a:off x="548640" y="5852160"/>
+            <a:ext cx="11094415" cy="365760"/>
+          </a:xfrm>
+          <a:prstGeom prst="rect">
+            <a:avLst/>
+          </a:prstGeom>
+          <a:noFill/>
+        </p:spPr>
+        <p:txBody>
+          <a:bodyPr wrap="square" anchor="t" lIns="0" rIns="0" tIns="0" bIns="0"/>
+          <a:lstStyle/>
+          <a:p>
+            <a:pPr algn="l"/>
+            <a:r>
+              <a:rPr sz="1300" b="0" i="1">
+                <a:solidFill>
+                  <a:srgbClr val="54595D"/>
+                </a:solidFill>
+                <a:latin typeface="Calibri"/>
+              </a:rPr>
+              <a:t>Answer on mini whiteboards or in your book. Answers are in the speaker notes.</a:t>
             </a:r>
           </a:p>
         </p:txBody>
@@ -8293,7 +12776,7 @@
                 </a:solidFill>
                 <a:latin typeface="Cambria"/>
               </a:rPr>
-              <a:t>Project management techniques</a:t>
+              <a:t>Risk assessment documentation</a:t>
             </a:r>
           </a:p>
         </p:txBody>
@@ -8366,22 +12849,150 @@
       </p:sp>
       <p:sp>
         <p:nvSpPr>
-          <p:cNvPr id="6" name="Rounded Rectangle 5"/>
+          <p:cNvPr id="6" name="TextBox 5"/>
+          <p:cNvSpPr txBox="1"/>
+          <p:nvPr/>
+        </p:nvSpPr>
+        <p:spPr>
+          <a:xfrm>
+            <a:off x="548640" y="1600200"/>
+            <a:ext cx="6675120" cy="4572000"/>
+          </a:xfrm>
+          <a:prstGeom prst="rect">
+            <a:avLst/>
+          </a:prstGeom>
+          <a:noFill/>
+        </p:spPr>
+        <p:txBody>
+          <a:bodyPr wrap="square" lIns="0" rIns="0" tIns="0" bIns="0">
+            <a:spAutoFit/>
+          </a:bodyPr>
+          <a:lstStyle/>
+          <a:p>
+            <a:pPr marL="274320" indent="-274320">
+              <a:spcAft>
+                <a:spcPts val="1080"/>
+              </a:spcAft>
+              <a:buClr>
+                <a:srgbClr val="0645AD"/>
+              </a:buClr>
+              <a:buFont typeface="Arial"/>
+              <a:buChar char="•"/>
+            </a:pPr>
+            <a:r>
+              <a:rPr sz="2400" b="0">
+                <a:solidFill>
+                  <a:srgbClr val="202122"/>
+                </a:solidFill>
+                <a:latin typeface="Calibri"/>
+              </a:rPr>
+              <a:t>A description of the risk</a:t>
+            </a:r>
+          </a:p>
+          <a:p>
+            <a:pPr marL="274320" indent="-274320">
+              <a:spcAft>
+                <a:spcPts val="1080"/>
+              </a:spcAft>
+              <a:buClr>
+                <a:srgbClr val="0645AD"/>
+              </a:buClr>
+              <a:buFont typeface="Arial"/>
+              <a:buChar char="•"/>
+            </a:pPr>
+            <a:r>
+              <a:rPr sz="2400" b="0">
+                <a:solidFill>
+                  <a:srgbClr val="202122"/>
+                </a:solidFill>
+                <a:latin typeface="Calibri"/>
+              </a:rPr>
+              <a:t>Who or what could be harmed, and how</a:t>
+            </a:r>
+          </a:p>
+          <a:p>
+            <a:pPr marL="274320" indent="-274320">
+              <a:spcAft>
+                <a:spcPts val="1080"/>
+              </a:spcAft>
+              <a:buClr>
+                <a:srgbClr val="0645AD"/>
+              </a:buClr>
+              <a:buFont typeface="Arial"/>
+              <a:buChar char="•"/>
+            </a:pPr>
+            <a:r>
+              <a:rPr sz="2400" b="0">
+                <a:solidFill>
+                  <a:srgbClr val="202122"/>
+                </a:solidFill>
+                <a:latin typeface="Calibri"/>
+              </a:rPr>
+              <a:t>Mitigations already in place</a:t>
+            </a:r>
+          </a:p>
+          <a:p>
+            <a:pPr marL="274320" indent="-274320">
+              <a:spcAft>
+                <a:spcPts val="1080"/>
+              </a:spcAft>
+              <a:buClr>
+                <a:srgbClr val="0645AD"/>
+              </a:buClr>
+              <a:buFont typeface="Arial"/>
+              <a:buChar char="•"/>
+            </a:pPr>
+            <a:r>
+              <a:rPr sz="2400" b="0">
+                <a:solidFill>
+                  <a:srgbClr val="202122"/>
+                </a:solidFill>
+                <a:latin typeface="Calibri"/>
+              </a:rPr>
+              <a:t>Further mitigation needed</a:t>
+            </a:r>
+          </a:p>
+          <a:p>
+            <a:pPr marL="274320" indent="-274320">
+              <a:spcAft>
+                <a:spcPts val="1080"/>
+              </a:spcAft>
+              <a:buClr>
+                <a:srgbClr val="0645AD"/>
+              </a:buClr>
+              <a:buFont typeface="Arial"/>
+              <a:buChar char="•"/>
+            </a:pPr>
+            <a:r>
+              <a:rPr sz="2400" b="0">
+                <a:solidFill>
+                  <a:srgbClr val="202122"/>
+                </a:solidFill>
+                <a:latin typeface="Calibri"/>
+              </a:rPr>
+              <a:t>Who is responsible, and the due date</a:t>
+            </a:r>
+          </a:p>
+        </p:txBody>
+      </p:sp>
+      <p:sp>
+        <p:nvSpPr>
+          <p:cNvPr id="7" name="Rounded Rectangle 6"/>
           <p:cNvSpPr/>
           <p:nvPr/>
         </p:nvSpPr>
         <p:spPr>
           <a:xfrm>
-            <a:off x="548640" y="1600200"/>
-            <a:ext cx="3515258" cy="2148840"/>
+            <a:off x="7772400" y="1600200"/>
+            <a:ext cx="3867912" cy="4434840"/>
           </a:xfrm>
           <a:prstGeom prst="roundRect">
             <a:avLst>
-              <a:gd name="adj" fmla="val 6000"/>
+              <a:gd name="adj" fmla="val 8000"/>
             </a:avLst>
           </a:prstGeom>
           <a:solidFill>
-            <a:srgbClr val="EAF3FF"/>
+            <a:srgbClr val="03306E"/>
           </a:solidFill>
           <a:ln>
             <a:noFill/>
@@ -8410,14 +13021,14 @@
       </p:sp>
       <p:sp>
         <p:nvSpPr>
-          <p:cNvPr id="7" name="Oval 6"/>
+          <p:cNvPr id="8" name="Oval 7"/>
           <p:cNvSpPr/>
           <p:nvPr/>
         </p:nvSpPr>
         <p:spPr>
           <a:xfrm>
-            <a:off x="777240" y="1828800"/>
-            <a:ext cx="457200" cy="457200"/>
+            <a:off x="8046720" y="1874519"/>
+            <a:ext cx="548640" cy="548640"/>
           </a:xfrm>
           <a:prstGeom prst="ellipse">
             <a:avLst/>
@@ -8450,60 +13061,60 @@
           <a:p>
             <a:pPr algn="ctr"/>
             <a:r>
-              <a:rPr sz="1500" b="1">
+              <a:rPr sz="2000" b="1">
                 <a:solidFill>
                   <a:srgbClr val="202122"/>
                 </a:solidFill>
                 <a:latin typeface="Calibri"/>
               </a:rPr>
-              <a:t>1</a:t>
-            </a:r>
-          </a:p>
-        </p:txBody>
-      </p:sp>
-      <p:sp>
-        <p:nvSpPr>
-          <p:cNvPr id="8" name="TextBox 7"/>
-          <p:cNvSpPr txBox="1"/>
-          <p:nvPr/>
-        </p:nvSpPr>
-        <p:spPr>
-          <a:xfrm>
-            <a:off x="1371600" y="1801368"/>
-            <a:ext cx="2509418" cy="512064"/>
-          </a:xfrm>
-          <a:prstGeom prst="rect">
-            <a:avLst/>
-          </a:prstGeom>
-          <a:noFill/>
-        </p:spPr>
-        <p:txBody>
-          <a:bodyPr wrap="square" anchor="ctr" lIns="0" rIns="0" tIns="0" bIns="0"/>
+              <a:t>!</a:t>
+            </a:r>
+          </a:p>
+        </p:txBody>
+      </p:sp>
+      <p:sp>
+        <p:nvSpPr>
+          <p:cNvPr id="9" name="TextBox 8"/>
+          <p:cNvSpPr txBox="1"/>
+          <p:nvPr/>
+        </p:nvSpPr>
+        <p:spPr>
+          <a:xfrm>
+            <a:off x="8046720" y="2606040"/>
+            <a:ext cx="3291840" cy="365760"/>
+          </a:xfrm>
+          <a:prstGeom prst="rect">
+            <a:avLst/>
+          </a:prstGeom>
+          <a:noFill/>
+        </p:spPr>
+        <p:txBody>
+          <a:bodyPr wrap="square" anchor="t" lIns="0" rIns="0" tIns="0" bIns="0"/>
           <a:lstStyle/>
           <a:p>
             <a:pPr algn="l"/>
             <a:r>
-              <a:rPr sz="1900" b="1" i="0">
-                <a:solidFill>
-                  <a:srgbClr val="03306E"/>
-                </a:solidFill>
-                <a:latin typeface="Calibri"/>
-              </a:rPr>
-              <a:t>Gantt chart</a:t>
-            </a:r>
-          </a:p>
-        </p:txBody>
-      </p:sp>
-      <p:sp>
-        <p:nvSpPr>
-          <p:cNvPr id="9" name="TextBox 8"/>
-          <p:cNvSpPr txBox="1"/>
-          <p:nvPr/>
-        </p:nvSpPr>
-        <p:spPr>
-          <a:xfrm>
-            <a:off x="777240" y="2468880"/>
-            <a:ext cx="3058058" cy="1143000"/>
+              <a:rPr sz="1300" b="1" i="0">
+                <a:solidFill>
+                  <a:srgbClr val="A9C8F0"/>
+                </a:solidFill>
+                <a:latin typeface="Calibri"/>
+              </a:rPr>
+              <a:t>KEY IDEA</a:t>
+            </a:r>
+          </a:p>
+        </p:txBody>
+      </p:sp>
+      <p:sp>
+        <p:nvSpPr>
+          <p:cNvPr id="10" name="TextBox 9"/>
+          <p:cNvSpPr txBox="1"/>
+          <p:nvPr/>
+        </p:nvSpPr>
+        <p:spPr>
+          <a:xfrm>
+            <a:off x="8046720" y="3017520"/>
+            <a:ext cx="3291840" cy="2926080"/>
           </a:xfrm>
           <a:prstGeom prst="rect">
             <a:avLst/>
@@ -8516,665 +13127,13 @@
           <a:p>
             <a:pPr algn="l"/>
             <a:r>
-              <a:rPr sz="2000" b="0" i="0">
-                <a:solidFill>
-                  <a:srgbClr val="202122"/>
-                </a:solidFill>
-                <a:latin typeface="Calibri"/>
-              </a:rPr>
-              <a:t>Bars on a timeline showing when each task starts and ends.</a:t>
-            </a:r>
-          </a:p>
-        </p:txBody>
-      </p:sp>
-      <p:sp>
-        <p:nvSpPr>
-          <p:cNvPr id="10" name="Rounded Rectangle 9"/>
-          <p:cNvSpPr/>
-          <p:nvPr/>
-        </p:nvSpPr>
-        <p:spPr>
-          <a:xfrm>
-            <a:off x="4338218" y="1600200"/>
-            <a:ext cx="3515258" cy="2148840"/>
-          </a:xfrm>
-          <a:prstGeom prst="roundRect">
-            <a:avLst>
-              <a:gd name="adj" fmla="val 6000"/>
-            </a:avLst>
-          </a:prstGeom>
-          <a:solidFill>
-            <a:srgbClr val="EAF3FF"/>
-          </a:solidFill>
-          <a:ln>
-            <a:noFill/>
-          </a:ln>
-          <a:effectLst/>
-        </p:spPr>
-        <p:style>
-          <a:lnRef idx="1">
-            <a:schemeClr val="accent1"/>
-          </a:lnRef>
-          <a:fillRef idx="3">
-            <a:schemeClr val="accent1"/>
-          </a:fillRef>
-          <a:effectRef idx="2">
-            <a:schemeClr val="accent1"/>
-          </a:effectRef>
-          <a:fontRef idx="minor">
-            <a:schemeClr val="lt1"/>
-          </a:fontRef>
-        </p:style>
-        <p:txBody>
-          <a:bodyPr rtlCol="0" anchor="ctr"/>
-          <a:lstStyle/>
-          <a:p/>
-        </p:txBody>
-      </p:sp>
-      <p:sp>
-        <p:nvSpPr>
-          <p:cNvPr id="11" name="Oval 10"/>
-          <p:cNvSpPr/>
-          <p:nvPr/>
-        </p:nvSpPr>
-        <p:spPr>
-          <a:xfrm>
-            <a:off x="4566818" y="1828800"/>
-            <a:ext cx="457200" cy="457200"/>
-          </a:xfrm>
-          <a:prstGeom prst="ellipse">
-            <a:avLst/>
-          </a:prstGeom>
-          <a:solidFill>
-            <a:srgbClr val="F2B705"/>
-          </a:solidFill>
-          <a:ln>
-            <a:noFill/>
-          </a:ln>
-          <a:effectLst/>
-        </p:spPr>
-        <p:style>
-          <a:lnRef idx="1">
-            <a:schemeClr val="accent1"/>
-          </a:lnRef>
-          <a:fillRef idx="3">
-            <a:schemeClr val="accent1"/>
-          </a:fillRef>
-          <a:effectRef idx="2">
-            <a:schemeClr val="accent1"/>
-          </a:effectRef>
-          <a:fontRef idx="minor">
-            <a:schemeClr val="lt1"/>
-          </a:fontRef>
-        </p:style>
-        <p:txBody>
-          <a:bodyPr rtlCol="0" anchor="ctr" lIns="0" rIns="0" tIns="0" bIns="0"/>
-          <a:lstStyle/>
-          <a:p>
-            <a:pPr algn="ctr"/>
-            <a:r>
-              <a:rPr sz="1500" b="1">
-                <a:solidFill>
-                  <a:srgbClr val="202122"/>
-                </a:solidFill>
-                <a:latin typeface="Calibri"/>
-              </a:rPr>
-              <a:t>2</a:t>
-            </a:r>
-          </a:p>
-        </p:txBody>
-      </p:sp>
-      <p:sp>
-        <p:nvSpPr>
-          <p:cNvPr id="12" name="TextBox 11"/>
-          <p:cNvSpPr txBox="1"/>
-          <p:nvPr/>
-        </p:nvSpPr>
-        <p:spPr>
-          <a:xfrm>
-            <a:off x="5161178" y="1801368"/>
-            <a:ext cx="2509418" cy="512064"/>
-          </a:xfrm>
-          <a:prstGeom prst="rect">
-            <a:avLst/>
-          </a:prstGeom>
-          <a:noFill/>
-        </p:spPr>
-        <p:txBody>
-          <a:bodyPr wrap="square" anchor="ctr" lIns="0" rIns="0" tIns="0" bIns="0"/>
-          <a:lstStyle/>
-          <a:p>
-            <a:pPr algn="l"/>
-            <a:r>
-              <a:rPr sz="1900" b="1" i="0">
-                <a:solidFill>
-                  <a:srgbClr val="03306E"/>
-                </a:solidFill>
-                <a:latin typeface="Calibri"/>
-              </a:rPr>
-              <a:t>PERT chart</a:t>
-            </a:r>
-          </a:p>
-        </p:txBody>
-      </p:sp>
-      <p:sp>
-        <p:nvSpPr>
-          <p:cNvPr id="13" name="TextBox 12"/>
-          <p:cNvSpPr txBox="1"/>
-          <p:nvPr/>
-        </p:nvSpPr>
-        <p:spPr>
-          <a:xfrm>
-            <a:off x="4566818" y="2468880"/>
-            <a:ext cx="3058058" cy="1143000"/>
-          </a:xfrm>
-          <a:prstGeom prst="rect">
-            <a:avLst/>
-          </a:prstGeom>
-          <a:noFill/>
-        </p:spPr>
-        <p:txBody>
-          <a:bodyPr wrap="square" anchor="t" lIns="0" rIns="0" tIns="0" bIns="0"/>
-          <a:lstStyle/>
-          <a:p>
-            <a:pPr algn="l"/>
-            <a:r>
-              <a:rPr sz="2000" b="0" i="0">
-                <a:solidFill>
-                  <a:srgbClr val="202122"/>
-                </a:solidFill>
-                <a:latin typeface="Calibri"/>
-              </a:rPr>
-              <a:t>Network of tasks with optimistic, likely and pessimistic time estimates.</a:t>
-            </a:r>
-          </a:p>
-        </p:txBody>
-      </p:sp>
-      <p:sp>
-        <p:nvSpPr>
-          <p:cNvPr id="14" name="Rounded Rectangle 13"/>
-          <p:cNvSpPr/>
-          <p:nvPr/>
-        </p:nvSpPr>
-        <p:spPr>
-          <a:xfrm>
-            <a:off x="8127796" y="1600200"/>
-            <a:ext cx="3515258" cy="2148840"/>
-          </a:xfrm>
-          <a:prstGeom prst="roundRect">
-            <a:avLst>
-              <a:gd name="adj" fmla="val 6000"/>
-            </a:avLst>
-          </a:prstGeom>
-          <a:solidFill>
-            <a:srgbClr val="EAF3FF"/>
-          </a:solidFill>
-          <a:ln>
-            <a:noFill/>
-          </a:ln>
-          <a:effectLst/>
-        </p:spPr>
-        <p:style>
-          <a:lnRef idx="1">
-            <a:schemeClr val="accent1"/>
-          </a:lnRef>
-          <a:fillRef idx="3">
-            <a:schemeClr val="accent1"/>
-          </a:fillRef>
-          <a:effectRef idx="2">
-            <a:schemeClr val="accent1"/>
-          </a:effectRef>
-          <a:fontRef idx="minor">
-            <a:schemeClr val="lt1"/>
-          </a:fontRef>
-        </p:style>
-        <p:txBody>
-          <a:bodyPr rtlCol="0" anchor="ctr"/>
-          <a:lstStyle/>
-          <a:p/>
-        </p:txBody>
-      </p:sp>
-      <p:sp>
-        <p:nvSpPr>
-          <p:cNvPr id="15" name="Oval 14"/>
-          <p:cNvSpPr/>
-          <p:nvPr/>
-        </p:nvSpPr>
-        <p:spPr>
-          <a:xfrm>
-            <a:off x="8356396" y="1828800"/>
-            <a:ext cx="457200" cy="457200"/>
-          </a:xfrm>
-          <a:prstGeom prst="ellipse">
-            <a:avLst/>
-          </a:prstGeom>
-          <a:solidFill>
-            <a:srgbClr val="F2B705"/>
-          </a:solidFill>
-          <a:ln>
-            <a:noFill/>
-          </a:ln>
-          <a:effectLst/>
-        </p:spPr>
-        <p:style>
-          <a:lnRef idx="1">
-            <a:schemeClr val="accent1"/>
-          </a:lnRef>
-          <a:fillRef idx="3">
-            <a:schemeClr val="accent1"/>
-          </a:fillRef>
-          <a:effectRef idx="2">
-            <a:schemeClr val="accent1"/>
-          </a:effectRef>
-          <a:fontRef idx="minor">
-            <a:schemeClr val="lt1"/>
-          </a:fontRef>
-        </p:style>
-        <p:txBody>
-          <a:bodyPr rtlCol="0" anchor="ctr" lIns="0" rIns="0" tIns="0" bIns="0"/>
-          <a:lstStyle/>
-          <a:p>
-            <a:pPr algn="ctr"/>
-            <a:r>
-              <a:rPr sz="1500" b="1">
-                <a:solidFill>
-                  <a:srgbClr val="202122"/>
-                </a:solidFill>
-                <a:latin typeface="Calibri"/>
-              </a:rPr>
-              <a:t>3</a:t>
-            </a:r>
-          </a:p>
-        </p:txBody>
-      </p:sp>
-      <p:sp>
-        <p:nvSpPr>
-          <p:cNvPr id="16" name="TextBox 15"/>
-          <p:cNvSpPr txBox="1"/>
-          <p:nvPr/>
-        </p:nvSpPr>
-        <p:spPr>
-          <a:xfrm>
-            <a:off x="8950756" y="1801368"/>
-            <a:ext cx="2509418" cy="512064"/>
-          </a:xfrm>
-          <a:prstGeom prst="rect">
-            <a:avLst/>
-          </a:prstGeom>
-          <a:noFill/>
-        </p:spPr>
-        <p:txBody>
-          <a:bodyPr wrap="square" anchor="ctr" lIns="0" rIns="0" tIns="0" bIns="0"/>
-          <a:lstStyle/>
-          <a:p>
-            <a:pPr algn="l"/>
-            <a:r>
-              <a:rPr sz="1900" b="1" i="0">
-                <a:solidFill>
-                  <a:srgbClr val="03306E"/>
-                </a:solidFill>
-                <a:latin typeface="Calibri"/>
-              </a:rPr>
-              <a:t>Precedence table</a:t>
-            </a:r>
-          </a:p>
-        </p:txBody>
-      </p:sp>
-      <p:sp>
-        <p:nvSpPr>
-          <p:cNvPr id="17" name="TextBox 16"/>
-          <p:cNvSpPr txBox="1"/>
-          <p:nvPr/>
-        </p:nvSpPr>
-        <p:spPr>
-          <a:xfrm>
-            <a:off x="8356396" y="2468880"/>
-            <a:ext cx="3058058" cy="1143000"/>
-          </a:xfrm>
-          <a:prstGeom prst="rect">
-            <a:avLst/>
-          </a:prstGeom>
-          <a:noFill/>
-        </p:spPr>
-        <p:txBody>
-          <a:bodyPr wrap="square" anchor="t" lIns="0" rIns="0" tIns="0" bIns="0"/>
-          <a:lstStyle/>
-          <a:p>
-            <a:pPr algn="l"/>
-            <a:r>
-              <a:rPr sz="2000" b="0" i="0">
-                <a:solidFill>
-                  <a:srgbClr val="202122"/>
-                </a:solidFill>
-                <a:latin typeface="Calibri"/>
-              </a:rPr>
-              <a:t>Lists each task and the tasks that must finish before it.</a:t>
-            </a:r>
-          </a:p>
-        </p:txBody>
-      </p:sp>
-      <p:sp>
-        <p:nvSpPr>
-          <p:cNvPr id="18" name="Rounded Rectangle 17"/>
-          <p:cNvSpPr/>
-          <p:nvPr/>
-        </p:nvSpPr>
-        <p:spPr>
-          <a:xfrm>
-            <a:off x="548640" y="4023360"/>
-            <a:ext cx="3515258" cy="2148840"/>
-          </a:xfrm>
-          <a:prstGeom prst="roundRect">
-            <a:avLst>
-              <a:gd name="adj" fmla="val 6000"/>
-            </a:avLst>
-          </a:prstGeom>
-          <a:solidFill>
-            <a:srgbClr val="EAF3FF"/>
-          </a:solidFill>
-          <a:ln>
-            <a:noFill/>
-          </a:ln>
-          <a:effectLst/>
-        </p:spPr>
-        <p:style>
-          <a:lnRef idx="1">
-            <a:schemeClr val="accent1"/>
-          </a:lnRef>
-          <a:fillRef idx="3">
-            <a:schemeClr val="accent1"/>
-          </a:fillRef>
-          <a:effectRef idx="2">
-            <a:schemeClr val="accent1"/>
-          </a:effectRef>
-          <a:fontRef idx="minor">
-            <a:schemeClr val="lt1"/>
-          </a:fontRef>
-        </p:style>
-        <p:txBody>
-          <a:bodyPr rtlCol="0" anchor="ctr"/>
-          <a:lstStyle/>
-          <a:p/>
-        </p:txBody>
-      </p:sp>
-      <p:sp>
-        <p:nvSpPr>
-          <p:cNvPr id="19" name="Oval 18"/>
-          <p:cNvSpPr/>
-          <p:nvPr/>
-        </p:nvSpPr>
-        <p:spPr>
-          <a:xfrm>
-            <a:off x="777240" y="4251960"/>
-            <a:ext cx="457200" cy="457200"/>
-          </a:xfrm>
-          <a:prstGeom prst="ellipse">
-            <a:avLst/>
-          </a:prstGeom>
-          <a:solidFill>
-            <a:srgbClr val="F2B705"/>
-          </a:solidFill>
-          <a:ln>
-            <a:noFill/>
-          </a:ln>
-          <a:effectLst/>
-        </p:spPr>
-        <p:style>
-          <a:lnRef idx="1">
-            <a:schemeClr val="accent1"/>
-          </a:lnRef>
-          <a:fillRef idx="3">
-            <a:schemeClr val="accent1"/>
-          </a:fillRef>
-          <a:effectRef idx="2">
-            <a:schemeClr val="accent1"/>
-          </a:effectRef>
-          <a:fontRef idx="minor">
-            <a:schemeClr val="lt1"/>
-          </a:fontRef>
-        </p:style>
-        <p:txBody>
-          <a:bodyPr rtlCol="0" anchor="ctr" lIns="0" rIns="0" tIns="0" bIns="0"/>
-          <a:lstStyle/>
-          <a:p>
-            <a:pPr algn="ctr"/>
-            <a:r>
-              <a:rPr sz="1500" b="1">
-                <a:solidFill>
-                  <a:srgbClr val="202122"/>
-                </a:solidFill>
-                <a:latin typeface="Calibri"/>
-              </a:rPr>
-              <a:t>4</a:t>
-            </a:r>
-          </a:p>
-        </p:txBody>
-      </p:sp>
-      <p:sp>
-        <p:nvSpPr>
-          <p:cNvPr id="20" name="TextBox 19"/>
-          <p:cNvSpPr txBox="1"/>
-          <p:nvPr/>
-        </p:nvSpPr>
-        <p:spPr>
-          <a:xfrm>
-            <a:off x="1371600" y="4224528"/>
-            <a:ext cx="2509418" cy="512064"/>
-          </a:xfrm>
-          <a:prstGeom prst="rect">
-            <a:avLst/>
-          </a:prstGeom>
-          <a:noFill/>
-        </p:spPr>
-        <p:txBody>
-          <a:bodyPr wrap="square" anchor="ctr" lIns="0" rIns="0" tIns="0" bIns="0"/>
-          <a:lstStyle/>
-          <a:p>
-            <a:pPr algn="l"/>
-            <a:r>
-              <a:rPr sz="1900" b="1" i="0">
-                <a:solidFill>
-                  <a:srgbClr val="03306E"/>
-                </a:solidFill>
-                <a:latin typeface="Calibri"/>
-              </a:rPr>
-              <a:t>Kanban</a:t>
-            </a:r>
-          </a:p>
-        </p:txBody>
-      </p:sp>
-      <p:sp>
-        <p:nvSpPr>
-          <p:cNvPr id="21" name="TextBox 20"/>
-          <p:cNvSpPr txBox="1"/>
-          <p:nvPr/>
-        </p:nvSpPr>
-        <p:spPr>
-          <a:xfrm>
-            <a:off x="777240" y="4892040"/>
-            <a:ext cx="3058058" cy="1143000"/>
-          </a:xfrm>
-          <a:prstGeom prst="rect">
-            <a:avLst/>
-          </a:prstGeom>
-          <a:noFill/>
-        </p:spPr>
-        <p:txBody>
-          <a:bodyPr wrap="square" anchor="t" lIns="0" rIns="0" tIns="0" bIns="0"/>
-          <a:lstStyle/>
-          <a:p>
-            <a:pPr algn="l"/>
-            <a:r>
-              <a:rPr sz="2000" b="0" i="0">
-                <a:solidFill>
-                  <a:srgbClr val="202122"/>
-                </a:solidFill>
-                <a:latin typeface="Calibri"/>
-              </a:rPr>
-              <a:t>Board of cards moving through columns such as To do, Doing, Done.</a:t>
-            </a:r>
-          </a:p>
-        </p:txBody>
-      </p:sp>
-      <p:sp>
-        <p:nvSpPr>
-          <p:cNvPr id="22" name="Rounded Rectangle 21"/>
-          <p:cNvSpPr/>
-          <p:nvPr/>
-        </p:nvSpPr>
-        <p:spPr>
-          <a:xfrm>
-            <a:off x="4338218" y="4023360"/>
-            <a:ext cx="3515258" cy="2148840"/>
-          </a:xfrm>
-          <a:prstGeom prst="roundRect">
-            <a:avLst>
-              <a:gd name="adj" fmla="val 6000"/>
-            </a:avLst>
-          </a:prstGeom>
-          <a:solidFill>
-            <a:srgbClr val="EAF3FF"/>
-          </a:solidFill>
-          <a:ln>
-            <a:noFill/>
-          </a:ln>
-          <a:effectLst/>
-        </p:spPr>
-        <p:style>
-          <a:lnRef idx="1">
-            <a:schemeClr val="accent1"/>
-          </a:lnRef>
-          <a:fillRef idx="3">
-            <a:schemeClr val="accent1"/>
-          </a:fillRef>
-          <a:effectRef idx="2">
-            <a:schemeClr val="accent1"/>
-          </a:effectRef>
-          <a:fontRef idx="minor">
-            <a:schemeClr val="lt1"/>
-          </a:fontRef>
-        </p:style>
-        <p:txBody>
-          <a:bodyPr rtlCol="0" anchor="ctr"/>
-          <a:lstStyle/>
-          <a:p/>
-        </p:txBody>
-      </p:sp>
-      <p:sp>
-        <p:nvSpPr>
-          <p:cNvPr id="23" name="Oval 22"/>
-          <p:cNvSpPr/>
-          <p:nvPr/>
-        </p:nvSpPr>
-        <p:spPr>
-          <a:xfrm>
-            <a:off x="4566818" y="4251960"/>
-            <a:ext cx="457200" cy="457200"/>
-          </a:xfrm>
-          <a:prstGeom prst="ellipse">
-            <a:avLst/>
-          </a:prstGeom>
-          <a:solidFill>
-            <a:srgbClr val="F2B705"/>
-          </a:solidFill>
-          <a:ln>
-            <a:noFill/>
-          </a:ln>
-          <a:effectLst/>
-        </p:spPr>
-        <p:style>
-          <a:lnRef idx="1">
-            <a:schemeClr val="accent1"/>
-          </a:lnRef>
-          <a:fillRef idx="3">
-            <a:schemeClr val="accent1"/>
-          </a:fillRef>
-          <a:effectRef idx="2">
-            <a:schemeClr val="accent1"/>
-          </a:effectRef>
-          <a:fontRef idx="minor">
-            <a:schemeClr val="lt1"/>
-          </a:fontRef>
-        </p:style>
-        <p:txBody>
-          <a:bodyPr rtlCol="0" anchor="ctr" lIns="0" rIns="0" tIns="0" bIns="0"/>
-          <a:lstStyle/>
-          <a:p>
-            <a:pPr algn="ctr"/>
-            <a:r>
-              <a:rPr sz="1500" b="1">
-                <a:solidFill>
-                  <a:srgbClr val="202122"/>
-                </a:solidFill>
-                <a:latin typeface="Calibri"/>
-              </a:rPr>
-              <a:t>5</a:t>
-            </a:r>
-          </a:p>
-        </p:txBody>
-      </p:sp>
-      <p:sp>
-        <p:nvSpPr>
-          <p:cNvPr id="24" name="TextBox 23"/>
-          <p:cNvSpPr txBox="1"/>
-          <p:nvPr/>
-        </p:nvSpPr>
-        <p:spPr>
-          <a:xfrm>
-            <a:off x="5161178" y="4224528"/>
-            <a:ext cx="2509418" cy="512064"/>
-          </a:xfrm>
-          <a:prstGeom prst="rect">
-            <a:avLst/>
-          </a:prstGeom>
-          <a:noFill/>
-        </p:spPr>
-        <p:txBody>
-          <a:bodyPr wrap="square" anchor="ctr" lIns="0" rIns="0" tIns="0" bIns="0"/>
-          <a:lstStyle/>
-          <a:p>
-            <a:pPr algn="l"/>
-            <a:r>
-              <a:rPr sz="1600" b="1" i="0">
-                <a:solidFill>
-                  <a:srgbClr val="03306E"/>
-                </a:solidFill>
-                <a:latin typeface="Calibri"/>
-              </a:rPr>
-              <a:t>Critical Path Analysis</a:t>
-            </a:r>
-          </a:p>
-        </p:txBody>
-      </p:sp>
-      <p:sp>
-        <p:nvSpPr>
-          <p:cNvPr id="25" name="TextBox 24"/>
-          <p:cNvSpPr txBox="1"/>
-          <p:nvPr/>
-        </p:nvSpPr>
-        <p:spPr>
-          <a:xfrm>
-            <a:off x="4566818" y="4892040"/>
-            <a:ext cx="3058058" cy="1143000"/>
-          </a:xfrm>
-          <a:prstGeom prst="rect">
-            <a:avLst/>
-          </a:prstGeom>
-          <a:noFill/>
-        </p:spPr>
-        <p:txBody>
-          <a:bodyPr wrap="square" anchor="t" lIns="0" rIns="0" tIns="0" bIns="0"/>
-          <a:lstStyle/>
-          <a:p>
-            <a:pPr algn="l"/>
-            <a:r>
-              <a:rPr sz="1800" b="0" i="0">
-                <a:solidFill>
-                  <a:srgbClr val="202122"/>
-                </a:solidFill>
-                <a:latin typeface="Calibri"/>
-              </a:rPr>
-              <a:t>Finds the longest chain of dependent tasks: the shortest possible project length.</a:t>
+              <a:rPr sz="2200" b="0" i="0">
+                <a:solidFill>
+                  <a:srgbClr val="FFFFFF"/>
+                </a:solidFill>
+                <a:latin typeface="Cambria"/>
+              </a:rPr>
+              <a:t>Risk assessments exist to ensure continuity of service, health and safety, and regulatory compliance.</a:t>
             </a:r>
           </a:p>
         </p:txBody>
@@ -9266,7 +13225,7 @@
                 </a:solidFill>
                 <a:latin typeface="Cambria"/>
               </a:rPr>
-              <a:t>Finding the critical path</a:t>
+              <a:t>Waterfall and Agile</a:t>
             </a:r>
           </a:p>
         </p:txBody>
@@ -9345,8 +13304,8 @@
         </p:nvSpPr>
         <p:spPr>
           <a:xfrm>
-            <a:off x="548640" y="1600200"/>
-            <a:ext cx="6675120" cy="4572000"/>
+            <a:off x="548640" y="1554480"/>
+            <a:ext cx="6720840" cy="4617720"/>
           </a:xfrm>
           <a:prstGeom prst="rect">
             <a:avLst/>
@@ -9359,108 +13318,51 @@
           </a:bodyPr>
           <a:lstStyle/>
           <a:p>
-            <a:pPr marL="274320" indent="-274320">
+            <a:pPr>
               <a:spcAft>
-                <a:spcPts val="1080"/>
+                <a:spcPts val="1260"/>
               </a:spcAft>
-              <a:buClr>
-                <a:srgbClr val="0645AD"/>
-              </a:buClr>
-              <a:buFont typeface="Arial"/>
-              <a:buChar char="•"/>
             </a:pPr>
             <a:r>
-              <a:rPr sz="2400" b="0">
+              <a:rPr sz="2100" b="0">
                 <a:solidFill>
                   <a:srgbClr val="202122"/>
                 </a:solidFill>
                 <a:latin typeface="Calibri"/>
               </a:rPr>
-              <a:t>List every task with its duration and dependencies (a precedence table).</a:t>
-            </a:r>
-          </a:p>
-          <a:p>
-            <a:pPr marL="274320" indent="-274320">
+              <a:t>Waterfall runs a project in fixed stages: requirements, design, build, test, deploy. Each stage is finished and signed off before the next begins. It's easy to plan and cost, and produces thorough documentation, but changes late on are expensive.</a:t>
+            </a:r>
+          </a:p>
+          <a:p>
+            <a:pPr>
               <a:spcAft>
-                <a:spcPts val="1080"/>
+                <a:spcPts val="1260"/>
               </a:spcAft>
-              <a:buClr>
-                <a:srgbClr val="0645AD"/>
-              </a:buClr>
-              <a:buFont typeface="Arial"/>
-              <a:buChar char="•"/>
             </a:pPr>
             <a:r>
-              <a:rPr sz="2400" b="0">
+              <a:rPr sz="2100" b="0">
                 <a:solidFill>
                   <a:srgbClr val="202122"/>
                 </a:solidFill>
                 <a:latin typeface="Calibri"/>
               </a:rPr>
-              <a:t>Draw the tasks as a network in dependency order.</a:t>
-            </a:r>
-          </a:p>
-          <a:p>
-            <a:pPr marL="274320" indent="-274320">
+              <a:t>Agile delivers the project in short iterations (often two-week sprints). Each one produces a working piece that the customer reviews, and requirements can change as you learn. It copes well with change, but the final cost and date are harder to predict.</a:t>
+            </a:r>
+          </a:p>
+          <a:p>
+            <a:pPr>
               <a:spcAft>
-                <a:spcPts val="1080"/>
+                <a:spcPts val="1260"/>
               </a:spcAft>
-              <a:buClr>
-                <a:srgbClr val="0645AD"/>
-              </a:buClr>
-              <a:buFont typeface="Arial"/>
-              <a:buChar char="•"/>
             </a:pPr>
             <a:r>
-              <a:rPr sz="2400" b="0">
+              <a:rPr sz="2100" b="0">
                 <a:solidFill>
                   <a:srgbClr val="202122"/>
                 </a:solidFill>
                 <a:latin typeface="Calibri"/>
               </a:rPr>
-              <a:t>Add up the duration along every route from start to finish.</a:t>
-            </a:r>
-          </a:p>
-          <a:p>
-            <a:pPr marL="274320" indent="-274320">
-              <a:spcAft>
-                <a:spcPts val="1080"/>
-              </a:spcAft>
-              <a:buClr>
-                <a:srgbClr val="0645AD"/>
-              </a:buClr>
-              <a:buFont typeface="Arial"/>
-              <a:buChar char="•"/>
-            </a:pPr>
-            <a:r>
-              <a:rPr sz="2400" b="0">
-                <a:solidFill>
-                  <a:srgbClr val="202122"/>
-                </a:solidFill>
-                <a:latin typeface="Calibri"/>
-              </a:rPr>
-              <a:t>The longest route is the critical path.</a:t>
-            </a:r>
-          </a:p>
-          <a:p>
-            <a:pPr marL="274320" indent="-274320">
-              <a:spcAft>
-                <a:spcPts val="1080"/>
-              </a:spcAft>
-              <a:buClr>
-                <a:srgbClr val="0645AD"/>
-              </a:buClr>
-              <a:buFont typeface="Arial"/>
-              <a:buChar char="•"/>
-            </a:pPr>
-            <a:r>
-              <a:rPr sz="2400" b="0">
-                <a:solidFill>
-                  <a:srgbClr val="202122"/>
-                </a:solidFill>
-                <a:latin typeface="Calibri"/>
-              </a:rPr>
-              <a:t>A delay to any task on it delays the whole project.</a:t>
+              <a:t>Choose Waterfall when requirements are clear and fixed; choose Agile when they're likely to change.</a:t>
             </a:r>
           </a:p>
         </p:txBody>
@@ -9473,8 +13375,8 @@
         </p:nvSpPr>
         <p:spPr>
           <a:xfrm>
-            <a:off x="7772400" y="1600200"/>
-            <a:ext cx="3867912" cy="4434840"/>
+            <a:off x="7772400" y="1554480"/>
+            <a:ext cx="3867912" cy="4526280"/>
           </a:xfrm>
           <a:prstGeom prst="roundRect">
             <a:avLst>
@@ -9517,7 +13419,7 @@
         </p:nvSpPr>
         <p:spPr>
           <a:xfrm>
-            <a:off x="8046720" y="1874519"/>
+            <a:off x="8046720" y="1828800"/>
             <a:ext cx="548640" cy="548640"/>
           </a:xfrm>
           <a:prstGeom prst="ellipse">
@@ -9551,13 +13453,13 @@
           <a:p>
             <a:pPr algn="ctr"/>
             <a:r>
-              <a:rPr sz="2000" b="1">
+              <a:rPr sz="1300" b="1">
                 <a:solidFill>
                   <a:srgbClr val="202122"/>
                 </a:solidFill>
                 <a:latin typeface="Calibri"/>
               </a:rPr>
-              <a:t>!</a:t>
+              <a:t>e.g.</a:t>
             </a:r>
           </a:p>
         </p:txBody>
@@ -9570,7 +13472,7 @@
         </p:nvSpPr>
         <p:spPr>
           <a:xfrm>
-            <a:off x="8046720" y="2606040"/>
+            <a:off x="8046720" y="2560320"/>
             <a:ext cx="3291840" cy="365760"/>
           </a:xfrm>
           <a:prstGeom prst="rect">
@@ -9590,7 +13492,7 @@
                 </a:solidFill>
                 <a:latin typeface="Calibri"/>
               </a:rPr>
-              <a:t>KEY IDEA</a:t>
+              <a:t>EXAMPLE</a:t>
             </a:r>
           </a:p>
         </p:txBody>
@@ -9603,8 +13505,8 @@
         </p:nvSpPr>
         <p:spPr>
           <a:xfrm>
-            <a:off x="8046720" y="3017520"/>
-            <a:ext cx="3291840" cy="2926080"/>
+            <a:off x="8046720" y="2971800"/>
+            <a:ext cx="3291840" cy="2971800"/>
           </a:xfrm>
           <a:prstGeom prst="rect">
             <a:avLst/>
@@ -9617,13 +13519,13 @@
           <a:p>
             <a:pPr algn="l"/>
             <a:r>
-              <a:rPr sz="2200" b="0" i="0">
+              <a:rPr sz="1900" b="0" i="0">
                 <a:solidFill>
                   <a:srgbClr val="FFFFFF"/>
                 </a:solidFill>
                 <a:latin typeface="Cambria"/>
               </a:rPr>
-              <a:t>Tasks not on the critical path have float: spare time they can slip without delaying the finish.</a:t>
+              <a:t>Installing cabling in a new building: Waterfall, because the plans are fixed. Building a new staff self-service portal: Agile, because users will want changes once they try it.</a:t>
             </a:r>
           </a:p>
         </p:txBody>
@@ -9715,7 +13617,7 @@
                 </a:solidFill>
                 <a:latin typeface="Cambria"/>
               </a:rPr>
-              <a:t>Check your understanding</a:t>
+              <a:t>Waterfall and Agile</a:t>
             </a:r>
           </a:p>
         </p:txBody>
@@ -9788,20 +13690,22 @@
       </p:sp>
       <p:sp>
         <p:nvSpPr>
-          <p:cNvPr id="6" name="Oval 5"/>
+          <p:cNvPr id="6" name="Rounded Rectangle 5"/>
           <p:cNvSpPr/>
           <p:nvPr/>
         </p:nvSpPr>
         <p:spPr>
           <a:xfrm>
-            <a:off x="548640" y="1618488"/>
-            <a:ext cx="411480" cy="411480"/>
-          </a:xfrm>
-          <a:prstGeom prst="ellipse">
-            <a:avLst/>
+            <a:off x="548640" y="1600200"/>
+            <a:ext cx="5364327" cy="640080"/>
+          </a:xfrm>
+          <a:prstGeom prst="roundRect">
+            <a:avLst>
+              <a:gd name="adj" fmla="val 15000"/>
+            </a:avLst>
           </a:prstGeom>
           <a:solidFill>
-            <a:srgbClr val="F2B705"/>
+            <a:srgbClr val="03306E"/>
           </a:solidFill>
           <a:ln>
             <a:noFill/>
@@ -9823,20 +13727,9 @@
           </a:fontRef>
         </p:style>
         <p:txBody>
-          <a:bodyPr rtlCol="0" anchor="ctr" lIns="0" rIns="0" tIns="0" bIns="0"/>
-          <a:lstStyle/>
-          <a:p>
-            <a:pPr algn="ctr"/>
-            <a:r>
-              <a:rPr sz="1400" b="1">
-                <a:solidFill>
-                  <a:srgbClr val="202122"/>
-                </a:solidFill>
-                <a:latin typeface="Calibri"/>
-              </a:rPr>
-              <a:t>1</a:t>
-            </a:r>
-          </a:p>
+          <a:bodyPr rtlCol="0" anchor="ctr"/>
+          <a:lstStyle/>
+          <a:p/>
         </p:txBody>
       </p:sp>
       <p:sp>
@@ -9847,47 +13740,49 @@
         </p:nvSpPr>
         <p:spPr>
           <a:xfrm>
-            <a:off x="1234440" y="1600200"/>
-            <a:ext cx="10408615" cy="791870"/>
-          </a:xfrm>
-          <a:prstGeom prst="rect">
-            <a:avLst/>
-          </a:prstGeom>
-          <a:noFill/>
-        </p:spPr>
-        <p:txBody>
-          <a:bodyPr wrap="square" anchor="t" lIns="0" rIns="0" tIns="0" bIns="0"/>
+            <a:off x="777240" y="1600200"/>
+            <a:ext cx="4907127" cy="640080"/>
+          </a:xfrm>
+          <a:prstGeom prst="rect">
+            <a:avLst/>
+          </a:prstGeom>
+          <a:noFill/>
+        </p:spPr>
+        <p:txBody>
+          <a:bodyPr wrap="square" anchor="ctr" lIns="0" rIns="0" tIns="0" bIns="0"/>
           <a:lstStyle/>
           <a:p>
             <a:pPr algn="l"/>
             <a:r>
-              <a:rPr sz="2200" b="0" i="0">
-                <a:solidFill>
-                  <a:srgbClr val="202122"/>
-                </a:solidFill>
-                <a:latin typeface="Calibri"/>
-              </a:rPr>
-              <a:t>A risk is 'probable' and 'critical'. What is its score?</a:t>
-            </a:r>
-          </a:p>
-        </p:txBody>
-      </p:sp>
-      <p:sp>
-        <p:nvSpPr>
-          <p:cNvPr id="8" name="Oval 7"/>
+              <a:rPr sz="2000" b="1" i="0">
+                <a:solidFill>
+                  <a:srgbClr val="FFFFFF"/>
+                </a:solidFill>
+                <a:latin typeface="Calibri"/>
+              </a:rPr>
+              <a:t>Waterfall</a:t>
+            </a:r>
+          </a:p>
+        </p:txBody>
+      </p:sp>
+      <p:sp>
+        <p:nvSpPr>
+          <p:cNvPr id="8" name="Rounded Rectangle 7"/>
           <p:cNvSpPr/>
           <p:nvPr/>
         </p:nvSpPr>
         <p:spPr>
           <a:xfrm>
-            <a:off x="548640" y="2574950"/>
-            <a:ext cx="411480" cy="411480"/>
-          </a:xfrm>
-          <a:prstGeom prst="ellipse">
-            <a:avLst/>
+            <a:off x="548640" y="2377440"/>
+            <a:ext cx="5364327" cy="3794760"/>
+          </a:xfrm>
+          <a:prstGeom prst="roundRect">
+            <a:avLst>
+              <a:gd name="adj" fmla="val 4000"/>
+            </a:avLst>
           </a:prstGeom>
           <a:solidFill>
-            <a:srgbClr val="F2B705"/>
+            <a:srgbClr val="EAF3FF"/>
           </a:solidFill>
           <a:ln>
             <a:noFill/>
@@ -9909,71 +13804,157 @@
           </a:fontRef>
         </p:style>
         <p:txBody>
-          <a:bodyPr rtlCol="0" anchor="ctr" lIns="0" rIns="0" tIns="0" bIns="0"/>
-          <a:lstStyle/>
-          <a:p>
-            <a:pPr algn="ctr"/>
-            <a:r>
-              <a:rPr sz="1400" b="1">
+          <a:bodyPr rtlCol="0" anchor="ctr"/>
+          <a:lstStyle/>
+          <a:p/>
+        </p:txBody>
+      </p:sp>
+      <p:sp>
+        <p:nvSpPr>
+          <p:cNvPr id="9" name="TextBox 8"/>
+          <p:cNvSpPr txBox="1"/>
+          <p:nvPr/>
+        </p:nvSpPr>
+        <p:spPr>
+          <a:xfrm>
+            <a:off x="822959" y="2606040"/>
+            <a:ext cx="4815687" cy="3337560"/>
+          </a:xfrm>
+          <a:prstGeom prst="rect">
+            <a:avLst/>
+          </a:prstGeom>
+          <a:noFill/>
+        </p:spPr>
+        <p:txBody>
+          <a:bodyPr wrap="square" lIns="0" rIns="0" tIns="0" bIns="0">
+            <a:spAutoFit/>
+          </a:bodyPr>
+          <a:lstStyle/>
+          <a:p>
+            <a:pPr marL="274320" indent="-274320">
+              <a:spcAft>
+                <a:spcPts val="945"/>
+              </a:spcAft>
+              <a:buClr>
+                <a:srgbClr val="0645AD"/>
+              </a:buClr>
+              <a:buFont typeface="Arial"/>
+              <a:buChar char="•"/>
+            </a:pPr>
+            <a:r>
+              <a:rPr sz="2100" b="0">
                 <a:solidFill>
                   <a:srgbClr val="202122"/>
                 </a:solidFill>
                 <a:latin typeface="Calibri"/>
               </a:rPr>
-              <a:t>2</a:t>
-            </a:r>
-          </a:p>
-        </p:txBody>
-      </p:sp>
-      <p:sp>
-        <p:nvSpPr>
-          <p:cNvPr id="9" name="TextBox 8"/>
-          <p:cNvSpPr txBox="1"/>
-          <p:nvPr/>
-        </p:nvSpPr>
-        <p:spPr>
-          <a:xfrm>
-            <a:off x="1234440" y="2556662"/>
-            <a:ext cx="10408615" cy="791870"/>
-          </a:xfrm>
-          <a:prstGeom prst="rect">
-            <a:avLst/>
-          </a:prstGeom>
-          <a:noFill/>
-        </p:spPr>
-        <p:txBody>
-          <a:bodyPr wrap="square" anchor="t" lIns="0" rIns="0" tIns="0" bIns="0"/>
-          <a:lstStyle/>
-          <a:p>
-            <a:pPr algn="l"/>
-            <a:r>
-              <a:rPr sz="2200" b="0" i="0">
+              <a:t>Linear stages completed in order</a:t>
+            </a:r>
+          </a:p>
+          <a:p>
+            <a:pPr marL="274320" indent="-274320">
+              <a:spcAft>
+                <a:spcPts val="945"/>
+              </a:spcAft>
+              <a:buClr>
+                <a:srgbClr val="0645AD"/>
+              </a:buClr>
+              <a:buFont typeface="Arial"/>
+              <a:buChar char="•"/>
+            </a:pPr>
+            <a:r>
+              <a:rPr sz="2100" b="0">
                 <a:solidFill>
                   <a:srgbClr val="202122"/>
                 </a:solidFill>
                 <a:latin typeface="Calibri"/>
               </a:rPr>
-              <a:t>Name three things a risk assessment should record.</a:t>
-            </a:r>
-          </a:p>
-        </p:txBody>
-      </p:sp>
-      <p:sp>
-        <p:nvSpPr>
-          <p:cNvPr id="10" name="Oval 9"/>
+              <a:t>Requirements fixed at the start</a:t>
+            </a:r>
+          </a:p>
+          <a:p>
+            <a:pPr marL="274320" indent="-274320">
+              <a:spcAft>
+                <a:spcPts val="945"/>
+              </a:spcAft>
+              <a:buClr>
+                <a:srgbClr val="0645AD"/>
+              </a:buClr>
+              <a:buFont typeface="Arial"/>
+              <a:buChar char="•"/>
+            </a:pPr>
+            <a:r>
+              <a:rPr sz="2100" b="0">
+                <a:solidFill>
+                  <a:srgbClr val="202122"/>
+                </a:solidFill>
+                <a:latin typeface="Calibri"/>
+              </a:rPr>
+              <a:t>Easy to plan, budget and document</a:t>
+            </a:r>
+          </a:p>
+          <a:p>
+            <a:pPr marL="274320" indent="-274320">
+              <a:spcAft>
+                <a:spcPts val="945"/>
+              </a:spcAft>
+              <a:buClr>
+                <a:srgbClr val="0645AD"/>
+              </a:buClr>
+              <a:buFont typeface="Arial"/>
+              <a:buChar char="•"/>
+            </a:pPr>
+            <a:r>
+              <a:rPr sz="2100" b="0">
+                <a:solidFill>
+                  <a:srgbClr val="202122"/>
+                </a:solidFill>
+                <a:latin typeface="Calibri"/>
+              </a:rPr>
+              <a:t>Hard to change once a stage is finished</a:t>
+            </a:r>
+          </a:p>
+          <a:p>
+            <a:pPr marL="274320" indent="-274320">
+              <a:spcAft>
+                <a:spcPts val="945"/>
+              </a:spcAft>
+              <a:buClr>
+                <a:srgbClr val="0645AD"/>
+              </a:buClr>
+              <a:buFont typeface="Arial"/>
+              <a:buChar char="•"/>
+            </a:pPr>
+            <a:r>
+              <a:rPr sz="2100" b="0">
+                <a:solidFill>
+                  <a:srgbClr val="202122"/>
+                </a:solidFill>
+                <a:latin typeface="Calibri"/>
+              </a:rPr>
+              <a:t>Suits projects with clear, stable requirements</a:t>
+            </a:r>
+          </a:p>
+        </p:txBody>
+      </p:sp>
+      <p:sp>
+        <p:nvSpPr>
+          <p:cNvPr id="10" name="Rounded Rectangle 9"/>
           <p:cNvSpPr/>
           <p:nvPr/>
         </p:nvSpPr>
         <p:spPr>
           <a:xfrm>
-            <a:off x="548640" y="3531412"/>
-            <a:ext cx="411480" cy="411480"/>
-          </a:xfrm>
-          <a:prstGeom prst="ellipse">
-            <a:avLst/>
+            <a:off x="6278727" y="1600200"/>
+            <a:ext cx="5364327" cy="640080"/>
+          </a:xfrm>
+          <a:prstGeom prst="roundRect">
+            <a:avLst>
+              <a:gd name="adj" fmla="val 15000"/>
+            </a:avLst>
           </a:prstGeom>
           <a:solidFill>
-            <a:srgbClr val="F2B705"/>
+            <a:srgbClr val="0645AD"/>
           </a:solidFill>
           <a:ln>
             <a:noFill/>
@@ -9995,20 +13976,9 @@
           </a:fontRef>
         </p:style>
         <p:txBody>
-          <a:bodyPr rtlCol="0" anchor="ctr" lIns="0" rIns="0" tIns="0" bIns="0"/>
-          <a:lstStyle/>
-          <a:p>
-            <a:pPr algn="ctr"/>
-            <a:r>
-              <a:rPr sz="1400" b="1">
-                <a:solidFill>
-                  <a:srgbClr val="202122"/>
-                </a:solidFill>
-                <a:latin typeface="Calibri"/>
-              </a:rPr>
-              <a:t>3</a:t>
-            </a:r>
-          </a:p>
+          <a:bodyPr rtlCol="0" anchor="ctr"/>
+          <a:lstStyle/>
+          <a:p/>
         </p:txBody>
       </p:sp>
       <p:sp>
@@ -10019,47 +13989,49 @@
         </p:nvSpPr>
         <p:spPr>
           <a:xfrm>
-            <a:off x="1234440" y="3513124"/>
-            <a:ext cx="10408615" cy="791870"/>
-          </a:xfrm>
-          <a:prstGeom prst="rect">
-            <a:avLst/>
-          </a:prstGeom>
-          <a:noFill/>
-        </p:spPr>
-        <p:txBody>
-          <a:bodyPr wrap="square" anchor="t" lIns="0" rIns="0" tIns="0" bIns="0"/>
+            <a:off x="6507327" y="1600200"/>
+            <a:ext cx="4907127" cy="640080"/>
+          </a:xfrm>
+          <a:prstGeom prst="rect">
+            <a:avLst/>
+          </a:prstGeom>
+          <a:noFill/>
+        </p:spPr>
+        <p:txBody>
+          <a:bodyPr wrap="square" anchor="ctr" lIns="0" rIns="0" tIns="0" bIns="0"/>
           <a:lstStyle/>
           <a:p>
             <a:pPr algn="l"/>
             <a:r>
-              <a:rPr sz="2200" b="0" i="0">
-                <a:solidFill>
-                  <a:srgbClr val="202122"/>
-                </a:solidFill>
-                <a:latin typeface="Calibri"/>
-              </a:rPr>
-              <a:t>Which methodology suits a project whose requirements will change?</a:t>
-            </a:r>
-          </a:p>
-        </p:txBody>
-      </p:sp>
-      <p:sp>
-        <p:nvSpPr>
-          <p:cNvPr id="12" name="Oval 11"/>
+              <a:rPr sz="2000" b="1" i="0">
+                <a:solidFill>
+                  <a:srgbClr val="FFFFFF"/>
+                </a:solidFill>
+                <a:latin typeface="Calibri"/>
+              </a:rPr>
+              <a:t>Agile</a:t>
+            </a:r>
+          </a:p>
+        </p:txBody>
+      </p:sp>
+      <p:sp>
+        <p:nvSpPr>
+          <p:cNvPr id="12" name="Rounded Rectangle 11"/>
           <p:cNvSpPr/>
           <p:nvPr/>
         </p:nvSpPr>
         <p:spPr>
           <a:xfrm>
-            <a:off x="548640" y="4487875"/>
-            <a:ext cx="411480" cy="411480"/>
-          </a:xfrm>
-          <a:prstGeom prst="ellipse">
-            <a:avLst/>
+            <a:off x="6278727" y="2377440"/>
+            <a:ext cx="5364327" cy="3794760"/>
+          </a:xfrm>
+          <a:prstGeom prst="roundRect">
+            <a:avLst>
+              <a:gd name="adj" fmla="val 4000"/>
+            </a:avLst>
           </a:prstGeom>
           <a:solidFill>
-            <a:srgbClr val="F2B705"/>
+            <a:srgbClr val="EAF3FF"/>
           </a:solidFill>
           <a:ln>
             <a:noFill/>
@@ -10081,137 +14053,135 @@
           </a:fontRef>
         </p:style>
         <p:txBody>
-          <a:bodyPr rtlCol="0" anchor="ctr" lIns="0" rIns="0" tIns="0" bIns="0"/>
-          <a:lstStyle/>
-          <a:p>
-            <a:pPr algn="ctr"/>
-            <a:r>
-              <a:rPr sz="1400" b="1">
+          <a:bodyPr rtlCol="0" anchor="ctr"/>
+          <a:lstStyle/>
+          <a:p/>
+        </p:txBody>
+      </p:sp>
+      <p:sp>
+        <p:nvSpPr>
+          <p:cNvPr id="13" name="TextBox 12"/>
+          <p:cNvSpPr txBox="1"/>
+          <p:nvPr/>
+        </p:nvSpPr>
+        <p:spPr>
+          <a:xfrm>
+            <a:off x="6553047" y="2606040"/>
+            <a:ext cx="4815687" cy="3337560"/>
+          </a:xfrm>
+          <a:prstGeom prst="rect">
+            <a:avLst/>
+          </a:prstGeom>
+          <a:noFill/>
+        </p:spPr>
+        <p:txBody>
+          <a:bodyPr wrap="square" lIns="0" rIns="0" tIns="0" bIns="0">
+            <a:spAutoFit/>
+          </a:bodyPr>
+          <a:lstStyle/>
+          <a:p>
+            <a:pPr marL="274320" indent="-274320">
+              <a:spcAft>
+                <a:spcPts val="855"/>
+              </a:spcAft>
+              <a:buClr>
+                <a:srgbClr val="0645AD"/>
+              </a:buClr>
+              <a:buFont typeface="Arial"/>
+              <a:buChar char="•"/>
+            </a:pPr>
+            <a:r>
+              <a:rPr sz="1900" b="0">
                 <a:solidFill>
                   <a:srgbClr val="202122"/>
                 </a:solidFill>
                 <a:latin typeface="Calibri"/>
               </a:rPr>
-              <a:t>4</a:t>
-            </a:r>
-          </a:p>
-        </p:txBody>
-      </p:sp>
-      <p:sp>
-        <p:nvSpPr>
-          <p:cNvPr id="13" name="TextBox 12"/>
-          <p:cNvSpPr txBox="1"/>
-          <p:nvPr/>
-        </p:nvSpPr>
-        <p:spPr>
-          <a:xfrm>
-            <a:off x="1234440" y="4469587"/>
-            <a:ext cx="10408615" cy="791870"/>
-          </a:xfrm>
-          <a:prstGeom prst="rect">
-            <a:avLst/>
-          </a:prstGeom>
-          <a:noFill/>
-        </p:spPr>
-        <p:txBody>
-          <a:bodyPr wrap="square" anchor="t" lIns="0" rIns="0" tIns="0" bIns="0"/>
-          <a:lstStyle/>
-          <a:p>
-            <a:pPr algn="l"/>
-            <a:r>
-              <a:rPr sz="2200" b="0" i="0">
+              <a:t>Short iterations delivering working pieces</a:t>
+            </a:r>
+          </a:p>
+          <a:p>
+            <a:pPr marL="274320" indent="-274320">
+              <a:spcAft>
+                <a:spcPts val="855"/>
+              </a:spcAft>
+              <a:buClr>
+                <a:srgbClr val="0645AD"/>
+              </a:buClr>
+              <a:buFont typeface="Arial"/>
+              <a:buChar char="•"/>
+            </a:pPr>
+            <a:r>
+              <a:rPr sz="1900" b="0">
                 <a:solidFill>
                   <a:srgbClr val="202122"/>
                 </a:solidFill>
                 <a:latin typeface="Calibri"/>
               </a:rPr>
-              <a:t>What does a Gantt chart show?</a:t>
-            </a:r>
-          </a:p>
-        </p:txBody>
-      </p:sp>
-      <p:sp>
-        <p:nvSpPr>
-          <p:cNvPr id="14" name="Oval 13"/>
-          <p:cNvSpPr/>
-          <p:nvPr/>
-        </p:nvSpPr>
-        <p:spPr>
-          <a:xfrm>
-            <a:off x="548640" y="5444337"/>
-            <a:ext cx="411480" cy="411480"/>
-          </a:xfrm>
-          <a:prstGeom prst="ellipse">
-            <a:avLst/>
-          </a:prstGeom>
-          <a:solidFill>
-            <a:srgbClr val="F2B705"/>
-          </a:solidFill>
-          <a:ln>
-            <a:noFill/>
-          </a:ln>
-          <a:effectLst/>
-        </p:spPr>
-        <p:style>
-          <a:lnRef idx="1">
-            <a:schemeClr val="accent1"/>
-          </a:lnRef>
-          <a:fillRef idx="3">
-            <a:schemeClr val="accent1"/>
-          </a:fillRef>
-          <a:effectRef idx="2">
-            <a:schemeClr val="accent1"/>
-          </a:effectRef>
-          <a:fontRef idx="minor">
-            <a:schemeClr val="lt1"/>
-          </a:fontRef>
-        </p:style>
-        <p:txBody>
-          <a:bodyPr rtlCol="0" anchor="ctr" lIns="0" rIns="0" tIns="0" bIns="0"/>
-          <a:lstStyle/>
-          <a:p>
-            <a:pPr algn="ctr"/>
-            <a:r>
-              <a:rPr sz="1400" b="1">
+              <a:t>Requirements evolve with feedback</a:t>
+            </a:r>
+          </a:p>
+          <a:p>
+            <a:pPr marL="274320" indent="-274320">
+              <a:spcAft>
+                <a:spcPts val="855"/>
+              </a:spcAft>
+              <a:buClr>
+                <a:srgbClr val="0645AD"/>
+              </a:buClr>
+              <a:buFont typeface="Arial"/>
+              <a:buChar char="•"/>
+            </a:pPr>
+            <a:r>
+              <a:rPr sz="1900" b="0">
                 <a:solidFill>
                   <a:srgbClr val="202122"/>
                 </a:solidFill>
                 <a:latin typeface="Calibri"/>
               </a:rPr>
-              <a:t>5</a:t>
-            </a:r>
-          </a:p>
-        </p:txBody>
-      </p:sp>
-      <p:sp>
-        <p:nvSpPr>
-          <p:cNvPr id="15" name="TextBox 14"/>
-          <p:cNvSpPr txBox="1"/>
-          <p:nvPr/>
-        </p:nvSpPr>
-        <p:spPr>
-          <a:xfrm>
-            <a:off x="1234440" y="5426049"/>
-            <a:ext cx="10408615" cy="791870"/>
-          </a:xfrm>
-          <a:prstGeom prst="rect">
-            <a:avLst/>
-          </a:prstGeom>
-          <a:noFill/>
-        </p:spPr>
-        <p:txBody>
-          <a:bodyPr wrap="square" anchor="t" lIns="0" rIns="0" tIns="0" bIns="0"/>
-          <a:lstStyle/>
-          <a:p>
-            <a:pPr algn="l"/>
-            <a:r>
-              <a:rPr sz="2200" b="0" i="0">
+              <a:t>Frequent contact with the customer</a:t>
+            </a:r>
+          </a:p>
+          <a:p>
+            <a:pPr marL="274320" indent="-274320">
+              <a:spcAft>
+                <a:spcPts val="855"/>
+              </a:spcAft>
+              <a:buClr>
+                <a:srgbClr val="0645AD"/>
+              </a:buClr>
+              <a:buFont typeface="Arial"/>
+              <a:buChar char="•"/>
+            </a:pPr>
+            <a:r>
+              <a:rPr sz="1900" b="0">
                 <a:solidFill>
                   <a:srgbClr val="202122"/>
                 </a:solidFill>
                 <a:latin typeface="Calibri"/>
               </a:rPr>
-              <a:t>What happens if a task on the critical path is delayed?</a:t>
+              <a:t>Harder to predict final cost and date</a:t>
+            </a:r>
+          </a:p>
+          <a:p>
+            <a:pPr marL="274320" indent="-274320">
+              <a:spcAft>
+                <a:spcPts val="855"/>
+              </a:spcAft>
+              <a:buClr>
+                <a:srgbClr val="0645AD"/>
+              </a:buClr>
+              <a:buFont typeface="Arial"/>
+              <a:buChar char="•"/>
+            </a:pPr>
+            <a:r>
+              <a:rPr sz="1900" b="0">
+                <a:solidFill>
+                  <a:srgbClr val="202122"/>
+                </a:solidFill>
+                <a:latin typeface="Calibri"/>
+              </a:rPr>
+              <a:t>Suits projects where needs will change</a:t>
             </a:r>
           </a:p>
         </p:txBody>
@@ -10303,7 +14273,7 @@
                 </a:solidFill>
                 <a:latin typeface="Cambria"/>
               </a:rPr>
-              <a:t>Answers</a:t>
+              <a:t>Quick check: Waterfall and Agile</a:t>
             </a:r>
           </a:p>
         </p:txBody>
@@ -10382,8 +14352,8 @@
         </p:nvSpPr>
         <p:spPr>
           <a:xfrm>
-            <a:off x="548640" y="1618488"/>
-            <a:ext cx="411480" cy="411480"/>
+            <a:off x="548640" y="1691640"/>
+            <a:ext cx="502920" cy="502920"/>
           </a:xfrm>
           <a:prstGeom prst="ellipse">
             <a:avLst/>
@@ -10416,7 +14386,7 @@
           <a:p>
             <a:pPr algn="ctr"/>
             <a:r>
-              <a:rPr sz="1400" b="1">
+              <a:rPr sz="1600" b="1">
                 <a:solidFill>
                   <a:srgbClr val="202122"/>
                 </a:solidFill>
@@ -10435,8 +14405,8 @@
         </p:nvSpPr>
         <p:spPr>
           <a:xfrm>
-            <a:off x="1234440" y="1600200"/>
-            <a:ext cx="10408615" cy="791870"/>
+            <a:off x="1371600" y="1645920"/>
+            <a:ext cx="10271455" cy="1188720"/>
           </a:xfrm>
           <a:prstGeom prst="rect">
             <a:avLst/>
@@ -10449,24 +14419,13 @@
           <a:p>
             <a:pPr algn="l"/>
             <a:r>
-              <a:rPr sz="1800" b="0" i="0">
-                <a:solidFill>
-                  <a:srgbClr val="54595D"/>
-                </a:solidFill>
-                <a:latin typeface="Calibri"/>
-              </a:rPr>
-              <a:t>A risk is 'probable' and 'critical'. What is its score?</a:t>
-            </a:r>
-          </a:p>
-          <a:p>
-            <a:r>
-              <a:rPr sz="1800" b="1">
-                <a:solidFill>
-                  <a:srgbClr val="03306E"/>
-                </a:solidFill>
-                <a:latin typeface="Calibri"/>
-              </a:rPr>
-              <a:t>4 x 4 = 16.</a:t>
+              <a:rPr sz="2400" b="0" i="0">
+                <a:solidFill>
+                  <a:srgbClr val="202122"/>
+                </a:solidFill>
+                <a:latin typeface="Calibri"/>
+              </a:rPr>
+              <a:t>Which methodology delivers in short iterations?</a:t>
             </a:r>
           </a:p>
         </p:txBody>
@@ -10479,8 +14438,8 @@
         </p:nvSpPr>
         <p:spPr>
           <a:xfrm>
-            <a:off x="548640" y="2574950"/>
-            <a:ext cx="411480" cy="411480"/>
+            <a:off x="548640" y="3108960"/>
+            <a:ext cx="502920" cy="502920"/>
           </a:xfrm>
           <a:prstGeom prst="ellipse">
             <a:avLst/>
@@ -10513,7 +14472,7 @@
           <a:p>
             <a:pPr algn="ctr"/>
             <a:r>
-              <a:rPr sz="1400" b="1">
+              <a:rPr sz="1600" b="1">
                 <a:solidFill>
                   <a:srgbClr val="202122"/>
                 </a:solidFill>
@@ -10532,8 +14491,8 @@
         </p:nvSpPr>
         <p:spPr>
           <a:xfrm>
-            <a:off x="1234440" y="2556662"/>
-            <a:ext cx="10408615" cy="791870"/>
+            <a:off x="1371600" y="3063240"/>
+            <a:ext cx="10271455" cy="1188720"/>
           </a:xfrm>
           <a:prstGeom prst="rect">
             <a:avLst/>
@@ -10546,24 +14505,13 @@
           <a:p>
             <a:pPr algn="l"/>
             <a:r>
-              <a:rPr sz="1600" b="0" i="0">
-                <a:solidFill>
-                  <a:srgbClr val="54595D"/>
-                </a:solidFill>
-                <a:latin typeface="Calibri"/>
-              </a:rPr>
-              <a:t>Name three things a risk assessment should record.</a:t>
-            </a:r>
-          </a:p>
-          <a:p>
-            <a:r>
-              <a:rPr sz="1600" b="1">
-                <a:solidFill>
-                  <a:srgbClr val="03306E"/>
-                </a:solidFill>
-                <a:latin typeface="Calibri"/>
-              </a:rPr>
-              <a:t>Any three of: description, who/what could be harmed, how, existing mitigations, further mitigation, owner, due date.</a:t>
+              <a:rPr sz="2400" b="0" i="0">
+                <a:solidFill>
+                  <a:srgbClr val="202122"/>
+                </a:solidFill>
+                <a:latin typeface="Calibri"/>
+              </a:rPr>
+              <a:t>Give one drawback of Waterfall.</a:t>
             </a:r>
           </a:p>
         </p:txBody>
@@ -10576,8 +14524,8 @@
         </p:nvSpPr>
         <p:spPr>
           <a:xfrm>
-            <a:off x="548640" y="3531412"/>
-            <a:ext cx="411480" cy="411480"/>
+            <a:off x="548640" y="4526280"/>
+            <a:ext cx="502920" cy="502920"/>
           </a:xfrm>
           <a:prstGeom prst="ellipse">
             <a:avLst/>
@@ -10610,7 +14558,7 @@
           <a:p>
             <a:pPr algn="ctr"/>
             <a:r>
-              <a:rPr sz="1400" b="1">
+              <a:rPr sz="1600" b="1">
                 <a:solidFill>
                   <a:srgbClr val="202122"/>
                 </a:solidFill>
@@ -10629,8 +14577,8 @@
         </p:nvSpPr>
         <p:spPr>
           <a:xfrm>
-            <a:off x="1234440" y="3513124"/>
-            <a:ext cx="10408615" cy="791870"/>
+            <a:off x="1371600" y="4480560"/>
+            <a:ext cx="10271455" cy="1188720"/>
           </a:xfrm>
           <a:prstGeom prst="rect">
             <a:avLst/>
@@ -10643,218 +14591,46 @@
           <a:p>
             <a:pPr algn="l"/>
             <a:r>
-              <a:rPr sz="1800" b="0" i="0">
+              <a:rPr sz="2400" b="0" i="0">
+                <a:solidFill>
+                  <a:srgbClr val="202122"/>
+                </a:solidFill>
+                <a:latin typeface="Calibri"/>
+              </a:rPr>
+              <a:t>When is Waterfall a good choice?</a:t>
+            </a:r>
+          </a:p>
+        </p:txBody>
+      </p:sp>
+      <p:sp>
+        <p:nvSpPr>
+          <p:cNvPr id="12" name="TextBox 11"/>
+          <p:cNvSpPr txBox="1"/>
+          <p:nvPr/>
+        </p:nvSpPr>
+        <p:spPr>
+          <a:xfrm>
+            <a:off x="548640" y="5852160"/>
+            <a:ext cx="11094415" cy="365760"/>
+          </a:xfrm>
+          <a:prstGeom prst="rect">
+            <a:avLst/>
+          </a:prstGeom>
+          <a:noFill/>
+        </p:spPr>
+        <p:txBody>
+          <a:bodyPr wrap="square" anchor="t" lIns="0" rIns="0" tIns="0" bIns="0"/>
+          <a:lstStyle/>
+          <a:p>
+            <a:pPr algn="l"/>
+            <a:r>
+              <a:rPr sz="1300" b="0" i="1">
                 <a:solidFill>
                   <a:srgbClr val="54595D"/>
                 </a:solidFill>
                 <a:latin typeface="Calibri"/>
               </a:rPr>
-              <a:t>Which methodology suits a project whose requirements will change?</a:t>
-            </a:r>
-          </a:p>
-          <a:p>
-            <a:r>
-              <a:rPr sz="1800" b="1">
-                <a:solidFill>
-                  <a:srgbClr val="03306E"/>
-                </a:solidFill>
-                <a:latin typeface="Calibri"/>
-              </a:rPr>
-              <a:t>Agile.</a:t>
-            </a:r>
-          </a:p>
-        </p:txBody>
-      </p:sp>
-      <p:sp>
-        <p:nvSpPr>
-          <p:cNvPr id="12" name="Oval 11"/>
-          <p:cNvSpPr/>
-          <p:nvPr/>
-        </p:nvSpPr>
-        <p:spPr>
-          <a:xfrm>
-            <a:off x="548640" y="4487875"/>
-            <a:ext cx="411480" cy="411480"/>
-          </a:xfrm>
-          <a:prstGeom prst="ellipse">
-            <a:avLst/>
-          </a:prstGeom>
-          <a:solidFill>
-            <a:srgbClr val="F2B705"/>
-          </a:solidFill>
-          <a:ln>
-            <a:noFill/>
-          </a:ln>
-          <a:effectLst/>
-        </p:spPr>
-        <p:style>
-          <a:lnRef idx="1">
-            <a:schemeClr val="accent1"/>
-          </a:lnRef>
-          <a:fillRef idx="3">
-            <a:schemeClr val="accent1"/>
-          </a:fillRef>
-          <a:effectRef idx="2">
-            <a:schemeClr val="accent1"/>
-          </a:effectRef>
-          <a:fontRef idx="minor">
-            <a:schemeClr val="lt1"/>
-          </a:fontRef>
-        </p:style>
-        <p:txBody>
-          <a:bodyPr rtlCol="0" anchor="ctr" lIns="0" rIns="0" tIns="0" bIns="0"/>
-          <a:lstStyle/>
-          <a:p>
-            <a:pPr algn="ctr"/>
-            <a:r>
-              <a:rPr sz="1400" b="1">
-                <a:solidFill>
-                  <a:srgbClr val="202122"/>
-                </a:solidFill>
-                <a:latin typeface="Calibri"/>
-              </a:rPr>
-              <a:t>4</a:t>
-            </a:r>
-          </a:p>
-        </p:txBody>
-      </p:sp>
-      <p:sp>
-        <p:nvSpPr>
-          <p:cNvPr id="13" name="TextBox 12"/>
-          <p:cNvSpPr txBox="1"/>
-          <p:nvPr/>
-        </p:nvSpPr>
-        <p:spPr>
-          <a:xfrm>
-            <a:off x="1234440" y="4469587"/>
-            <a:ext cx="10408615" cy="791870"/>
-          </a:xfrm>
-          <a:prstGeom prst="rect">
-            <a:avLst/>
-          </a:prstGeom>
-          <a:noFill/>
-        </p:spPr>
-        <p:txBody>
-          <a:bodyPr wrap="square" anchor="t" lIns="0" rIns="0" tIns="0" bIns="0"/>
-          <a:lstStyle/>
-          <a:p>
-            <a:pPr algn="l"/>
-            <a:r>
-              <a:rPr sz="1800" b="0" i="0">
-                <a:solidFill>
-                  <a:srgbClr val="54595D"/>
-                </a:solidFill>
-                <a:latin typeface="Calibri"/>
-              </a:rPr>
-              <a:t>What does a Gantt chart show?</a:t>
-            </a:r>
-          </a:p>
-          <a:p>
-            <a:r>
-              <a:rPr sz="1800" b="1">
-                <a:solidFill>
-                  <a:srgbClr val="03306E"/>
-                </a:solidFill>
-                <a:latin typeface="Calibri"/>
-              </a:rPr>
-              <a:t>When each task starts and finishes on a timeline.</a:t>
-            </a:r>
-          </a:p>
-        </p:txBody>
-      </p:sp>
-      <p:sp>
-        <p:nvSpPr>
-          <p:cNvPr id="14" name="Oval 13"/>
-          <p:cNvSpPr/>
-          <p:nvPr/>
-        </p:nvSpPr>
-        <p:spPr>
-          <a:xfrm>
-            <a:off x="548640" y="5444337"/>
-            <a:ext cx="411480" cy="411480"/>
-          </a:xfrm>
-          <a:prstGeom prst="ellipse">
-            <a:avLst/>
-          </a:prstGeom>
-          <a:solidFill>
-            <a:srgbClr val="F2B705"/>
-          </a:solidFill>
-          <a:ln>
-            <a:noFill/>
-          </a:ln>
-          <a:effectLst/>
-        </p:spPr>
-        <p:style>
-          <a:lnRef idx="1">
-            <a:schemeClr val="accent1"/>
-          </a:lnRef>
-          <a:fillRef idx="3">
-            <a:schemeClr val="accent1"/>
-          </a:fillRef>
-          <a:effectRef idx="2">
-            <a:schemeClr val="accent1"/>
-          </a:effectRef>
-          <a:fontRef idx="minor">
-            <a:schemeClr val="lt1"/>
-          </a:fontRef>
-        </p:style>
-        <p:txBody>
-          <a:bodyPr rtlCol="0" anchor="ctr" lIns="0" rIns="0" tIns="0" bIns="0"/>
-          <a:lstStyle/>
-          <a:p>
-            <a:pPr algn="ctr"/>
-            <a:r>
-              <a:rPr sz="1400" b="1">
-                <a:solidFill>
-                  <a:srgbClr val="202122"/>
-                </a:solidFill>
-                <a:latin typeface="Calibri"/>
-              </a:rPr>
-              <a:t>5</a:t>
-            </a:r>
-          </a:p>
-        </p:txBody>
-      </p:sp>
-      <p:sp>
-        <p:nvSpPr>
-          <p:cNvPr id="15" name="TextBox 14"/>
-          <p:cNvSpPr txBox="1"/>
-          <p:nvPr/>
-        </p:nvSpPr>
-        <p:spPr>
-          <a:xfrm>
-            <a:off x="1234440" y="5426049"/>
-            <a:ext cx="10408615" cy="791870"/>
-          </a:xfrm>
-          <a:prstGeom prst="rect">
-            <a:avLst/>
-          </a:prstGeom>
-          <a:noFill/>
-        </p:spPr>
-        <p:txBody>
-          <a:bodyPr wrap="square" anchor="t" lIns="0" rIns="0" tIns="0" bIns="0"/>
-          <a:lstStyle/>
-          <a:p>
-            <a:pPr algn="l"/>
-            <a:r>
-              <a:rPr sz="1800" b="0" i="0">
-                <a:solidFill>
-                  <a:srgbClr val="54595D"/>
-                </a:solidFill>
-                <a:latin typeface="Calibri"/>
-              </a:rPr>
-              <a:t>What happens if a task on the critical path is delayed?</a:t>
-            </a:r>
-          </a:p>
-          <a:p>
-            <a:r>
-              <a:rPr sz="1800" b="1">
-                <a:solidFill>
-                  <a:srgbClr val="03306E"/>
-                </a:solidFill>
-                <a:latin typeface="Calibri"/>
-              </a:rPr>
-              <a:t>The whole project is delayed.</a:t>
+              <a:t>Answer on mini whiteboards or in your book. Answers are in the speaker notes.</a:t>
             </a:r>
           </a:p>
         </p:txBody>
